--- a/tool/PMP/file/report/SCI_XXVI_SNHH26_Presentacion_PMax24HAutomColombia_v1.pptx
+++ b/tool/PMP/file/report/SCI_XXVI_SNHH26_Presentacion_PMax24HAutomColombia_v1.pptx
@@ -6515,11 +6515,13 @@
         </p:nvSpPr>
         <p:spPr>
           <a:xfrm>
-            <a:off x="559391" y="2995237"/>
-            <a:ext cx="11073218" cy="1676400"/>
+            <a:off x="5083379" y="2228140"/>
+            <a:ext cx="6815739" cy="2852027"/>
           </a:xfrm>
           <a:prstGeom prst="round1Rect">
-            <a:avLst/>
+            <a:avLst>
+              <a:gd name="adj" fmla="val 0"/>
+            </a:avLst>
           </a:prstGeom>
           <a:noFill/>
           <a:ln>
@@ -6852,7 +6854,7 @@
           <a:lstStyle/>
           <a:p>
             <a:r>
-              <a:rPr lang="es-CO" sz="1200" i="1" dirty="0">
+              <a:rPr lang="es-CO" sz="1200" dirty="0">
                 <a:solidFill>
                   <a:schemeClr val="tx1"/>
                 </a:solidFill>
@@ -6860,6 +6862,170 @@
                 <a:cs typeface="Segoe UI" panose="020B0502040204020203" pitchFamily="34" charset="0"/>
               </a:rPr>
               <a:t>Centro de Estudios Hidráulicos</a:t>
+            </a:r>
+          </a:p>
+        </p:txBody>
+      </p:sp>
+      <p:grpSp>
+        <p:nvGrpSpPr>
+          <p:cNvPr id="10" name="Group 9">
+            <a:extLst>
+              <a:ext uri="{FF2B5EF4-FFF2-40B4-BE49-F238E27FC236}">
+                <a16:creationId xmlns:a16="http://schemas.microsoft.com/office/drawing/2014/main" id="{67C28A1D-451B-8CBF-3384-F5936016C2A4}"/>
+              </a:ext>
+            </a:extLst>
+          </p:cNvPr>
+          <p:cNvGrpSpPr/>
+          <p:nvPr/>
+        </p:nvGrpSpPr>
+        <p:grpSpPr>
+          <a:xfrm>
+            <a:off x="311484" y="1638660"/>
+            <a:ext cx="4475275" cy="4265846"/>
+            <a:chOff x="-78114" y="1213073"/>
+            <a:chExt cx="5523159" cy="5264692"/>
+          </a:xfrm>
+        </p:grpSpPr>
+        <p:sp>
+          <p:nvSpPr>
+            <p:cNvPr id="9" name="Oval 8">
+              <a:extLst>
+                <a:ext uri="{FF2B5EF4-FFF2-40B4-BE49-F238E27FC236}">
+                  <a16:creationId xmlns:a16="http://schemas.microsoft.com/office/drawing/2014/main" id="{CAFE6262-6DC5-60B6-DD4D-2E75F771FB9F}"/>
+                </a:ext>
+              </a:extLst>
+            </p:cNvPr>
+            <p:cNvSpPr/>
+            <p:nvPr/>
+          </p:nvSpPr>
+          <p:spPr>
+            <a:xfrm>
+              <a:off x="-78114" y="1213073"/>
+              <a:ext cx="5523159" cy="5264692"/>
+            </a:xfrm>
+            <a:prstGeom prst="ellipse">
+              <a:avLst/>
+            </a:prstGeom>
+            <a:solidFill>
+              <a:srgbClr val="FFFFFF"/>
+            </a:solidFill>
+            <a:ln>
+              <a:noFill/>
+            </a:ln>
+          </p:spPr>
+          <p:style>
+            <a:lnRef idx="2">
+              <a:schemeClr val="accent1">
+                <a:shade val="15000"/>
+              </a:schemeClr>
+            </a:lnRef>
+            <a:fillRef idx="1">
+              <a:schemeClr val="accent1"/>
+            </a:fillRef>
+            <a:effectRef idx="0">
+              <a:schemeClr val="accent1"/>
+            </a:effectRef>
+            <a:fontRef idx="minor">
+              <a:schemeClr val="lt1"/>
+            </a:fontRef>
+          </p:style>
+          <p:txBody>
+            <a:bodyPr rtlCol="0" anchor="ctr"/>
+            <a:lstStyle/>
+            <a:p>
+              <a:pPr algn="ctr"/>
+              <a:endParaRPr lang="es-CO"/>
+            </a:p>
+          </p:txBody>
+        </p:sp>
+        <p:pic>
+          <p:nvPicPr>
+            <p:cNvPr id="5" name="Picture 4">
+              <a:extLst>
+                <a:ext uri="{FF2B5EF4-FFF2-40B4-BE49-F238E27FC236}">
+                  <a16:creationId xmlns:a16="http://schemas.microsoft.com/office/drawing/2014/main" id="{ED3E1D41-7140-EC96-DB69-C691106F76A0}"/>
+                </a:ext>
+              </a:extLst>
+            </p:cNvPr>
+            <p:cNvPicPr>
+              <a:picLocks noChangeAspect="1"/>
+            </p:cNvPicPr>
+            <p:nvPr/>
+          </p:nvPicPr>
+          <p:blipFill>
+            <a:blip r:embed="rId5"/>
+            <a:stretch>
+              <a:fillRect/>
+            </a:stretch>
+          </p:blipFill>
+          <p:spPr>
+            <a:xfrm>
+              <a:off x="766433" y="1957459"/>
+              <a:ext cx="3775985" cy="3775985"/>
+            </a:xfrm>
+            <a:prstGeom prst="rect">
+              <a:avLst/>
+            </a:prstGeom>
+          </p:spPr>
+        </p:pic>
+      </p:grpSp>
+      <p:sp>
+        <p:nvSpPr>
+          <p:cNvPr id="7" name="Rectangle: Single Corner Rounded 6">
+            <a:extLst>
+              <a:ext uri="{FF2B5EF4-FFF2-40B4-BE49-F238E27FC236}">
+                <a16:creationId xmlns:a16="http://schemas.microsoft.com/office/drawing/2014/main" id="{70D9F6E0-D0E0-4448-A8BC-2EAAB01A7BA3}"/>
+              </a:ext>
+            </a:extLst>
+          </p:cNvPr>
+          <p:cNvSpPr/>
+          <p:nvPr/>
+        </p:nvSpPr>
+        <p:spPr>
+          <a:xfrm>
+            <a:off x="699179" y="5210113"/>
+            <a:ext cx="3699883" cy="364013"/>
+          </a:xfrm>
+          <a:prstGeom prst="round1Rect">
+            <a:avLst>
+              <a:gd name="adj" fmla="val 0"/>
+            </a:avLst>
+          </a:prstGeom>
+          <a:noFill/>
+          <a:ln>
+            <a:noFill/>
+          </a:ln>
+        </p:spPr>
+        <p:style>
+          <a:lnRef idx="2">
+            <a:schemeClr val="accent1">
+              <a:shade val="50000"/>
+            </a:schemeClr>
+          </a:lnRef>
+          <a:fillRef idx="1">
+            <a:schemeClr val="accent1"/>
+          </a:fillRef>
+          <a:effectRef idx="0">
+            <a:schemeClr val="accent1"/>
+          </a:effectRef>
+          <a:fontRef idx="minor">
+            <a:schemeClr val="lt1"/>
+          </a:fontRef>
+        </p:style>
+        <p:txBody>
+          <a:bodyPr rtlCol="0" anchor="ctr"/>
+          <a:lstStyle/>
+          <a:p>
+            <a:pPr algn="ctr"/>
+            <a:r>
+              <a:rPr lang="es-CO" sz="1200" i="1" dirty="0">
+                <a:solidFill>
+                  <a:schemeClr val="tx1"/>
+                </a:solidFill>
+                <a:latin typeface="Segoe UI" panose="020B0502040204020203" pitchFamily="34" charset="0"/>
+                <a:cs typeface="Segoe UI" panose="020B0502040204020203" pitchFamily="34" charset="0"/>
+              </a:rPr>
+              <a:t>Accede al repositorio público</a:t>
             </a:r>
           </a:p>
         </p:txBody>
@@ -7054,7 +7220,7 @@
         </p:nvSpPr>
         <p:spPr>
           <a:xfrm>
-            <a:off x="0" y="0"/>
+            <a:off x="0" y="6550223"/>
             <a:ext cx="12192000" cy="307777"/>
           </a:xfrm>
           <a:prstGeom prst="rect">
@@ -7071,20 +7237,15 @@
             <a:r>
               <a:rPr lang="es-CO" sz="1400" dirty="0">
                 <a:solidFill>
-                  <a:schemeClr val="tx1"/>
+                  <a:schemeClr val="bg1">
+                    <a:lumMod val="75000"/>
+                  </a:schemeClr>
                 </a:solidFill>
                 <a:latin typeface="Segoe UI" panose="020B0502040204020203" pitchFamily="34" charset="0"/>
                 <a:cs typeface="Segoe UI" panose="020B0502040204020203" pitchFamily="34" charset="0"/>
               </a:rPr>
               <a:t>Estudio y Análisis de la Precipitación Máxima en 24 Horas (Pmax24h) en la Red de Estaciones Climatológicas Automáticas de Colombia</a:t>
             </a:r>
-            <a:endParaRPr lang="es-CO" sz="1400" i="1" dirty="0">
-              <a:solidFill>
-                <a:schemeClr val="tx1"/>
-              </a:solidFill>
-              <a:latin typeface="Segoe UI" panose="020B0502040204020203" pitchFamily="34" charset="0"/>
-              <a:cs typeface="Segoe UI" panose="020B0502040204020203" pitchFamily="34" charset="0"/>
-            </a:endParaRPr>
           </a:p>
         </p:txBody>
       </p:sp>
@@ -7104,6 +7265,14 @@
 <file path=ppt/slides/slide3.xml><?xml version="1.0" encoding="utf-8"?>
 <p:sld xmlns:a="http://schemas.openxmlformats.org/drawingml/2006/main" xmlns:r="http://schemas.openxmlformats.org/officeDocument/2006/relationships" xmlns:p="http://schemas.openxmlformats.org/presentationml/2006/main">
   <p:cSld>
+    <p:bg>
+      <p:bgPr>
+        <a:solidFill>
+          <a:srgbClr val="F0F0F0"/>
+        </a:solidFill>
+        <a:effectLst/>
+      </p:bgPr>
+    </p:bg>
     <p:spTree>
       <p:nvGrpSpPr>
         <p:cNvPr id="1" name=""/>
@@ -7239,6 +7408,36 @@
           </a:p>
         </p:txBody>
       </p:sp>
+      <p:pic>
+        <p:nvPicPr>
+          <p:cNvPr id="9" name="Picture 8">
+            <a:extLst>
+              <a:ext uri="{FF2B5EF4-FFF2-40B4-BE49-F238E27FC236}">
+                <a16:creationId xmlns:a16="http://schemas.microsoft.com/office/drawing/2014/main" id="{E869C733-6A5D-3980-4AB6-0ED9A71A36FB}"/>
+              </a:ext>
+            </a:extLst>
+          </p:cNvPr>
+          <p:cNvPicPr>
+            <a:picLocks noChangeAspect="1"/>
+          </p:cNvPicPr>
+          <p:nvPr/>
+        </p:nvPicPr>
+        <p:blipFill>
+          <a:blip r:embed="rId3"/>
+          <a:stretch>
+            <a:fillRect/>
+          </a:stretch>
+        </p:blipFill>
+        <p:spPr>
+          <a:xfrm>
+            <a:off x="6853388" y="0"/>
+            <a:ext cx="5338612" cy="6858000"/>
+          </a:xfrm>
+          <a:prstGeom prst="rect">
+            <a:avLst/>
+          </a:prstGeom>
+        </p:spPr>
+      </p:pic>
     </p:spTree>
     <p:extLst>
       <p:ext uri="{BB962C8B-B14F-4D97-AF65-F5344CB8AC3E}">
@@ -8373,6 +8572,15 @@
 </file>
 
 <file path=customXml/item2.xml><?xml version="1.0" encoding="utf-8"?>
+<?mso-contentType ?>
+<FormTemplates xmlns="http://schemas.microsoft.com/sharepoint/v3/contenttype/forms">
+  <Display>DocumentLibraryForm</Display>
+  <Edit>DocumentLibraryForm</Edit>
+  <New>DocumentLibraryForm</New>
+</FormTemplates>
+</file>
+
+<file path=customXml/item3.xml><?xml version="1.0" encoding="utf-8"?>
 <ct:contentTypeSchema xmlns:ct="http://schemas.microsoft.com/office/2006/metadata/contentType" xmlns:ma="http://schemas.microsoft.com/office/2006/metadata/properties/metaAttributes" ct:_="" ma:_="" ma:contentTypeName="Document" ma:contentTypeID="0x010100C089011499791B4EB69D0A56FFA67F2B" ma:contentTypeVersion="30" ma:contentTypeDescription="Create a new document." ma:contentTypeScope="" ma:versionID="f76dc847e91b26043a9f85409c9c8da8">
   <xsd:schema xmlns:xsd="http://www.w3.org/2001/XMLSchema" xmlns:xs="http://www.w3.org/2001/XMLSchema" xmlns:p="http://schemas.microsoft.com/office/2006/metadata/properties" xmlns:ns3="bf3e1746-bde1-4d6e-9c3f-7182572f7502" xmlns:ns4="14224164-2045-4b51-92bb-313d0f626d83" targetNamespace="http://schemas.microsoft.com/office/2006/metadata/properties" ma:root="true" ma:fieldsID="e77e75136ac7a83ebab10a30c2d6fe6c" ns3:_="" ns4:_="">
     <xsd:import namespace="bf3e1746-bde1-4d6e-9c3f-7182572f7502"/>
@@ -8763,15 +8971,6 @@
 </ct:contentTypeSchema>
 </file>
 
-<file path=customXml/item3.xml><?xml version="1.0" encoding="utf-8"?>
-<?mso-contentType ?>
-<FormTemplates xmlns="http://schemas.microsoft.com/sharepoint/v3/contenttype/forms">
-  <Display>DocumentLibraryForm</Display>
-  <Edit>DocumentLibraryForm</Edit>
-  <New>DocumentLibraryForm</New>
-</FormTemplates>
-</file>
-
 <file path=customXml/itemProps1.xml><?xml version="1.0" encoding="utf-8"?>
 <ds:datastoreItem xmlns:ds="http://schemas.openxmlformats.org/officeDocument/2006/customXml" ds:itemID="{DEDD01B8-816B-49B7-8C81-03AB51D87C54}">
   <ds:schemaRefs>
@@ -8790,6 +8989,14 @@
 </file>
 
 <file path=customXml/itemProps2.xml><?xml version="1.0" encoding="utf-8"?>
+<ds:datastoreItem xmlns:ds="http://schemas.openxmlformats.org/officeDocument/2006/customXml" ds:itemID="{B024FD56-CE1B-42FC-9E83-BFBF160724C6}">
+  <ds:schemaRefs>
+    <ds:schemaRef ds:uri="http://schemas.microsoft.com/sharepoint/v3/contenttype/forms"/>
+  </ds:schemaRefs>
+</ds:datastoreItem>
+</file>
+
+<file path=customXml/itemProps3.xml><?xml version="1.0" encoding="utf-8"?>
 <ds:datastoreItem xmlns:ds="http://schemas.openxmlformats.org/officeDocument/2006/customXml" ds:itemID="{A129B439-51BE-4A7D-9272-FBD057297E66}">
   <ds:schemaRefs>
     <ds:schemaRef ds:uri="http://schemas.microsoft.com/office/2006/metadata/contentType"/>
@@ -8806,12 +9013,4 @@
     <ds:schemaRef ds:uri="http://schemas.microsoft.com/internal/obd"/>
   </ds:schemaRefs>
 </ds:datastoreItem>
-</file>
-
-<file path=customXml/itemProps3.xml><?xml version="1.0" encoding="utf-8"?>
-<ds:datastoreItem xmlns:ds="http://schemas.openxmlformats.org/officeDocument/2006/customXml" ds:itemID="{B024FD56-CE1B-42FC-9E83-BFBF160724C6}">
-  <ds:schemaRefs>
-    <ds:schemaRef ds:uri="http://schemas.microsoft.com/sharepoint/v3/contenttype/forms"/>
-  </ds:schemaRefs>
-</ds:datastoreItem>
 </file>
--- a/tool/PMP/file/report/SCI_XXVI_SNHH26_Presentacion_PMax24HAutomColombia_v1.pptx
+++ b/tool/PMP/file/report/SCI_XXVI_SNHH26_Presentacion_PMax24HAutomColombia_v1.pptx
@@ -5,17 +5,21 @@
     <p:sldMasterId id="2147483778" r:id="rId4"/>
   </p:sldMasterIdLst>
   <p:notesMasterIdLst>
-    <p:notesMasterId r:id="rId10"/>
+    <p:notesMasterId r:id="rId14"/>
   </p:notesMasterIdLst>
   <p:handoutMasterIdLst>
-    <p:handoutMasterId r:id="rId11"/>
+    <p:handoutMasterId r:id="rId15"/>
   </p:handoutMasterIdLst>
   <p:sldIdLst>
     <p:sldId id="377" r:id="rId5"/>
     <p:sldId id="409" r:id="rId6"/>
     <p:sldId id="319" r:id="rId7"/>
-    <p:sldId id="341" r:id="rId8"/>
-    <p:sldId id="408" r:id="rId9"/>
+    <p:sldId id="410" r:id="rId8"/>
+    <p:sldId id="411" r:id="rId9"/>
+    <p:sldId id="412" r:id="rId10"/>
+    <p:sldId id="413" r:id="rId11"/>
+    <p:sldId id="341" r:id="rId12"/>
+    <p:sldId id="408" r:id="rId13"/>
   </p:sldIdLst>
   <p:sldSz cx="12192000" cy="6858000"/>
   <p:notesSz cx="6858000" cy="9144000"/>
@@ -122,6 +126,10 @@
             <p14:sldId id="377"/>
             <p14:sldId id="409"/>
             <p14:sldId id="319"/>
+            <p14:sldId id="410"/>
+            <p14:sldId id="411"/>
+            <p14:sldId id="412"/>
+            <p14:sldId id="413"/>
             <p14:sldId id="341"/>
             <p14:sldId id="408"/>
           </p14:sldIdLst>
@@ -912,6 +920,10 @@
           <a:bodyPr/>
           <a:lstStyle/>
           <a:p>
+            <a:r>
+              <a:rPr lang="en-US" dirty="0"/>
+              <a:t>https://www.flaticon.com/free-icons/compass</a:t>
+            </a:r>
             <a:endParaRPr lang="es-CO" dirty="0"/>
           </a:p>
         </p:txBody>
@@ -958,7 +970,13 @@
   <p:cSld>
     <p:spTree>
       <p:nvGrpSpPr>
-        <p:cNvPr id="1" name=""/>
+        <p:cNvPr id="1" name="">
+          <a:extLst>
+            <a:ext uri="{FF2B5EF4-FFF2-40B4-BE49-F238E27FC236}">
+              <a16:creationId xmlns:a16="http://schemas.microsoft.com/office/drawing/2014/main" id="{1CF171C6-2860-691E-DA8C-30454B25E634}"/>
+            </a:ext>
+          </a:extLst>
+        </p:cNvPr>
         <p:cNvGrpSpPr/>
         <p:nvPr/>
       </p:nvGrpSpPr>
@@ -972,7 +990,13 @@
       </p:grpSpPr>
       <p:sp>
         <p:nvSpPr>
-          <p:cNvPr id="2" name="Slide Image Placeholder 1"/>
+          <p:cNvPr id="2" name="Slide Image Placeholder 1">
+            <a:extLst>
+              <a:ext uri="{FF2B5EF4-FFF2-40B4-BE49-F238E27FC236}">
+                <a16:creationId xmlns:a16="http://schemas.microsoft.com/office/drawing/2014/main" id="{98F40851-4EE0-8885-F3AD-FA1129939BF5}"/>
+              </a:ext>
+            </a:extLst>
+          </p:cNvPr>
           <p:cNvSpPr>
             <a:spLocks noGrp="1" noRot="1" noChangeAspect="1"/>
           </p:cNvSpPr>
@@ -984,7 +1008,13 @@
       </p:sp>
       <p:sp>
         <p:nvSpPr>
-          <p:cNvPr id="3" name="Notes Placeholder 2"/>
+          <p:cNvPr id="3" name="Notes Placeholder 2">
+            <a:extLst>
+              <a:ext uri="{FF2B5EF4-FFF2-40B4-BE49-F238E27FC236}">
+                <a16:creationId xmlns:a16="http://schemas.microsoft.com/office/drawing/2014/main" id="{F6BDA488-9956-4593-BADD-438518081705}"/>
+              </a:ext>
+            </a:extLst>
+          </p:cNvPr>
           <p:cNvSpPr>
             <a:spLocks noGrp="1"/>
           </p:cNvSpPr>
@@ -997,20 +1027,19 @@
           <a:bodyPr/>
           <a:lstStyle/>
           <a:p>
-            <a:endParaRPr lang="es-CO" sz="1200" b="0" i="0" dirty="0">
-              <a:solidFill>
-                <a:srgbClr val="24292F"/>
-              </a:solidFill>
-              <a:effectLst/>
-              <a:latin typeface="-apple-system"/>
-              <a:cs typeface="Segoe UI Light" panose="020B0502040204020203" pitchFamily="34" charset="0"/>
-            </a:endParaRPr>
-          </a:p>
-        </p:txBody>
-      </p:sp>
-      <p:sp>
-        <p:nvSpPr>
-          <p:cNvPr id="4" name="Slide Number Placeholder 3"/>
+            <a:endParaRPr lang="es-CO" dirty="0"/>
+          </a:p>
+        </p:txBody>
+      </p:sp>
+      <p:sp>
+        <p:nvSpPr>
+          <p:cNvPr id="4" name="Slide Number Placeholder 3">
+            <a:extLst>
+              <a:ext uri="{FF2B5EF4-FFF2-40B4-BE49-F238E27FC236}">
+                <a16:creationId xmlns:a16="http://schemas.microsoft.com/office/drawing/2014/main" id="{E726BB84-54E9-B0D7-2893-322BBD281A76}"/>
+              </a:ext>
+            </a:extLst>
+          </p:cNvPr>
           <p:cNvSpPr>
             <a:spLocks noGrp="1"/>
           </p:cNvSpPr>
@@ -1035,7 +1064,7 @@
     </p:spTree>
     <p:extLst>
       <p:ext uri="{BB962C8B-B14F-4D97-AF65-F5344CB8AC3E}">
-        <p14:creationId xmlns:p14="http://schemas.microsoft.com/office/powerpoint/2010/main" val="3690597260"/>
+        <p14:creationId xmlns:p14="http://schemas.microsoft.com/office/powerpoint/2010/main" val="676658081"/>
       </p:ext>
     </p:extLst>
   </p:cSld>
@@ -1046,6 +1075,369 @@
 </file>
 
 <file path=ppt/notesSlides/notesSlide5.xml><?xml version="1.0" encoding="utf-8"?>
+<p:notes xmlns:a="http://schemas.openxmlformats.org/drawingml/2006/main" xmlns:r="http://schemas.openxmlformats.org/officeDocument/2006/relationships" xmlns:p="http://schemas.openxmlformats.org/presentationml/2006/main">
+  <p:cSld>
+    <p:spTree>
+      <p:nvGrpSpPr>
+        <p:cNvPr id="1" name="">
+          <a:extLst>
+            <a:ext uri="{FF2B5EF4-FFF2-40B4-BE49-F238E27FC236}">
+              <a16:creationId xmlns:a16="http://schemas.microsoft.com/office/drawing/2014/main" id="{E680A047-D0A1-7D30-9697-684679473E3D}"/>
+            </a:ext>
+          </a:extLst>
+        </p:cNvPr>
+        <p:cNvGrpSpPr/>
+        <p:nvPr/>
+      </p:nvGrpSpPr>
+      <p:grpSpPr>
+        <a:xfrm>
+          <a:off x="0" y="0"/>
+          <a:ext cx="0" cy="0"/>
+          <a:chOff x="0" y="0"/>
+          <a:chExt cx="0" cy="0"/>
+        </a:xfrm>
+      </p:grpSpPr>
+      <p:sp>
+        <p:nvSpPr>
+          <p:cNvPr id="2" name="Slide Image Placeholder 1">
+            <a:extLst>
+              <a:ext uri="{FF2B5EF4-FFF2-40B4-BE49-F238E27FC236}">
+                <a16:creationId xmlns:a16="http://schemas.microsoft.com/office/drawing/2014/main" id="{42211FB8-111E-1EA6-0992-4A3B4C486112}"/>
+              </a:ext>
+            </a:extLst>
+          </p:cNvPr>
+          <p:cNvSpPr>
+            <a:spLocks noGrp="1" noRot="1" noChangeAspect="1"/>
+          </p:cNvSpPr>
+          <p:nvPr>
+            <p:ph type="sldImg"/>
+          </p:nvPr>
+        </p:nvSpPr>
+        <p:spPr/>
+      </p:sp>
+      <p:sp>
+        <p:nvSpPr>
+          <p:cNvPr id="3" name="Notes Placeholder 2">
+            <a:extLst>
+              <a:ext uri="{FF2B5EF4-FFF2-40B4-BE49-F238E27FC236}">
+                <a16:creationId xmlns:a16="http://schemas.microsoft.com/office/drawing/2014/main" id="{E30F103B-4793-C60B-27B3-54448755EDF0}"/>
+              </a:ext>
+            </a:extLst>
+          </p:cNvPr>
+          <p:cNvSpPr>
+            <a:spLocks noGrp="1"/>
+          </p:cNvSpPr>
+          <p:nvPr>
+            <p:ph type="body" idx="1"/>
+          </p:nvPr>
+        </p:nvSpPr>
+        <p:spPr/>
+        <p:txBody>
+          <a:bodyPr/>
+          <a:lstStyle/>
+          <a:p>
+            <a:r>
+              <a:rPr lang="es-CO" sz="1200" kern="1200" dirty="0">
+                <a:solidFill>
+                  <a:schemeClr val="tx1"/>
+                </a:solidFill>
+                <a:effectLst/>
+                <a:latin typeface="+mn-lt"/>
+                <a:ea typeface="+mn-ea"/>
+                <a:cs typeface="+mn-cs"/>
+              </a:rPr>
+              <a:t>El logaritmo de una función de distribución de probabilidad (log-PDF) es simplemente el logaritmo del valor de la PDF, denotado como log(f(x)), útil para convertir la multiplicación de probabilidades en suma de estas, mejorar la estabilidad numérica con números pequeños y conectar con conceptos de la teoría de la información como la entropía. En lugar de trabajar con probabilidades muy pequeñas, las PDF logarítmicas utilizan números negativos que son más fáciles de manejar para las computadoras, lo que evita errores de subdesbordamiento y simplifica cálculos complejos. </a:t>
+            </a:r>
+            <a:endParaRPr lang="es-CO" dirty="0"/>
+          </a:p>
+        </p:txBody>
+      </p:sp>
+      <p:sp>
+        <p:nvSpPr>
+          <p:cNvPr id="4" name="Slide Number Placeholder 3">
+            <a:extLst>
+              <a:ext uri="{FF2B5EF4-FFF2-40B4-BE49-F238E27FC236}">
+                <a16:creationId xmlns:a16="http://schemas.microsoft.com/office/drawing/2014/main" id="{3E4E935C-797D-599C-2283-71DD99A818C2}"/>
+              </a:ext>
+            </a:extLst>
+          </p:cNvPr>
+          <p:cNvSpPr>
+            <a:spLocks noGrp="1"/>
+          </p:cNvSpPr>
+          <p:nvPr>
+            <p:ph type="sldNum" sz="quarter" idx="5"/>
+          </p:nvPr>
+        </p:nvSpPr>
+        <p:spPr/>
+        <p:txBody>
+          <a:bodyPr/>
+          <a:lstStyle/>
+          <a:p>
+            <a:pPr rtl="0"/>
+            <a:fld id="{810E1E9A-E921-4174-A0FC-51868D7AC568}" type="slidenum">
+              <a:rPr lang="es-ES" noProof="0" smtClean="0"/>
+              <a:t>5</a:t>
+            </a:fld>
+            <a:endParaRPr lang="es-ES" noProof="0" dirty="0"/>
+          </a:p>
+        </p:txBody>
+      </p:sp>
+    </p:spTree>
+    <p:extLst>
+      <p:ext uri="{BB962C8B-B14F-4D97-AF65-F5344CB8AC3E}">
+        <p14:creationId xmlns:p14="http://schemas.microsoft.com/office/powerpoint/2010/main" val="1514806473"/>
+      </p:ext>
+    </p:extLst>
+  </p:cSld>
+  <p:clrMapOvr>
+    <a:masterClrMapping/>
+  </p:clrMapOvr>
+</p:notes>
+</file>
+
+<file path=ppt/notesSlides/notesSlide6.xml><?xml version="1.0" encoding="utf-8"?>
+<p:notes xmlns:a="http://schemas.openxmlformats.org/drawingml/2006/main" xmlns:r="http://schemas.openxmlformats.org/officeDocument/2006/relationships" xmlns:p="http://schemas.openxmlformats.org/presentationml/2006/main">
+  <p:cSld>
+    <p:spTree>
+      <p:nvGrpSpPr>
+        <p:cNvPr id="1" name="">
+          <a:extLst>
+            <a:ext uri="{FF2B5EF4-FFF2-40B4-BE49-F238E27FC236}">
+              <a16:creationId xmlns:a16="http://schemas.microsoft.com/office/drawing/2014/main" id="{2C252F41-9AC4-C154-D278-16697C7E034C}"/>
+            </a:ext>
+          </a:extLst>
+        </p:cNvPr>
+        <p:cNvGrpSpPr/>
+        <p:nvPr/>
+      </p:nvGrpSpPr>
+      <p:grpSpPr>
+        <a:xfrm>
+          <a:off x="0" y="0"/>
+          <a:ext cx="0" cy="0"/>
+          <a:chOff x="0" y="0"/>
+          <a:chExt cx="0" cy="0"/>
+        </a:xfrm>
+      </p:grpSpPr>
+      <p:sp>
+        <p:nvSpPr>
+          <p:cNvPr id="2" name="Slide Image Placeholder 1">
+            <a:extLst>
+              <a:ext uri="{FF2B5EF4-FFF2-40B4-BE49-F238E27FC236}">
+                <a16:creationId xmlns:a16="http://schemas.microsoft.com/office/drawing/2014/main" id="{D737645E-BE7D-F053-4A77-6BFB0418C884}"/>
+              </a:ext>
+            </a:extLst>
+          </p:cNvPr>
+          <p:cNvSpPr>
+            <a:spLocks noGrp="1" noRot="1" noChangeAspect="1"/>
+          </p:cNvSpPr>
+          <p:nvPr>
+            <p:ph type="sldImg"/>
+          </p:nvPr>
+        </p:nvSpPr>
+        <p:spPr/>
+      </p:sp>
+      <p:sp>
+        <p:nvSpPr>
+          <p:cNvPr id="3" name="Notes Placeholder 2">
+            <a:extLst>
+              <a:ext uri="{FF2B5EF4-FFF2-40B4-BE49-F238E27FC236}">
+                <a16:creationId xmlns:a16="http://schemas.microsoft.com/office/drawing/2014/main" id="{4F9CAF98-E1B6-64D0-3360-1BFDB645C7E8}"/>
+              </a:ext>
+            </a:extLst>
+          </p:cNvPr>
+          <p:cNvSpPr>
+            <a:spLocks noGrp="1"/>
+          </p:cNvSpPr>
+          <p:nvPr>
+            <p:ph type="body" idx="1"/>
+          </p:nvPr>
+        </p:nvSpPr>
+        <p:spPr/>
+        <p:txBody>
+          <a:bodyPr/>
+          <a:lstStyle/>
+          <a:p>
+            <a:r>
+              <a:rPr lang="es-CO" sz="1200" kern="1200" dirty="0">
+                <a:solidFill>
+                  <a:schemeClr val="tx1"/>
+                </a:solidFill>
+                <a:effectLst/>
+                <a:latin typeface="+mn-lt"/>
+                <a:ea typeface="+mn-ea"/>
+                <a:cs typeface="+mn-cs"/>
+              </a:rPr>
+              <a:t>El logaritmo de una función de distribución de probabilidad (log-PDF) es simplemente el logaritmo del valor de la PDF, denotado como log(f(x)), útil para convertir la multiplicación de probabilidades en suma de estas, mejorar la estabilidad numérica con números pequeños y conectar con conceptos de la teoría de la información como la entropía. En lugar de trabajar con probabilidades muy pequeñas, las PDF logarítmicas utilizan números negativos que son más fáciles de manejar para las computadoras, lo que evita errores de subdesbordamiento y simplifica cálculos complejos. </a:t>
+            </a:r>
+            <a:endParaRPr lang="es-CO" dirty="0"/>
+          </a:p>
+        </p:txBody>
+      </p:sp>
+      <p:sp>
+        <p:nvSpPr>
+          <p:cNvPr id="4" name="Slide Number Placeholder 3">
+            <a:extLst>
+              <a:ext uri="{FF2B5EF4-FFF2-40B4-BE49-F238E27FC236}">
+                <a16:creationId xmlns:a16="http://schemas.microsoft.com/office/drawing/2014/main" id="{AC978AC8-DB45-B487-8F8F-1AF0C8D80290}"/>
+              </a:ext>
+            </a:extLst>
+          </p:cNvPr>
+          <p:cNvSpPr>
+            <a:spLocks noGrp="1"/>
+          </p:cNvSpPr>
+          <p:nvPr>
+            <p:ph type="sldNum" sz="quarter" idx="5"/>
+          </p:nvPr>
+        </p:nvSpPr>
+        <p:spPr/>
+        <p:txBody>
+          <a:bodyPr/>
+          <a:lstStyle/>
+          <a:p>
+            <a:pPr rtl="0"/>
+            <a:fld id="{810E1E9A-E921-4174-A0FC-51868D7AC568}" type="slidenum">
+              <a:rPr lang="es-ES" noProof="0" smtClean="0"/>
+              <a:t>6</a:t>
+            </a:fld>
+            <a:endParaRPr lang="es-ES" noProof="0" dirty="0"/>
+          </a:p>
+        </p:txBody>
+      </p:sp>
+    </p:spTree>
+    <p:extLst>
+      <p:ext uri="{BB962C8B-B14F-4D97-AF65-F5344CB8AC3E}">
+        <p14:creationId xmlns:p14="http://schemas.microsoft.com/office/powerpoint/2010/main" val="554510582"/>
+      </p:ext>
+    </p:extLst>
+  </p:cSld>
+  <p:clrMapOvr>
+    <a:masterClrMapping/>
+  </p:clrMapOvr>
+</p:notes>
+</file>
+
+<file path=ppt/notesSlides/notesSlide7.xml><?xml version="1.0" encoding="utf-8"?>
+<p:notes xmlns:a="http://schemas.openxmlformats.org/drawingml/2006/main" xmlns:r="http://schemas.openxmlformats.org/officeDocument/2006/relationships" xmlns:p="http://schemas.openxmlformats.org/presentationml/2006/main">
+  <p:cSld>
+    <p:spTree>
+      <p:nvGrpSpPr>
+        <p:cNvPr id="1" name="">
+          <a:extLst>
+            <a:ext uri="{FF2B5EF4-FFF2-40B4-BE49-F238E27FC236}">
+              <a16:creationId xmlns:a16="http://schemas.microsoft.com/office/drawing/2014/main" id="{3D7B4B6E-76DC-6BB7-9A18-C241DD9E9F0A}"/>
+            </a:ext>
+          </a:extLst>
+        </p:cNvPr>
+        <p:cNvGrpSpPr/>
+        <p:nvPr/>
+      </p:nvGrpSpPr>
+      <p:grpSpPr>
+        <a:xfrm>
+          <a:off x="0" y="0"/>
+          <a:ext cx="0" cy="0"/>
+          <a:chOff x="0" y="0"/>
+          <a:chExt cx="0" cy="0"/>
+        </a:xfrm>
+      </p:grpSpPr>
+      <p:sp>
+        <p:nvSpPr>
+          <p:cNvPr id="2" name="Slide Image Placeholder 1">
+            <a:extLst>
+              <a:ext uri="{FF2B5EF4-FFF2-40B4-BE49-F238E27FC236}">
+                <a16:creationId xmlns:a16="http://schemas.microsoft.com/office/drawing/2014/main" id="{1F60A0C0-A7A1-9E7A-FF41-0909E568858B}"/>
+              </a:ext>
+            </a:extLst>
+          </p:cNvPr>
+          <p:cNvSpPr>
+            <a:spLocks noGrp="1" noRot="1" noChangeAspect="1"/>
+          </p:cNvSpPr>
+          <p:nvPr>
+            <p:ph type="sldImg"/>
+          </p:nvPr>
+        </p:nvSpPr>
+        <p:spPr/>
+      </p:sp>
+      <p:sp>
+        <p:nvSpPr>
+          <p:cNvPr id="3" name="Notes Placeholder 2">
+            <a:extLst>
+              <a:ext uri="{FF2B5EF4-FFF2-40B4-BE49-F238E27FC236}">
+                <a16:creationId xmlns:a16="http://schemas.microsoft.com/office/drawing/2014/main" id="{8F82E292-0818-079C-4151-71EB346E7056}"/>
+              </a:ext>
+            </a:extLst>
+          </p:cNvPr>
+          <p:cNvSpPr>
+            <a:spLocks noGrp="1"/>
+          </p:cNvSpPr>
+          <p:nvPr>
+            <p:ph type="body" idx="1"/>
+          </p:nvPr>
+        </p:nvSpPr>
+        <p:spPr/>
+        <p:txBody>
+          <a:bodyPr/>
+          <a:lstStyle/>
+          <a:p>
+            <a:r>
+              <a:rPr lang="es-CO" sz="1200" kern="1200" dirty="0">
+                <a:solidFill>
+                  <a:schemeClr val="tx1"/>
+                </a:solidFill>
+                <a:effectLst/>
+                <a:latin typeface="+mn-lt"/>
+                <a:ea typeface="+mn-ea"/>
+                <a:cs typeface="+mn-cs"/>
+              </a:rPr>
+              <a:t>El logaritmo de una función de distribución de probabilidad (log-PDF) es simplemente el logaritmo del valor de la PDF, denotado como log(f(x)), útil para convertir la multiplicación de probabilidades en suma de estas, mejorar la estabilidad numérica con números pequeños y conectar con conceptos de la teoría de la información como la entropía. En lugar de trabajar con probabilidades muy pequeñas, las PDF logarítmicas utilizan números negativos que son más fáciles de manejar para las computadoras, lo que evita errores de subdesbordamiento y simplifica cálculos complejos. </a:t>
+            </a:r>
+            <a:endParaRPr lang="es-CO" dirty="0"/>
+          </a:p>
+        </p:txBody>
+      </p:sp>
+      <p:sp>
+        <p:nvSpPr>
+          <p:cNvPr id="4" name="Slide Number Placeholder 3">
+            <a:extLst>
+              <a:ext uri="{FF2B5EF4-FFF2-40B4-BE49-F238E27FC236}">
+                <a16:creationId xmlns:a16="http://schemas.microsoft.com/office/drawing/2014/main" id="{97D4949D-8982-C442-E067-6ADD82587487}"/>
+              </a:ext>
+            </a:extLst>
+          </p:cNvPr>
+          <p:cNvSpPr>
+            <a:spLocks noGrp="1"/>
+          </p:cNvSpPr>
+          <p:nvPr>
+            <p:ph type="sldNum" sz="quarter" idx="5"/>
+          </p:nvPr>
+        </p:nvSpPr>
+        <p:spPr/>
+        <p:txBody>
+          <a:bodyPr/>
+          <a:lstStyle/>
+          <a:p>
+            <a:pPr rtl="0"/>
+            <a:fld id="{810E1E9A-E921-4174-A0FC-51868D7AC568}" type="slidenum">
+              <a:rPr lang="es-ES" noProof="0" smtClean="0"/>
+              <a:t>7</a:t>
+            </a:fld>
+            <a:endParaRPr lang="es-ES" noProof="0" dirty="0"/>
+          </a:p>
+        </p:txBody>
+      </p:sp>
+    </p:spTree>
+    <p:extLst>
+      <p:ext uri="{BB962C8B-B14F-4D97-AF65-F5344CB8AC3E}">
+        <p14:creationId xmlns:p14="http://schemas.microsoft.com/office/powerpoint/2010/main" val="2962828359"/>
+      </p:ext>
+    </p:extLst>
+  </p:cSld>
+  <p:clrMapOvr>
+    <a:masterClrMapping/>
+  </p:clrMapOvr>
+</p:notes>
+</file>
+
+<file path=ppt/notesSlides/notesSlide8.xml><?xml version="1.0" encoding="utf-8"?>
 <p:notes xmlns:a="http://schemas.openxmlformats.org/drawingml/2006/main" xmlns:r="http://schemas.openxmlformats.org/officeDocument/2006/relationships" xmlns:p="http://schemas.openxmlformats.org/presentationml/2006/main">
   <p:cSld>
     <p:spTree>
@@ -1118,7 +1510,99 @@
             <a:pPr rtl="0"/>
             <a:fld id="{810E1E9A-E921-4174-A0FC-51868D7AC568}" type="slidenum">
               <a:rPr lang="es-ES" noProof="0" smtClean="0"/>
-              <a:t>5</a:t>
+              <a:t>8</a:t>
+            </a:fld>
+            <a:endParaRPr lang="es-ES" noProof="0" dirty="0"/>
+          </a:p>
+        </p:txBody>
+      </p:sp>
+    </p:spTree>
+    <p:extLst>
+      <p:ext uri="{BB962C8B-B14F-4D97-AF65-F5344CB8AC3E}">
+        <p14:creationId xmlns:p14="http://schemas.microsoft.com/office/powerpoint/2010/main" val="3690597260"/>
+      </p:ext>
+    </p:extLst>
+  </p:cSld>
+  <p:clrMapOvr>
+    <a:masterClrMapping/>
+  </p:clrMapOvr>
+</p:notes>
+</file>
+
+<file path=ppt/notesSlides/notesSlide9.xml><?xml version="1.0" encoding="utf-8"?>
+<p:notes xmlns:a="http://schemas.openxmlformats.org/drawingml/2006/main" xmlns:r="http://schemas.openxmlformats.org/officeDocument/2006/relationships" xmlns:p="http://schemas.openxmlformats.org/presentationml/2006/main">
+  <p:cSld>
+    <p:spTree>
+      <p:nvGrpSpPr>
+        <p:cNvPr id="1" name=""/>
+        <p:cNvGrpSpPr/>
+        <p:nvPr/>
+      </p:nvGrpSpPr>
+      <p:grpSpPr>
+        <a:xfrm>
+          <a:off x="0" y="0"/>
+          <a:ext cx="0" cy="0"/>
+          <a:chOff x="0" y="0"/>
+          <a:chExt cx="0" cy="0"/>
+        </a:xfrm>
+      </p:grpSpPr>
+      <p:sp>
+        <p:nvSpPr>
+          <p:cNvPr id="2" name="Slide Image Placeholder 1"/>
+          <p:cNvSpPr>
+            <a:spLocks noGrp="1" noRot="1" noChangeAspect="1"/>
+          </p:cNvSpPr>
+          <p:nvPr>
+            <p:ph type="sldImg"/>
+          </p:nvPr>
+        </p:nvSpPr>
+        <p:spPr/>
+      </p:sp>
+      <p:sp>
+        <p:nvSpPr>
+          <p:cNvPr id="3" name="Notes Placeholder 2"/>
+          <p:cNvSpPr>
+            <a:spLocks noGrp="1"/>
+          </p:cNvSpPr>
+          <p:nvPr>
+            <p:ph type="body" idx="1"/>
+          </p:nvPr>
+        </p:nvSpPr>
+        <p:spPr/>
+        <p:txBody>
+          <a:bodyPr/>
+          <a:lstStyle/>
+          <a:p>
+            <a:endParaRPr lang="es-CO" sz="1200" b="0" i="0" dirty="0">
+              <a:solidFill>
+                <a:srgbClr val="24292F"/>
+              </a:solidFill>
+              <a:effectLst/>
+              <a:latin typeface="-apple-system"/>
+              <a:cs typeface="Segoe UI Light" panose="020B0502040204020203" pitchFamily="34" charset="0"/>
+            </a:endParaRPr>
+          </a:p>
+        </p:txBody>
+      </p:sp>
+      <p:sp>
+        <p:nvSpPr>
+          <p:cNvPr id="4" name="Slide Number Placeholder 3"/>
+          <p:cNvSpPr>
+            <a:spLocks noGrp="1"/>
+          </p:cNvSpPr>
+          <p:nvPr>
+            <p:ph type="sldNum" sz="quarter" idx="5"/>
+          </p:nvPr>
+        </p:nvSpPr>
+        <p:spPr/>
+        <p:txBody>
+          <a:bodyPr/>
+          <a:lstStyle/>
+          <a:p>
+            <a:pPr rtl="0"/>
+            <a:fld id="{810E1E9A-E921-4174-A0FC-51868D7AC568}" type="slidenum">
+              <a:rPr lang="es-ES" noProof="0" smtClean="0"/>
+              <a:t>9</a:t>
             </a:fld>
             <a:endParaRPr lang="es-ES" noProof="0" dirty="0"/>
           </a:p>
@@ -6808,64 +7292,6 @@
           </p:spPr>
         </p:pic>
       </p:grpSp>
-      <p:sp>
-        <p:nvSpPr>
-          <p:cNvPr id="15" name="Rectangle: Single Corner Rounded 14">
-            <a:extLst>
-              <a:ext uri="{FF2B5EF4-FFF2-40B4-BE49-F238E27FC236}">
-                <a16:creationId xmlns:a16="http://schemas.microsoft.com/office/drawing/2014/main" id="{73D166C1-3DC3-7679-1661-71166B92328D}"/>
-              </a:ext>
-            </a:extLst>
-          </p:cNvPr>
-          <p:cNvSpPr/>
-          <p:nvPr/>
-        </p:nvSpPr>
-        <p:spPr>
-          <a:xfrm>
-            <a:off x="0" y="6493987"/>
-            <a:ext cx="2895055" cy="364013"/>
-          </a:xfrm>
-          <a:prstGeom prst="round1Rect">
-            <a:avLst/>
-          </a:prstGeom>
-          <a:noFill/>
-          <a:ln>
-            <a:noFill/>
-          </a:ln>
-        </p:spPr>
-        <p:style>
-          <a:lnRef idx="2">
-            <a:schemeClr val="accent1">
-              <a:shade val="50000"/>
-            </a:schemeClr>
-          </a:lnRef>
-          <a:fillRef idx="1">
-            <a:schemeClr val="accent1"/>
-          </a:fillRef>
-          <a:effectRef idx="0">
-            <a:schemeClr val="accent1"/>
-          </a:effectRef>
-          <a:fontRef idx="minor">
-            <a:schemeClr val="lt1"/>
-          </a:fontRef>
-        </p:style>
-        <p:txBody>
-          <a:bodyPr rtlCol="0" anchor="ctr"/>
-          <a:lstStyle/>
-          <a:p>
-            <a:r>
-              <a:rPr lang="es-CO" sz="1200" dirty="0">
-                <a:solidFill>
-                  <a:schemeClr val="tx1"/>
-                </a:solidFill>
-                <a:latin typeface="Segoe UI" panose="020B0502040204020203" pitchFamily="34" charset="0"/>
-                <a:cs typeface="Segoe UI" panose="020B0502040204020203" pitchFamily="34" charset="0"/>
-              </a:rPr>
-              <a:t>Centro de Estudios Hidráulicos</a:t>
-            </a:r>
-          </a:p>
-        </p:txBody>
-      </p:sp>
       <p:grpSp>
         <p:nvGrpSpPr>
           <p:cNvPr id="10" name="Group 9">
@@ -7030,6 +7456,42 @@
           </a:p>
         </p:txBody>
       </p:sp>
+      <p:pic>
+        <p:nvPicPr>
+          <p:cNvPr id="17" name="Graphic 16">
+            <a:extLst>
+              <a:ext uri="{FF2B5EF4-FFF2-40B4-BE49-F238E27FC236}">
+                <a16:creationId xmlns:a16="http://schemas.microsoft.com/office/drawing/2014/main" id="{A5FDD1B3-FD15-B1D0-FF17-922D050C38E6}"/>
+              </a:ext>
+            </a:extLst>
+          </p:cNvPr>
+          <p:cNvPicPr>
+            <a:picLocks noChangeAspect="1"/>
+          </p:cNvPicPr>
+          <p:nvPr/>
+        </p:nvPicPr>
+        <p:blipFill>
+          <a:blip>
+            <a:extLst>
+              <a:ext uri="{96DAC541-7B7A-43D3-8B79-37D633B846F1}">
+                <asvg:svgBlip xmlns:asvg="http://schemas.microsoft.com/office/drawing/2016/SVG/main" r:embed="rId6"/>
+              </a:ext>
+            </a:extLst>
+          </a:blip>
+          <a:stretch>
+            <a:fillRect/>
+          </a:stretch>
+        </p:blipFill>
+        <p:spPr>
+          <a:xfrm>
+            <a:off x="84454" y="6174460"/>
+            <a:ext cx="1311312" cy="630000"/>
+          </a:xfrm>
+          <a:prstGeom prst="rect">
+            <a:avLst/>
+          </a:prstGeom>
+        </p:spPr>
+      </p:pic>
     </p:spTree>
     <p:extLst>
       <p:ext uri="{BB962C8B-B14F-4D97-AF65-F5344CB8AC3E}">
@@ -7208,10 +7670,10 @@
       </p:sp>
       <p:sp>
         <p:nvSpPr>
-          <p:cNvPr id="8" name="TextBox 7">
+          <p:cNvPr id="4" name="TextBox 3">
             <a:extLst>
               <a:ext uri="{FF2B5EF4-FFF2-40B4-BE49-F238E27FC236}">
-                <a16:creationId xmlns:a16="http://schemas.microsoft.com/office/drawing/2014/main" id="{E287DD09-8245-10B5-AE21-08F133514BF5}"/>
+                <a16:creationId xmlns:a16="http://schemas.microsoft.com/office/drawing/2014/main" id="{D33305EA-029B-69FD-79B6-F1943723AD0F}"/>
               </a:ext>
             </a:extLst>
           </p:cNvPr>
@@ -7220,8 +7682,8 @@
         </p:nvSpPr>
         <p:spPr>
           <a:xfrm>
-            <a:off x="0" y="6550223"/>
-            <a:ext cx="12192000" cy="307777"/>
+            <a:off x="0" y="6581001"/>
+            <a:ext cx="12192000" cy="276999"/>
           </a:xfrm>
           <a:prstGeom prst="rect">
             <a:avLst/>
@@ -7235,13 +7697,13 @@
           <a:lstStyle/>
           <a:p>
             <a:r>
-              <a:rPr lang="es-CO" sz="1400" dirty="0">
-                <a:solidFill>
-                  <a:schemeClr val="bg1">
-                    <a:lumMod val="75000"/>
-                  </a:schemeClr>
-                </a:solidFill>
-                <a:latin typeface="Segoe UI" panose="020B0502040204020203" pitchFamily="34" charset="0"/>
+              <a:rPr lang="es-CO" sz="1200" dirty="0">
+                <a:solidFill>
+                  <a:schemeClr val="bg1">
+                    <a:lumMod val="50000"/>
+                  </a:schemeClr>
+                </a:solidFill>
+                <a:latin typeface="+mj-lt"/>
                 <a:cs typeface="Segoe UI" panose="020B0502040204020203" pitchFamily="34" charset="0"/>
               </a:rPr>
               <a:t>Estudio y Análisis de la Precipitación Máxima en 24 Horas (Pmax24h) en la Red de Estaciones Climatológicas Automáticas de Colombia</a:t>
@@ -7305,8 +7767,8 @@
         </p:nvSpPr>
         <p:spPr>
           <a:xfrm>
-            <a:off x="239705" y="949309"/>
-            <a:ext cx="6266779" cy="5079298"/>
+            <a:off x="221325" y="595994"/>
+            <a:ext cx="6266779" cy="5708810"/>
           </a:xfrm>
         </p:spPr>
         <p:txBody>
@@ -7315,7 +7777,6 @@
           </a:bodyPr>
           <a:lstStyle/>
           <a:p>
-            <a:pPr algn="ctr"/>
             <a:r>
               <a:rPr lang="es-CO" sz="3200" dirty="0">
                 <a:solidFill>
@@ -7328,7 +7789,34 @@
                 <a:ea typeface="Segoe UI Black" panose="020B0A02040204020203" pitchFamily="34" charset="0"/>
                 <a:cs typeface="Segoe UI" panose="020B0502040204020203" pitchFamily="34" charset="0"/>
               </a:rPr>
-              <a:t>En este estudio se evalúa el ajuste de registros de PMax24h de la red de estaciones automáticas de Colombia a funciones empíricas de distribución (EDF) y a funciones de distribución de probabilidad paramétricas (PDF). </a:t>
+              <a:t>En este estudio se evalúa el ajuste de registros de PMax24h</a:t>
+            </a:r>
+            <a:r>
+              <a:rPr lang="es-CO" sz="3200" dirty="0">
+                <a:solidFill>
+                  <a:schemeClr val="bg1">
+                    <a:lumMod val="25000"/>
+                  </a:schemeClr>
+                </a:solidFill>
+                <a:latin typeface="Segoe UI" panose="020B0502040204020203" pitchFamily="34" charset="0"/>
+                <a:ea typeface="Segoe UI Black" panose="020B0A02040204020203" pitchFamily="34" charset="0"/>
+                <a:cs typeface="Segoe UI" panose="020B0502040204020203" pitchFamily="34" charset="0"/>
+              </a:rPr>
+              <a:t>*</a:t>
+            </a:r>
+            <a:r>
+              <a:rPr lang="es-CO" sz="3200" dirty="0">
+                <a:solidFill>
+                  <a:schemeClr val="bg1">
+                    <a:lumMod val="25000"/>
+                  </a:schemeClr>
+                </a:solidFill>
+                <a:effectLst/>
+                <a:latin typeface="Segoe UI" panose="020B0502040204020203" pitchFamily="34" charset="0"/>
+                <a:ea typeface="Segoe UI Black" panose="020B0A02040204020203" pitchFamily="34" charset="0"/>
+                <a:cs typeface="Segoe UI" panose="020B0502040204020203" pitchFamily="34" charset="0"/>
+              </a:rPr>
+              <a:t> de la red de estaciones automáticas de Colombia a funciones empíricas de distribución (EDF) y a funciones de distribución de probabilidad paramétricas (PDF). </a:t>
             </a:r>
             <a:br>
               <a:rPr lang="es-CO" sz="3200" dirty="0">
@@ -7398,7 +7886,76 @@
               </a:rPr>
               <a:t>–Smirnov (K-S) como criterio de evaluación.</a:t>
             </a:r>
-            <a:endParaRPr lang="es-CO" sz="3200" dirty="0">
+            <a:br>
+              <a:rPr lang="es-CO" sz="3200" dirty="0">
+                <a:solidFill>
+                  <a:schemeClr val="bg1">
+                    <a:lumMod val="25000"/>
+                  </a:schemeClr>
+                </a:solidFill>
+                <a:effectLst/>
+                <a:latin typeface="Segoe UI" panose="020B0502040204020203" pitchFamily="34" charset="0"/>
+                <a:ea typeface="Segoe UI Black" panose="020B0A02040204020203" pitchFamily="34" charset="0"/>
+                <a:cs typeface="Segoe UI" panose="020B0502040204020203" pitchFamily="34" charset="0"/>
+              </a:rPr>
+            </a:br>
+            <a:br>
+              <a:rPr lang="es-CO" sz="3200" dirty="0">
+                <a:solidFill>
+                  <a:schemeClr val="bg1">
+                    <a:lumMod val="25000"/>
+                  </a:schemeClr>
+                </a:solidFill>
+                <a:effectLst/>
+                <a:latin typeface="Segoe UI" panose="020B0502040204020203" pitchFamily="34" charset="0"/>
+                <a:ea typeface="Segoe UI Black" panose="020B0A02040204020203" pitchFamily="34" charset="0"/>
+                <a:cs typeface="Segoe UI" panose="020B0502040204020203" pitchFamily="34" charset="0"/>
+              </a:rPr>
+            </a:br>
+            <a:r>
+              <a:rPr lang="es-CO" sz="1400" dirty="0">
+                <a:solidFill>
+                  <a:schemeClr val="bg1">
+                    <a:lumMod val="25000"/>
+                  </a:schemeClr>
+                </a:solidFill>
+                <a:effectLst/>
+                <a:latin typeface="Segoe UI" panose="020B0502040204020203" pitchFamily="34" charset="0"/>
+                <a:ea typeface="Segoe UI Black" panose="020B0A02040204020203" pitchFamily="34" charset="0"/>
+                <a:cs typeface="Segoe UI" panose="020B0502040204020203" pitchFamily="34" charset="0"/>
+              </a:rPr>
+              <a:t>*A partir de valores de lluvia registrados cada 10 minutos, disponibles en </a:t>
+            </a:r>
+            <a:r>
+              <a:rPr lang="es-CO" sz="1400" dirty="0">
+                <a:solidFill>
+                  <a:schemeClr val="bg1">
+                    <a:lumMod val="25000"/>
+                  </a:schemeClr>
+                </a:solidFill>
+                <a:effectLst/>
+                <a:latin typeface="Segoe UI" panose="020B0502040204020203" pitchFamily="34" charset="0"/>
+                <a:ea typeface="Segoe UI Black" panose="020B0A02040204020203" pitchFamily="34" charset="0"/>
+                <a:cs typeface="Segoe UI" panose="020B0502040204020203" pitchFamily="34" charset="0"/>
+                <a:hlinkClick r:id="rId3"/>
+              </a:rPr>
+              <a:t>www.datos.gov.co</a:t>
+            </a:r>
+            <a:r>
+              <a:rPr lang="es-CO" sz="1400" dirty="0">
+                <a:solidFill>
+                  <a:schemeClr val="bg1">
+                    <a:lumMod val="25000"/>
+                  </a:schemeClr>
+                </a:solidFill>
+                <a:effectLst/>
+                <a:latin typeface="Segoe UI" panose="020B0502040204020203" pitchFamily="34" charset="0"/>
+                <a:ea typeface="Segoe UI Black" panose="020B0A02040204020203" pitchFamily="34" charset="0"/>
+                <a:cs typeface="Segoe UI" panose="020B0502040204020203" pitchFamily="34" charset="0"/>
+              </a:rPr>
+              <a:t>.</a:t>
+            </a:r>
+            <a:endParaRPr lang="es-CO" sz="1400" dirty="0">
               <a:solidFill>
                 <a:schemeClr val="bg1">
                   <a:lumMod val="25000"/>
@@ -7423,7 +7980,7 @@
           <p:nvPr/>
         </p:nvPicPr>
         <p:blipFill>
-          <a:blip r:embed="rId3"/>
+          <a:blip r:embed="rId4"/>
           <a:stretch>
             <a:fillRect/>
           </a:stretch>
@@ -7438,6 +7995,79 @@
           </a:prstGeom>
         </p:spPr>
       </p:pic>
+      <p:pic>
+        <p:nvPicPr>
+          <p:cNvPr id="13" name="Picture 12">
+            <a:extLst>
+              <a:ext uri="{FF2B5EF4-FFF2-40B4-BE49-F238E27FC236}">
+                <a16:creationId xmlns:a16="http://schemas.microsoft.com/office/drawing/2014/main" id="{A8090D4A-881E-5B25-E42C-2341C85D720B}"/>
+              </a:ext>
+            </a:extLst>
+          </p:cNvPr>
+          <p:cNvPicPr>
+            <a:picLocks noChangeAspect="1"/>
+          </p:cNvPicPr>
+          <p:nvPr/>
+        </p:nvPicPr>
+        <p:blipFill>
+          <a:blip r:embed="rId5"/>
+          <a:stretch>
+            <a:fillRect/>
+          </a:stretch>
+        </p:blipFill>
+        <p:spPr>
+          <a:xfrm>
+            <a:off x="8059246" y="5352805"/>
+            <a:ext cx="675802" cy="675802"/>
+          </a:xfrm>
+          <a:prstGeom prst="rect">
+            <a:avLst/>
+          </a:prstGeom>
+        </p:spPr>
+      </p:pic>
+      <p:sp>
+        <p:nvSpPr>
+          <p:cNvPr id="15" name="TextBox 14">
+            <a:extLst>
+              <a:ext uri="{FF2B5EF4-FFF2-40B4-BE49-F238E27FC236}">
+                <a16:creationId xmlns:a16="http://schemas.microsoft.com/office/drawing/2014/main" id="{9824449C-6DB2-50B0-59B6-EB8B674DFBF3}"/>
+              </a:ext>
+            </a:extLst>
+          </p:cNvPr>
+          <p:cNvSpPr txBox="1"/>
+          <p:nvPr/>
+        </p:nvSpPr>
+        <p:spPr>
+          <a:xfrm>
+            <a:off x="0" y="6581001"/>
+            <a:ext cx="12192000" cy="276999"/>
+          </a:xfrm>
+          <a:prstGeom prst="rect">
+            <a:avLst/>
+          </a:prstGeom>
+          <a:noFill/>
+        </p:spPr>
+        <p:txBody>
+          <a:bodyPr wrap="square">
+            <a:spAutoFit/>
+          </a:bodyPr>
+          <a:lstStyle/>
+          <a:p>
+            <a:r>
+              <a:rPr lang="es-CO" sz="1200" dirty="0">
+                <a:solidFill>
+                  <a:schemeClr val="bg1">
+                    <a:lumMod val="50000"/>
+                  </a:schemeClr>
+                </a:solidFill>
+                <a:latin typeface="+mj-lt"/>
+                <a:cs typeface="Segoe UI" panose="020B0502040204020203" pitchFamily="34" charset="0"/>
+              </a:rPr>
+              <a:t>Estudio y Análisis de la Precipitación Máxima en 24 Horas (Pmax24h) en la Red de Estaciones Climatológicas Automáticas de Colombia</a:t>
+            </a:r>
+          </a:p>
+        </p:txBody>
+      </p:sp>
     </p:spTree>
     <p:extLst>
       <p:ext uri="{BB962C8B-B14F-4D97-AF65-F5344CB8AC3E}">
@@ -7452,6 +8082,4632 @@
 </file>
 
 <file path=ppt/slides/slide4.xml><?xml version="1.0" encoding="utf-8"?>
+<p:sld xmlns:a="http://schemas.openxmlformats.org/drawingml/2006/main" xmlns:r="http://schemas.openxmlformats.org/officeDocument/2006/relationships" xmlns:p="http://schemas.openxmlformats.org/presentationml/2006/main">
+  <p:cSld>
+    <p:spTree>
+      <p:nvGrpSpPr>
+        <p:cNvPr id="1" name="">
+          <a:extLst>
+            <a:ext uri="{FF2B5EF4-FFF2-40B4-BE49-F238E27FC236}">
+              <a16:creationId xmlns:a16="http://schemas.microsoft.com/office/drawing/2014/main" id="{03D1622B-330C-B866-03D9-3E4FE89A3E21}"/>
+            </a:ext>
+          </a:extLst>
+        </p:cNvPr>
+        <p:cNvGrpSpPr/>
+        <p:nvPr/>
+      </p:nvGrpSpPr>
+      <p:grpSpPr>
+        <a:xfrm>
+          <a:off x="0" y="0"/>
+          <a:ext cx="0" cy="0"/>
+          <a:chOff x="0" y="0"/>
+          <a:chExt cx="0" cy="0"/>
+        </a:xfrm>
+      </p:grpSpPr>
+      <p:sp>
+        <p:nvSpPr>
+          <p:cNvPr id="2" name="Title 1">
+            <a:extLst>
+              <a:ext uri="{FF2B5EF4-FFF2-40B4-BE49-F238E27FC236}">
+                <a16:creationId xmlns:a16="http://schemas.microsoft.com/office/drawing/2014/main" id="{8DD356A5-87C1-FA0F-1D45-7716DA1487C9}"/>
+              </a:ext>
+            </a:extLst>
+          </p:cNvPr>
+          <p:cNvSpPr>
+            <a:spLocks noGrp="1"/>
+          </p:cNvSpPr>
+          <p:nvPr>
+            <p:ph type="title"/>
+          </p:nvPr>
+        </p:nvSpPr>
+        <p:spPr>
+          <a:xfrm>
+            <a:off x="0" y="1114729"/>
+            <a:ext cx="12192000" cy="553248"/>
+          </a:xfrm>
+        </p:spPr>
+        <p:txBody>
+          <a:bodyPr anchor="t" anchorCtr="0">
+            <a:noAutofit/>
+          </a:bodyPr>
+          <a:lstStyle/>
+          <a:p>
+            <a:pPr algn="ctr"/>
+            <a:r>
+              <a:rPr lang="es-CO" sz="3200" dirty="0">
+                <a:solidFill>
+                  <a:schemeClr val="bg1">
+                    <a:lumMod val="25000"/>
+                  </a:schemeClr>
+                </a:solidFill>
+                <a:effectLst/>
+                <a:latin typeface="Segoe UI" panose="020B0502040204020203" pitchFamily="34" charset="0"/>
+                <a:ea typeface="Segoe UI Black" panose="020B0A02040204020203" pitchFamily="34" charset="0"/>
+                <a:cs typeface="Segoe UI" panose="020B0502040204020203" pitchFamily="34" charset="0"/>
+              </a:rPr>
+              <a:t>Metodología de análisis</a:t>
+            </a:r>
+            <a:endParaRPr lang="es-CO" sz="3200" dirty="0">
+              <a:solidFill>
+                <a:schemeClr val="bg1">
+                  <a:lumMod val="25000"/>
+                </a:schemeClr>
+              </a:solidFill>
+            </a:endParaRPr>
+          </a:p>
+        </p:txBody>
+      </p:sp>
+      <p:sp>
+        <p:nvSpPr>
+          <p:cNvPr id="4" name="TextBox 3">
+            <a:extLst>
+              <a:ext uri="{FF2B5EF4-FFF2-40B4-BE49-F238E27FC236}">
+                <a16:creationId xmlns:a16="http://schemas.microsoft.com/office/drawing/2014/main" id="{F5BC034F-9898-5730-7C6D-C0AE4DC88A34}"/>
+              </a:ext>
+            </a:extLst>
+          </p:cNvPr>
+          <p:cNvSpPr txBox="1"/>
+          <p:nvPr/>
+        </p:nvSpPr>
+        <p:spPr>
+          <a:xfrm>
+            <a:off x="0" y="6581001"/>
+            <a:ext cx="12192000" cy="276999"/>
+          </a:xfrm>
+          <a:prstGeom prst="rect">
+            <a:avLst/>
+          </a:prstGeom>
+          <a:noFill/>
+        </p:spPr>
+        <p:txBody>
+          <a:bodyPr wrap="square">
+            <a:spAutoFit/>
+          </a:bodyPr>
+          <a:lstStyle/>
+          <a:p>
+            <a:r>
+              <a:rPr lang="es-CO" sz="1200" dirty="0">
+                <a:solidFill>
+                  <a:schemeClr val="bg1">
+                    <a:lumMod val="50000"/>
+                  </a:schemeClr>
+                </a:solidFill>
+                <a:latin typeface="+mj-lt"/>
+                <a:cs typeface="Segoe UI" panose="020B0502040204020203" pitchFamily="34" charset="0"/>
+              </a:rPr>
+              <a:t>Estudio y Análisis de la Precipitación Máxima en 24 Horas (Pmax24h) en la Red de Estaciones Climatológicas Automáticas de Colombia</a:t>
+            </a:r>
+          </a:p>
+        </p:txBody>
+      </p:sp>
+      <p:pic>
+        <p:nvPicPr>
+          <p:cNvPr id="5" name="Graphic 4">
+            <a:extLst>
+              <a:ext uri="{FF2B5EF4-FFF2-40B4-BE49-F238E27FC236}">
+                <a16:creationId xmlns:a16="http://schemas.microsoft.com/office/drawing/2014/main" id="{EA6125A4-B367-37B4-FC94-E0B103F14DB3}"/>
+              </a:ext>
+            </a:extLst>
+          </p:cNvPr>
+          <p:cNvPicPr>
+            <a:picLocks noChangeAspect="1"/>
+          </p:cNvPicPr>
+          <p:nvPr/>
+        </p:nvPicPr>
+        <p:blipFill>
+          <a:blip>
+            <a:extLst>
+              <a:ext uri="{96DAC541-7B7A-43D3-8B79-37D633B846F1}">
+                <asvg:svgBlip xmlns:asvg="http://schemas.microsoft.com/office/drawing/2016/SVG/main" r:embed="rId3"/>
+              </a:ext>
+            </a:extLst>
+          </a:blip>
+          <a:stretch>
+            <a:fillRect/>
+          </a:stretch>
+        </p:blipFill>
+        <p:spPr>
+          <a:xfrm>
+            <a:off x="397848" y="1948911"/>
+            <a:ext cx="11396304" cy="2960177"/>
+          </a:xfrm>
+          <a:prstGeom prst="rect">
+            <a:avLst/>
+          </a:prstGeom>
+        </p:spPr>
+      </p:pic>
+    </p:spTree>
+    <p:extLst>
+      <p:ext uri="{BB962C8B-B14F-4D97-AF65-F5344CB8AC3E}">
+        <p14:creationId xmlns:p14="http://schemas.microsoft.com/office/powerpoint/2010/main" val="1757366008"/>
+      </p:ext>
+    </p:extLst>
+  </p:cSld>
+  <p:clrMapOvr>
+    <a:masterClrMapping/>
+  </p:clrMapOvr>
+</p:sld>
+</file>
+
+<file path=ppt/slides/slide5.xml><?xml version="1.0" encoding="utf-8"?>
+<p:sld xmlns:a="http://schemas.openxmlformats.org/drawingml/2006/main" xmlns:r="http://schemas.openxmlformats.org/officeDocument/2006/relationships" xmlns:p="http://schemas.openxmlformats.org/presentationml/2006/main">
+  <p:cSld>
+    <p:spTree>
+      <p:nvGrpSpPr>
+        <p:cNvPr id="1" name="">
+          <a:extLst>
+            <a:ext uri="{FF2B5EF4-FFF2-40B4-BE49-F238E27FC236}">
+              <a16:creationId xmlns:a16="http://schemas.microsoft.com/office/drawing/2014/main" id="{6EA8F8CF-2D6C-9F04-1F40-9C732A76EC88}"/>
+            </a:ext>
+          </a:extLst>
+        </p:cNvPr>
+        <p:cNvGrpSpPr/>
+        <p:nvPr/>
+      </p:nvGrpSpPr>
+      <p:grpSpPr>
+        <a:xfrm>
+          <a:off x="0" y="0"/>
+          <a:ext cx="0" cy="0"/>
+          <a:chOff x="0" y="0"/>
+          <a:chExt cx="0" cy="0"/>
+        </a:xfrm>
+      </p:grpSpPr>
+      <p:sp>
+        <p:nvSpPr>
+          <p:cNvPr id="2" name="Title 1">
+            <a:extLst>
+              <a:ext uri="{FF2B5EF4-FFF2-40B4-BE49-F238E27FC236}">
+                <a16:creationId xmlns:a16="http://schemas.microsoft.com/office/drawing/2014/main" id="{C169871F-A6DA-EBE7-85EC-8BF806F00836}"/>
+              </a:ext>
+            </a:extLst>
+          </p:cNvPr>
+          <p:cNvSpPr>
+            <a:spLocks noGrp="1"/>
+          </p:cNvSpPr>
+          <p:nvPr>
+            <p:ph type="title"/>
+          </p:nvPr>
+        </p:nvSpPr>
+        <p:spPr>
+          <a:xfrm>
+            <a:off x="382149" y="563330"/>
+            <a:ext cx="6220830" cy="5525011"/>
+          </a:xfrm>
+        </p:spPr>
+        <p:txBody>
+          <a:bodyPr anchor="t" anchorCtr="0">
+            <a:noAutofit/>
+          </a:bodyPr>
+          <a:lstStyle/>
+          <a:p>
+            <a:pPr algn="ctr"/>
+            <a:r>
+              <a:rPr lang="es-CO" sz="3200" b="1" dirty="0">
+                <a:solidFill>
+                  <a:schemeClr val="bg1">
+                    <a:lumMod val="25000"/>
+                  </a:schemeClr>
+                </a:solidFill>
+                <a:effectLst/>
+                <a:latin typeface="Segoe UI" panose="020B0502040204020203" pitchFamily="34" charset="0"/>
+                <a:ea typeface="Segoe UI Black" panose="020B0A02040204020203" pitchFamily="34" charset="0"/>
+                <a:cs typeface="Segoe UI" panose="020B0502040204020203" pitchFamily="34" charset="0"/>
+              </a:rPr>
+              <a:t>Funciones de distribución de probabilidad (PDF y log-PDF) </a:t>
+            </a:r>
+            <a:br>
+              <a:rPr lang="es-CO" sz="3200" b="1" dirty="0">
+                <a:solidFill>
+                  <a:schemeClr val="bg1">
+                    <a:lumMod val="25000"/>
+                  </a:schemeClr>
+                </a:solidFill>
+                <a:effectLst/>
+                <a:latin typeface="Segoe UI" panose="020B0502040204020203" pitchFamily="34" charset="0"/>
+                <a:ea typeface="Segoe UI Black" panose="020B0A02040204020203" pitchFamily="34" charset="0"/>
+                <a:cs typeface="Segoe UI" panose="020B0502040204020203" pitchFamily="34" charset="0"/>
+              </a:rPr>
+            </a:br>
+            <a:br>
+              <a:rPr lang="es-CO" sz="3200" dirty="0">
+                <a:solidFill>
+                  <a:schemeClr val="bg1">
+                    <a:lumMod val="25000"/>
+                  </a:schemeClr>
+                </a:solidFill>
+                <a:effectLst/>
+                <a:latin typeface="Segoe UI" panose="020B0502040204020203" pitchFamily="34" charset="0"/>
+                <a:ea typeface="Segoe UI Black" panose="020B0A02040204020203" pitchFamily="34" charset="0"/>
+                <a:cs typeface="Segoe UI" panose="020B0502040204020203" pitchFamily="34" charset="0"/>
+              </a:rPr>
+            </a:br>
+            <a:r>
+              <a:rPr lang="es-CO" sz="3200" dirty="0">
+                <a:solidFill>
+                  <a:schemeClr val="bg1">
+                    <a:lumMod val="25000"/>
+                  </a:schemeClr>
+                </a:solidFill>
+                <a:effectLst/>
+                <a:latin typeface="Segoe UI" panose="020B0502040204020203" pitchFamily="34" charset="0"/>
+                <a:ea typeface="Segoe UI Black" panose="020B0A02040204020203" pitchFamily="34" charset="0"/>
+                <a:cs typeface="Segoe UI" panose="020B0502040204020203" pitchFamily="34" charset="0"/>
+              </a:rPr>
+              <a:t>Describen la probabilidad relativa de que una variable aleatoria continua se encuentre dentro de un rango específico (como la lluvia en cualquier momento), donde el área total bajo su curva es igual a 1 y el área sobre cualquier intervalo proporciona la probabilidad real para ese rango.</a:t>
+            </a:r>
+            <a:endParaRPr lang="es-CO" sz="3200" dirty="0">
+              <a:solidFill>
+                <a:schemeClr val="bg1">
+                  <a:lumMod val="25000"/>
+                </a:schemeClr>
+              </a:solidFill>
+            </a:endParaRPr>
+          </a:p>
+        </p:txBody>
+      </p:sp>
+      <p:sp>
+        <p:nvSpPr>
+          <p:cNvPr id="4" name="TextBox 3">
+            <a:extLst>
+              <a:ext uri="{FF2B5EF4-FFF2-40B4-BE49-F238E27FC236}">
+                <a16:creationId xmlns:a16="http://schemas.microsoft.com/office/drawing/2014/main" id="{B23F4278-F010-FBB1-ED71-E4DC8EDA2FBC}"/>
+              </a:ext>
+            </a:extLst>
+          </p:cNvPr>
+          <p:cNvSpPr txBox="1"/>
+          <p:nvPr/>
+        </p:nvSpPr>
+        <p:spPr>
+          <a:xfrm>
+            <a:off x="0" y="6581001"/>
+            <a:ext cx="12192000" cy="276999"/>
+          </a:xfrm>
+          <a:prstGeom prst="rect">
+            <a:avLst/>
+          </a:prstGeom>
+          <a:noFill/>
+        </p:spPr>
+        <p:txBody>
+          <a:bodyPr wrap="square">
+            <a:spAutoFit/>
+          </a:bodyPr>
+          <a:lstStyle/>
+          <a:p>
+            <a:r>
+              <a:rPr lang="es-CO" sz="1200" dirty="0">
+                <a:solidFill>
+                  <a:schemeClr val="bg1">
+                    <a:lumMod val="50000"/>
+                  </a:schemeClr>
+                </a:solidFill>
+                <a:latin typeface="+mj-lt"/>
+                <a:cs typeface="Segoe UI" panose="020B0502040204020203" pitchFamily="34" charset="0"/>
+              </a:rPr>
+              <a:t>Estudio y Análisis de la Precipitación Máxima en 24 Horas (Pmax24h) en la Red de Estaciones Climatológicas Automáticas de Colombia</a:t>
+            </a:r>
+          </a:p>
+        </p:txBody>
+      </p:sp>
+      <mc:AlternateContent xmlns:mc="http://schemas.openxmlformats.org/markup-compatibility/2006">
+        <mc:Choice xmlns:a14="http://schemas.microsoft.com/office/drawing/2010/main" Requires="a14">
+          <p:sp>
+            <p:nvSpPr>
+              <p:cNvPr id="3" name="Title 1">
+                <a:extLst>
+                  <a:ext uri="{FF2B5EF4-FFF2-40B4-BE49-F238E27FC236}">
+                    <a16:creationId xmlns:a16="http://schemas.microsoft.com/office/drawing/2014/main" id="{C44B9899-7829-EC78-DE94-87CA67F4F9C5}"/>
+                  </a:ext>
+                </a:extLst>
+              </p:cNvPr>
+              <p:cNvSpPr txBox="1">
+                <a:spLocks/>
+              </p:cNvSpPr>
+              <p:nvPr/>
+            </p:nvSpPr>
+            <p:spPr>
+              <a:xfrm>
+                <a:off x="7249392" y="719480"/>
+                <a:ext cx="4655368" cy="978336"/>
+              </a:xfrm>
+              <a:prstGeom prst="rect">
+                <a:avLst/>
+              </a:prstGeom>
+            </p:spPr>
+            <p:txBody>
+              <a:bodyPr vert="horz" lIns="91440" tIns="45720" rIns="91440" bIns="45720" rtlCol="0" anchor="t" anchorCtr="0">
+                <a:noAutofit/>
+              </a:bodyPr>
+              <a:lstStyle>
+                <a:lvl1pPr algn="l" defTabSz="914377" rtl="0" eaLnBrk="1" latinLnBrk="0" hangingPunct="1">
+                  <a:lnSpc>
+                    <a:spcPct val="90000"/>
+                  </a:lnSpc>
+                  <a:spcBef>
+                    <a:spcPct val="0"/>
+                  </a:spcBef>
+                  <a:buNone/>
+                  <a:defRPr sz="2600" kern="1200">
+                    <a:solidFill>
+                      <a:schemeClr val="tx1"/>
+                    </a:solidFill>
+                    <a:latin typeface="+mj-lt"/>
+                    <a:ea typeface="+mj-ea"/>
+                    <a:cs typeface="+mj-cs"/>
+                  </a:defRPr>
+                </a:lvl1pPr>
+              </a:lstStyle>
+              <a:p>
+                <a:pPr algn="ctr"/>
+                <a:r>
+                  <a:rPr lang="es-CO" sz="2400" noProof="0" dirty="0">
+                    <a:solidFill>
+                      <a:schemeClr val="bg1">
+                        <a:lumMod val="25000"/>
+                      </a:schemeClr>
+                    </a:solidFill>
+                    <a:latin typeface="Cambria Math" panose="02040503050406030204" pitchFamily="18" charset="0"/>
+                  </a:rPr>
+                  <a:t>Gumbel con sesgo derecho</a:t>
+                </a:r>
+              </a:p>
+              <a:p>
+                <a:pPr algn="ctr"/>
+                <a14:m>
+                  <m:oMathPara xmlns:m="http://schemas.openxmlformats.org/officeDocument/2006/math">
+                    <m:oMath>
+                      <m:r>
+                        <a:rPr lang="es-CO" sz="3200" i="1" noProof="0" smtClean="0">
+                          <a:solidFill>
+                            <a:schemeClr val="bg1">
+                              <a:lumMod val="25000"/>
+                            </a:schemeClr>
+                          </a:solidFill>
+                          <a:latin typeface="Cambria Math" panose="02040503050406030204" pitchFamily="18" charset="0"/>
+                        </a:rPr>
+                        <m:t>𝑓</m:t>
+                      </m:r>
+                      <m:r>
+                        <a:rPr lang="es-CO" sz="3200" b="0" i="0" noProof="0" smtClean="0">
+                          <a:solidFill>
+                            <a:schemeClr val="bg1">
+                              <a:lumMod val="25000"/>
+                            </a:schemeClr>
+                          </a:solidFill>
+                          <a:latin typeface="Cambria Math" panose="02040503050406030204" pitchFamily="18" charset="0"/>
+                        </a:rPr>
+                        <m:t>(</m:t>
+                      </m:r>
+                      <m:r>
+                        <a:rPr lang="es-CO" sz="3200" b="0" i="1" noProof="0" smtClean="0">
+                          <a:solidFill>
+                            <a:schemeClr val="bg1">
+                              <a:lumMod val="25000"/>
+                            </a:schemeClr>
+                          </a:solidFill>
+                          <a:latin typeface="Cambria Math" panose="02040503050406030204" pitchFamily="18" charset="0"/>
+                        </a:rPr>
+                        <m:t>𝑥</m:t>
+                      </m:r>
+                      <m:r>
+                        <a:rPr lang="es-CO" sz="3200" b="0" i="0" noProof="0" smtClean="0">
+                          <a:solidFill>
+                            <a:schemeClr val="bg1">
+                              <a:lumMod val="25000"/>
+                            </a:schemeClr>
+                          </a:solidFill>
+                          <a:latin typeface="Cambria Math" panose="02040503050406030204" pitchFamily="18" charset="0"/>
+                        </a:rPr>
+                        <m:t>)</m:t>
+                      </m:r>
+                      <m:r>
+                        <a:rPr lang="es-CO" sz="3200" i="1" noProof="0" smtClean="0">
+                          <a:solidFill>
+                            <a:schemeClr val="bg1">
+                              <a:lumMod val="25000"/>
+                            </a:schemeClr>
+                          </a:solidFill>
+                          <a:latin typeface="Cambria Math" panose="02040503050406030204" pitchFamily="18" charset="0"/>
+                        </a:rPr>
+                        <m:t>=</m:t>
+                      </m:r>
+                      <m:r>
+                        <m:rPr>
+                          <m:sty m:val="p"/>
+                        </m:rPr>
+                        <a:rPr lang="es-CO" sz="3200" b="0" i="0" noProof="0" smtClean="0">
+                          <a:solidFill>
+                            <a:schemeClr val="bg1">
+                              <a:lumMod val="25000"/>
+                            </a:schemeClr>
+                          </a:solidFill>
+                          <a:latin typeface="Cambria Math" panose="02040503050406030204" pitchFamily="18" charset="0"/>
+                        </a:rPr>
+                        <m:t>exp</m:t>
+                      </m:r>
+                      <m:r>
+                        <a:rPr lang="es-CO" sz="3200" b="0" i="1" noProof="0" smtClean="0">
+                          <a:solidFill>
+                            <a:schemeClr val="bg1">
+                              <a:lumMod val="25000"/>
+                            </a:schemeClr>
+                          </a:solidFill>
+                          <a:latin typeface="Cambria Math" panose="02040503050406030204" pitchFamily="18" charset="0"/>
+                        </a:rPr>
+                        <m:t>⁡(−</m:t>
+                      </m:r>
+                      <m:d>
+                        <m:dPr>
+                          <m:ctrlPr>
+                            <a:rPr lang="es-CO" sz="3200" b="0" i="1" noProof="0" smtClean="0">
+                              <a:solidFill>
+                                <a:schemeClr val="bg1">
+                                  <a:lumMod val="25000"/>
+                                </a:schemeClr>
+                              </a:solidFill>
+                              <a:latin typeface="Cambria Math" panose="02040503050406030204" pitchFamily="18" charset="0"/>
+                            </a:rPr>
+                          </m:ctrlPr>
+                        </m:dPr>
+                        <m:e>
+                          <m:r>
+                            <a:rPr lang="es-CO" sz="3200" b="0" i="1" noProof="0" smtClean="0">
+                              <a:solidFill>
+                                <a:schemeClr val="bg1">
+                                  <a:lumMod val="25000"/>
+                                </a:schemeClr>
+                              </a:solidFill>
+                              <a:latin typeface="Cambria Math" panose="02040503050406030204" pitchFamily="18" charset="0"/>
+                            </a:rPr>
+                            <m:t>𝑥</m:t>
+                          </m:r>
+                          <m:r>
+                            <a:rPr lang="es-CO" sz="3200" b="0" i="1" noProof="0" smtClean="0">
+                              <a:solidFill>
+                                <a:schemeClr val="bg1">
+                                  <a:lumMod val="25000"/>
+                                </a:schemeClr>
+                              </a:solidFill>
+                              <a:latin typeface="Cambria Math" panose="02040503050406030204" pitchFamily="18" charset="0"/>
+                            </a:rPr>
+                            <m:t>+</m:t>
+                          </m:r>
+                          <m:sSup>
+                            <m:sSupPr>
+                              <m:ctrlPr>
+                                <a:rPr lang="es-CO" sz="3200" b="0" i="1" noProof="0" smtClean="0">
+                                  <a:solidFill>
+                                    <a:schemeClr val="bg1">
+                                      <a:lumMod val="25000"/>
+                                    </a:schemeClr>
+                                  </a:solidFill>
+                                  <a:latin typeface="Cambria Math" panose="02040503050406030204" pitchFamily="18" charset="0"/>
+                                </a:rPr>
+                              </m:ctrlPr>
+                            </m:sSupPr>
+                            <m:e>
+                              <m:r>
+                                <a:rPr lang="es-CO" sz="3200" b="0" i="1" noProof="0" smtClean="0">
+                                  <a:solidFill>
+                                    <a:schemeClr val="bg1">
+                                      <a:lumMod val="25000"/>
+                                    </a:schemeClr>
+                                  </a:solidFill>
+                                  <a:latin typeface="Cambria Math" panose="02040503050406030204" pitchFamily="18" charset="0"/>
+                                </a:rPr>
+                                <m:t>𝑒</m:t>
+                              </m:r>
+                            </m:e>
+                            <m:sup>
+                              <m:r>
+                                <a:rPr lang="es-CO" sz="3200" b="0" i="1" noProof="0" smtClean="0">
+                                  <a:solidFill>
+                                    <a:schemeClr val="bg1">
+                                      <a:lumMod val="25000"/>
+                                    </a:schemeClr>
+                                  </a:solidFill>
+                                  <a:latin typeface="Cambria Math" panose="02040503050406030204" pitchFamily="18" charset="0"/>
+                                </a:rPr>
+                                <m:t>−</m:t>
+                              </m:r>
+                              <m:r>
+                                <a:rPr lang="es-CO" sz="3200" b="0" i="1" noProof="0" smtClean="0">
+                                  <a:solidFill>
+                                    <a:schemeClr val="bg1">
+                                      <a:lumMod val="25000"/>
+                                    </a:schemeClr>
+                                  </a:solidFill>
+                                  <a:latin typeface="Cambria Math" panose="02040503050406030204" pitchFamily="18" charset="0"/>
+                                </a:rPr>
+                                <m:t>𝑥</m:t>
+                              </m:r>
+                            </m:sup>
+                          </m:sSup>
+                        </m:e>
+                      </m:d>
+                      <m:r>
+                        <a:rPr lang="es-CO" sz="3200" b="0" i="1" noProof="0" smtClean="0">
+                          <a:solidFill>
+                            <a:schemeClr val="bg1">
+                              <a:lumMod val="25000"/>
+                            </a:schemeClr>
+                          </a:solidFill>
+                          <a:latin typeface="Cambria Math" panose="02040503050406030204" pitchFamily="18" charset="0"/>
+                        </a:rPr>
+                        <m:t>)</m:t>
+                      </m:r>
+                    </m:oMath>
+                  </m:oMathPara>
+                </a14:m>
+                <a:endParaRPr lang="es-CO" sz="3200" noProof="0" dirty="0">
+                  <a:solidFill>
+                    <a:schemeClr val="bg1">
+                      <a:lumMod val="25000"/>
+                    </a:schemeClr>
+                  </a:solidFill>
+                </a:endParaRPr>
+              </a:p>
+            </p:txBody>
+          </p:sp>
+        </mc:Choice>
+        <mc:Fallback>
+          <p:sp>
+            <p:nvSpPr>
+              <p:cNvPr id="3" name="Title 1">
+                <a:extLst>
+                  <a:ext uri="{FF2B5EF4-FFF2-40B4-BE49-F238E27FC236}">
+                    <a16:creationId xmlns:a16="http://schemas.microsoft.com/office/drawing/2014/main" id="{C44B9899-7829-EC78-DE94-87CA67F4F9C5}"/>
+                  </a:ext>
+                </a:extLst>
+              </p:cNvPr>
+              <p:cNvSpPr txBox="1">
+                <a:spLocks noRot="1" noChangeAspect="1" noMove="1" noResize="1" noEditPoints="1" noAdjustHandles="1" noChangeArrowheads="1" noChangeShapeType="1" noTextEdit="1"/>
+              </p:cNvSpPr>
+              <p:nvPr/>
+            </p:nvSpPr>
+            <p:spPr>
+              <a:xfrm>
+                <a:off x="7249392" y="719480"/>
+                <a:ext cx="4655368" cy="978336"/>
+              </a:xfrm>
+              <a:prstGeom prst="rect">
+                <a:avLst/>
+              </a:prstGeom>
+              <a:blipFill>
+                <a:blip r:embed="rId3"/>
+                <a:stretch>
+                  <a:fillRect t="-8696"/>
+                </a:stretch>
+              </a:blipFill>
+            </p:spPr>
+            <p:txBody>
+              <a:bodyPr/>
+              <a:lstStyle/>
+              <a:p>
+                <a:r>
+                  <a:rPr lang="es-CO">
+                    <a:noFill/>
+                  </a:rPr>
+                  <a:t> </a:t>
+                </a:r>
+              </a:p>
+            </p:txBody>
+          </p:sp>
+        </mc:Fallback>
+      </mc:AlternateContent>
+      <p:pic>
+        <p:nvPicPr>
+          <p:cNvPr id="5" name="Picture 4" descr="../../_images/scipy-stats-gumbel_r-1.png">
+            <a:extLst>
+              <a:ext uri="{FF2B5EF4-FFF2-40B4-BE49-F238E27FC236}">
+                <a16:creationId xmlns:a16="http://schemas.microsoft.com/office/drawing/2014/main" id="{46DB6E0E-72EE-ECE4-02BB-78DD06324B68}"/>
+              </a:ext>
+            </a:extLst>
+          </p:cNvPr>
+          <p:cNvPicPr>
+            <a:picLocks noChangeAspect="1"/>
+          </p:cNvPicPr>
+          <p:nvPr/>
+        </p:nvPicPr>
+        <p:blipFill>
+          <a:blip r:embed="rId4"/>
+          <a:srcRect l="11517" t="11188" r="7449" b="8902"/>
+          <a:stretch>
+            <a:fillRect/>
+          </a:stretch>
+        </p:blipFill>
+        <p:spPr>
+          <a:xfrm>
+            <a:off x="7249392" y="1697816"/>
+            <a:ext cx="4655368" cy="2843292"/>
+          </a:xfrm>
+          <a:prstGeom prst="rect">
+            <a:avLst/>
+          </a:prstGeom>
+        </p:spPr>
+      </p:pic>
+      <p:sp>
+        <p:nvSpPr>
+          <p:cNvPr id="7" name="Title 1">
+            <a:extLst>
+              <a:ext uri="{FF2B5EF4-FFF2-40B4-BE49-F238E27FC236}">
+                <a16:creationId xmlns:a16="http://schemas.microsoft.com/office/drawing/2014/main" id="{8AE5B680-1ECA-4471-85D1-7D2A2733E9FD}"/>
+              </a:ext>
+            </a:extLst>
+          </p:cNvPr>
+          <p:cNvSpPr txBox="1">
+            <a:spLocks/>
+          </p:cNvSpPr>
+          <p:nvPr/>
+        </p:nvSpPr>
+        <p:spPr>
+          <a:xfrm>
+            <a:off x="7249391" y="4541109"/>
+            <a:ext cx="4655368" cy="1238228"/>
+          </a:xfrm>
+          <a:prstGeom prst="rect">
+            <a:avLst/>
+          </a:prstGeom>
+        </p:spPr>
+        <p:txBody>
+          <a:bodyPr vert="horz" lIns="91440" tIns="45720" rIns="91440" bIns="45720" rtlCol="0" anchor="t" anchorCtr="0">
+            <a:noAutofit/>
+          </a:bodyPr>
+          <a:lstStyle>
+            <a:lvl1pPr algn="l" defTabSz="914377" rtl="0" eaLnBrk="1" latinLnBrk="0" hangingPunct="1">
+              <a:lnSpc>
+                <a:spcPct val="90000"/>
+              </a:lnSpc>
+              <a:spcBef>
+                <a:spcPct val="0"/>
+              </a:spcBef>
+              <a:buNone/>
+              <a:defRPr sz="2600" kern="1200">
+                <a:solidFill>
+                  <a:schemeClr val="tx1"/>
+                </a:solidFill>
+                <a:latin typeface="+mj-lt"/>
+                <a:ea typeface="+mj-ea"/>
+                <a:cs typeface="+mj-cs"/>
+              </a:defRPr>
+            </a:lvl1pPr>
+          </a:lstStyle>
+          <a:p>
+            <a:pPr algn="ctr"/>
+            <a:r>
+              <a:rPr lang="es-CO" sz="2400" i="1" noProof="0" dirty="0">
+                <a:solidFill>
+                  <a:schemeClr val="bg1">
+                    <a:lumMod val="25000"/>
+                  </a:schemeClr>
+                </a:solidFill>
+                <a:latin typeface="Segoe UI" panose="020B0502040204020203" pitchFamily="34" charset="0"/>
+                <a:ea typeface="Segoe UI Black" panose="020B0A02040204020203" pitchFamily="34" charset="0"/>
+                <a:cs typeface="Segoe UI" panose="020B0502040204020203" pitchFamily="34" charset="0"/>
+              </a:rPr>
+              <a:t>En éste estudio también se evaluaron todas las PDF en su forma logarítmica o log(f(x)).</a:t>
+            </a:r>
+            <a:endParaRPr lang="es-CO" sz="2400" i="1" noProof="0" dirty="0">
+              <a:solidFill>
+                <a:schemeClr val="bg1">
+                  <a:lumMod val="25000"/>
+                </a:schemeClr>
+              </a:solidFill>
+            </a:endParaRPr>
+          </a:p>
+        </p:txBody>
+      </p:sp>
+    </p:spTree>
+    <p:extLst>
+      <p:ext uri="{BB962C8B-B14F-4D97-AF65-F5344CB8AC3E}">
+        <p14:creationId xmlns:p14="http://schemas.microsoft.com/office/powerpoint/2010/main" val="2597674903"/>
+      </p:ext>
+    </p:extLst>
+  </p:cSld>
+  <p:clrMapOvr>
+    <a:masterClrMapping/>
+  </p:clrMapOvr>
+</p:sld>
+</file>
+
+<file path=ppt/slides/slide6.xml><?xml version="1.0" encoding="utf-8"?>
+<p:sld xmlns:a="http://schemas.openxmlformats.org/drawingml/2006/main" xmlns:r="http://schemas.openxmlformats.org/officeDocument/2006/relationships" xmlns:p="http://schemas.openxmlformats.org/presentationml/2006/main">
+  <p:cSld>
+    <p:spTree>
+      <p:nvGrpSpPr>
+        <p:cNvPr id="1" name="">
+          <a:extLst>
+            <a:ext uri="{FF2B5EF4-FFF2-40B4-BE49-F238E27FC236}">
+              <a16:creationId xmlns:a16="http://schemas.microsoft.com/office/drawing/2014/main" id="{B095B5D3-04E6-A175-DEA6-1426C97EDAC6}"/>
+            </a:ext>
+          </a:extLst>
+        </p:cNvPr>
+        <p:cNvGrpSpPr/>
+        <p:nvPr/>
+      </p:nvGrpSpPr>
+      <p:grpSpPr>
+        <a:xfrm>
+          <a:off x="0" y="0"/>
+          <a:ext cx="0" cy="0"/>
+          <a:chOff x="0" y="0"/>
+          <a:chExt cx="0" cy="0"/>
+        </a:xfrm>
+      </p:grpSpPr>
+      <p:sp>
+        <p:nvSpPr>
+          <p:cNvPr id="2" name="Title 1">
+            <a:extLst>
+              <a:ext uri="{FF2B5EF4-FFF2-40B4-BE49-F238E27FC236}">
+                <a16:creationId xmlns:a16="http://schemas.microsoft.com/office/drawing/2014/main" id="{53B41873-372E-396C-E943-399C7272FE8D}"/>
+              </a:ext>
+            </a:extLst>
+          </p:cNvPr>
+          <p:cNvSpPr>
+            <a:spLocks noGrp="1"/>
+          </p:cNvSpPr>
+          <p:nvPr>
+            <p:ph type="title"/>
+          </p:nvPr>
+        </p:nvSpPr>
+        <p:spPr>
+          <a:xfrm>
+            <a:off x="191184" y="651306"/>
+            <a:ext cx="9700529" cy="5555387"/>
+          </a:xfrm>
+        </p:spPr>
+        <p:txBody>
+          <a:bodyPr anchor="t" anchorCtr="0">
+            <a:noAutofit/>
+          </a:bodyPr>
+          <a:lstStyle/>
+          <a:p>
+            <a:r>
+              <a:rPr lang="es-CO" sz="3200" b="1" dirty="0">
+                <a:solidFill>
+                  <a:schemeClr val="bg1">
+                    <a:lumMod val="25000"/>
+                  </a:schemeClr>
+                </a:solidFill>
+                <a:latin typeface="Segoe UI" panose="020B0502040204020203" pitchFamily="34" charset="0"/>
+                <a:cs typeface="Segoe UI" panose="020B0502040204020203" pitchFamily="34" charset="0"/>
+              </a:rPr>
+              <a:t>Funciones de Distribución de Probabilidad (PDF)</a:t>
+            </a:r>
+            <a:br>
+              <a:rPr lang="es-CO" sz="3200" dirty="0">
+                <a:solidFill>
+                  <a:schemeClr val="bg1">
+                    <a:lumMod val="25000"/>
+                  </a:schemeClr>
+                </a:solidFill>
+                <a:latin typeface="Segoe UI" panose="020B0502040204020203" pitchFamily="34" charset="0"/>
+                <a:cs typeface="Segoe UI" panose="020B0502040204020203" pitchFamily="34" charset="0"/>
+              </a:rPr>
+            </a:br>
+            <a:br>
+              <a:rPr lang="es-CO" sz="3200" dirty="0">
+                <a:solidFill>
+                  <a:schemeClr val="bg1">
+                    <a:lumMod val="25000"/>
+                  </a:schemeClr>
+                </a:solidFill>
+                <a:latin typeface="Segoe UI" panose="020B0502040204020203" pitchFamily="34" charset="0"/>
+                <a:cs typeface="Segoe UI" panose="020B0502040204020203" pitchFamily="34" charset="0"/>
+              </a:rPr>
+            </a:br>
+            <a:r>
+              <a:rPr lang="es-CO" sz="3200" dirty="0">
+                <a:solidFill>
+                  <a:schemeClr val="bg1">
+                    <a:lumMod val="25000"/>
+                  </a:schemeClr>
+                </a:solidFill>
+                <a:latin typeface="Segoe UI" panose="020B0502040204020203" pitchFamily="34" charset="0"/>
+                <a:cs typeface="Segoe UI" panose="020B0502040204020203" pitchFamily="34" charset="0"/>
+              </a:rPr>
+              <a:t>Para el desarrollo del estudio se han seleccionado 80 de las más de 100 distribuciones de probabilidad del submódulo de estadística de </a:t>
+            </a:r>
+            <a:r>
+              <a:rPr lang="es-CO" sz="3200" b="1" dirty="0">
+                <a:solidFill>
+                  <a:schemeClr val="bg1">
+                    <a:lumMod val="25000"/>
+                  </a:schemeClr>
+                </a:solidFill>
+                <a:latin typeface="Segoe UI" panose="020B0502040204020203" pitchFamily="34" charset="0"/>
+                <a:cs typeface="Segoe UI" panose="020B0502040204020203" pitchFamily="34" charset="0"/>
+              </a:rPr>
+              <a:t>Python</a:t>
+            </a:r>
+            <a:r>
+              <a:rPr lang="es-CO" sz="3200" dirty="0">
+                <a:solidFill>
+                  <a:schemeClr val="bg1">
+                    <a:lumMod val="25000"/>
+                  </a:schemeClr>
+                </a:solidFill>
+                <a:latin typeface="Segoe UI" panose="020B0502040204020203" pitchFamily="34" charset="0"/>
+                <a:cs typeface="Segoe UI" panose="020B0502040204020203" pitchFamily="34" charset="0"/>
+              </a:rPr>
+              <a:t> dentro de la biblioteca </a:t>
+            </a:r>
+            <a:r>
+              <a:rPr lang="es-CO" sz="3200" b="1" dirty="0" err="1">
+                <a:solidFill>
+                  <a:schemeClr val="bg1">
+                    <a:lumMod val="25000"/>
+                  </a:schemeClr>
+                </a:solidFill>
+                <a:latin typeface="Segoe UI" panose="020B0502040204020203" pitchFamily="34" charset="0"/>
+                <a:cs typeface="Segoe UI" panose="020B0502040204020203" pitchFamily="34" charset="0"/>
+              </a:rPr>
+              <a:t>SciPy</a:t>
+            </a:r>
+            <a:r>
+              <a:rPr lang="es-CO" sz="3200" dirty="0">
+                <a:solidFill>
+                  <a:schemeClr val="bg1">
+                    <a:lumMod val="25000"/>
+                  </a:schemeClr>
+                </a:solidFill>
+                <a:latin typeface="Segoe UI" panose="020B0502040204020203" pitchFamily="34" charset="0"/>
+                <a:cs typeface="Segoe UI" panose="020B0502040204020203" pitchFamily="34" charset="0"/>
+              </a:rPr>
+              <a:t>.</a:t>
+            </a:r>
+            <a:br>
+              <a:rPr lang="es-CO" sz="3200" dirty="0">
+                <a:solidFill>
+                  <a:schemeClr val="bg1">
+                    <a:lumMod val="25000"/>
+                  </a:schemeClr>
+                </a:solidFill>
+                <a:latin typeface="Segoe UI" panose="020B0502040204020203" pitchFamily="34" charset="0"/>
+                <a:cs typeface="Segoe UI" panose="020B0502040204020203" pitchFamily="34" charset="0"/>
+              </a:rPr>
+            </a:br>
+            <a:r>
+              <a:rPr lang="es-CO" sz="1800" dirty="0">
+                <a:solidFill>
+                  <a:schemeClr val="bg1">
+                    <a:lumMod val="25000"/>
+                  </a:schemeClr>
+                </a:solidFill>
+                <a:latin typeface="Segoe UI" panose="020B0502040204020203" pitchFamily="34" charset="0"/>
+                <a:cs typeface="Segoe UI" panose="020B0502040204020203" pitchFamily="34" charset="0"/>
+              </a:rPr>
+              <a:t> </a:t>
+            </a:r>
+            <a:br>
+              <a:rPr lang="es-CO" sz="3200" dirty="0">
+                <a:solidFill>
+                  <a:schemeClr val="bg1">
+                    <a:lumMod val="25000"/>
+                  </a:schemeClr>
+                </a:solidFill>
+                <a:latin typeface="Segoe UI" panose="020B0502040204020203" pitchFamily="34" charset="0"/>
+                <a:cs typeface="Segoe UI" panose="020B0502040204020203" pitchFamily="34" charset="0"/>
+              </a:rPr>
+            </a:br>
+            <a:r>
+              <a:rPr lang="es-CO" sz="1600" dirty="0">
+                <a:solidFill>
+                  <a:schemeClr val="bg1">
+                    <a:lumMod val="25000"/>
+                  </a:schemeClr>
+                </a:solidFill>
+                <a:latin typeface="Segoe UI" panose="020B0502040204020203" pitchFamily="34" charset="0"/>
+                <a:cs typeface="Segoe UI" panose="020B0502040204020203" pitchFamily="34" charset="0"/>
+              </a:rPr>
+              <a:t>Distribuciones (80 evaluadas + 80 log): </a:t>
+            </a:r>
+            <a:r>
+              <a:rPr lang="es-CO" sz="1400" dirty="0">
+                <a:solidFill>
+                  <a:schemeClr val="bg1">
+                    <a:lumMod val="25000"/>
+                  </a:schemeClr>
+                </a:solidFill>
+                <a:latin typeface="Segoe UI" panose="020B0502040204020203" pitchFamily="34" charset="0"/>
+                <a:cs typeface="Segoe UI" panose="020B0502040204020203" pitchFamily="34" charset="0"/>
+              </a:rPr>
+              <a:t>• </a:t>
+            </a:r>
+            <a:r>
+              <a:rPr lang="es-CO" sz="1400" i="1" dirty="0">
+                <a:solidFill>
+                  <a:schemeClr val="bg1">
+                    <a:lumMod val="25000"/>
+                  </a:schemeClr>
+                </a:solidFill>
+                <a:latin typeface="Segoe UI" panose="020B0502040204020203" pitchFamily="34" charset="0"/>
+                <a:cs typeface="Segoe UI" panose="020B0502040204020203" pitchFamily="34" charset="0"/>
+              </a:rPr>
+              <a:t>Alpha •</a:t>
+            </a:r>
+            <a:r>
+              <a:rPr lang="es-CO" sz="1400" i="1" dirty="0" err="1">
+                <a:solidFill>
+                  <a:schemeClr val="bg1">
+                    <a:lumMod val="25000"/>
+                  </a:schemeClr>
+                </a:solidFill>
+                <a:latin typeface="Segoe UI" panose="020B0502040204020203" pitchFamily="34" charset="0"/>
+                <a:cs typeface="Segoe UI" panose="020B0502040204020203" pitchFamily="34" charset="0"/>
+              </a:rPr>
+              <a:t>Anglit</a:t>
+            </a:r>
+            <a:r>
+              <a:rPr lang="es-CO" sz="1400" i="1" dirty="0">
+                <a:solidFill>
+                  <a:schemeClr val="bg1">
+                    <a:lumMod val="25000"/>
+                  </a:schemeClr>
+                </a:solidFill>
+                <a:latin typeface="Segoe UI" panose="020B0502040204020203" pitchFamily="34" charset="0"/>
+                <a:cs typeface="Segoe UI" panose="020B0502040204020203" pitchFamily="34" charset="0"/>
+              </a:rPr>
+              <a:t> •</a:t>
+            </a:r>
+            <a:r>
+              <a:rPr lang="es-CO" sz="1400" i="1" dirty="0" err="1">
+                <a:solidFill>
+                  <a:schemeClr val="bg1">
+                    <a:lumMod val="25000"/>
+                  </a:schemeClr>
+                </a:solidFill>
+                <a:latin typeface="Segoe UI" panose="020B0502040204020203" pitchFamily="34" charset="0"/>
+                <a:cs typeface="Segoe UI" panose="020B0502040204020203" pitchFamily="34" charset="0"/>
+              </a:rPr>
+              <a:t>Arcsine</a:t>
+            </a:r>
+            <a:r>
+              <a:rPr lang="es-CO" sz="1400" i="1" dirty="0">
+                <a:solidFill>
+                  <a:schemeClr val="bg1">
+                    <a:lumMod val="25000"/>
+                  </a:schemeClr>
+                </a:solidFill>
+                <a:latin typeface="Segoe UI" panose="020B0502040204020203" pitchFamily="34" charset="0"/>
+                <a:cs typeface="Segoe UI" panose="020B0502040204020203" pitchFamily="34" charset="0"/>
+              </a:rPr>
+              <a:t> •Argus •Beta •Beta prime •Bradford •Burr (</a:t>
+            </a:r>
+            <a:r>
+              <a:rPr lang="es-CO" sz="1400" i="1" dirty="0" err="1">
+                <a:solidFill>
+                  <a:schemeClr val="bg1">
+                    <a:lumMod val="25000"/>
+                  </a:schemeClr>
+                </a:solidFill>
+                <a:latin typeface="Segoe UI" panose="020B0502040204020203" pitchFamily="34" charset="0"/>
+                <a:cs typeface="Segoe UI" panose="020B0502040204020203" pitchFamily="34" charset="0"/>
+              </a:rPr>
+              <a:t>Type</a:t>
+            </a:r>
+            <a:r>
+              <a:rPr lang="es-CO" sz="1400" i="1" dirty="0">
+                <a:solidFill>
+                  <a:schemeClr val="bg1">
+                    <a:lumMod val="25000"/>
+                  </a:schemeClr>
+                </a:solidFill>
+                <a:latin typeface="Segoe UI" panose="020B0502040204020203" pitchFamily="34" charset="0"/>
+                <a:cs typeface="Segoe UI" panose="020B0502040204020203" pitchFamily="34" charset="0"/>
+              </a:rPr>
+              <a:t> III) •Burr (</a:t>
+            </a:r>
+            <a:r>
+              <a:rPr lang="es-CO" sz="1400" i="1" dirty="0" err="1">
+                <a:solidFill>
+                  <a:schemeClr val="bg1">
+                    <a:lumMod val="25000"/>
+                  </a:schemeClr>
+                </a:solidFill>
+                <a:latin typeface="Segoe UI" panose="020B0502040204020203" pitchFamily="34" charset="0"/>
+                <a:cs typeface="Segoe UI" panose="020B0502040204020203" pitchFamily="34" charset="0"/>
+              </a:rPr>
+              <a:t>Type</a:t>
+            </a:r>
+            <a:r>
+              <a:rPr lang="es-CO" sz="1400" i="1" dirty="0">
+                <a:solidFill>
+                  <a:schemeClr val="bg1">
+                    <a:lumMod val="25000"/>
+                  </a:schemeClr>
+                </a:solidFill>
+                <a:latin typeface="Segoe UI" panose="020B0502040204020203" pitchFamily="34" charset="0"/>
+                <a:cs typeface="Segoe UI" panose="020B0502040204020203" pitchFamily="34" charset="0"/>
+              </a:rPr>
+              <a:t> III) 12 •</a:t>
+            </a:r>
+            <a:r>
+              <a:rPr lang="es-CO" sz="1400" i="1" dirty="0" err="1">
+                <a:solidFill>
+                  <a:schemeClr val="bg1">
+                    <a:lumMod val="25000"/>
+                  </a:schemeClr>
+                </a:solidFill>
+                <a:latin typeface="Segoe UI" panose="020B0502040204020203" pitchFamily="34" charset="0"/>
+                <a:cs typeface="Segoe UI" panose="020B0502040204020203" pitchFamily="34" charset="0"/>
+              </a:rPr>
+              <a:t>Cosine</a:t>
+            </a:r>
+            <a:r>
+              <a:rPr lang="es-CO" sz="1400" i="1" dirty="0">
+                <a:solidFill>
+                  <a:schemeClr val="bg1">
+                    <a:lumMod val="25000"/>
+                  </a:schemeClr>
+                </a:solidFill>
+                <a:latin typeface="Segoe UI" panose="020B0502040204020203" pitchFamily="34" charset="0"/>
+                <a:cs typeface="Segoe UI" panose="020B0502040204020203" pitchFamily="34" charset="0"/>
+              </a:rPr>
+              <a:t> •</a:t>
+            </a:r>
+            <a:r>
+              <a:rPr lang="es-CO" sz="1400" i="1" dirty="0" err="1">
+                <a:solidFill>
+                  <a:schemeClr val="bg1">
+                    <a:lumMod val="25000"/>
+                  </a:schemeClr>
+                </a:solidFill>
+                <a:latin typeface="Segoe UI" panose="020B0502040204020203" pitchFamily="34" charset="0"/>
+                <a:cs typeface="Segoe UI" panose="020B0502040204020203" pitchFamily="34" charset="0"/>
+              </a:rPr>
+              <a:t>Crystalball</a:t>
+            </a:r>
+            <a:r>
+              <a:rPr lang="es-CO" sz="1400" i="1" dirty="0">
+                <a:solidFill>
+                  <a:schemeClr val="bg1">
+                    <a:lumMod val="25000"/>
+                  </a:schemeClr>
+                </a:solidFill>
+                <a:latin typeface="Segoe UI" panose="020B0502040204020203" pitchFamily="34" charset="0"/>
+                <a:cs typeface="Segoe UI" panose="020B0502040204020203" pitchFamily="34" charset="0"/>
+              </a:rPr>
+              <a:t> •Double gamma •Double Weibull •Erlang •</a:t>
+            </a:r>
+            <a:r>
+              <a:rPr lang="es-CO" sz="1400" i="1" dirty="0" err="1">
+                <a:solidFill>
+                  <a:schemeClr val="bg1">
+                    <a:lumMod val="25000"/>
+                  </a:schemeClr>
+                </a:solidFill>
+                <a:latin typeface="Segoe UI" panose="020B0502040204020203" pitchFamily="34" charset="0"/>
+                <a:cs typeface="Segoe UI" panose="020B0502040204020203" pitchFamily="34" charset="0"/>
+              </a:rPr>
+              <a:t>Exponentially</a:t>
+            </a:r>
+            <a:r>
+              <a:rPr lang="es-CO" sz="1400" i="1" dirty="0">
+                <a:solidFill>
+                  <a:schemeClr val="bg1">
+                    <a:lumMod val="25000"/>
+                  </a:schemeClr>
+                </a:solidFill>
+                <a:latin typeface="Segoe UI" panose="020B0502040204020203" pitchFamily="34" charset="0"/>
+                <a:cs typeface="Segoe UI" panose="020B0502040204020203" pitchFamily="34" charset="0"/>
+              </a:rPr>
+              <a:t> </a:t>
+            </a:r>
+            <a:r>
+              <a:rPr lang="es-CO" sz="1400" i="1" dirty="0" err="1">
+                <a:solidFill>
+                  <a:schemeClr val="bg1">
+                    <a:lumMod val="25000"/>
+                  </a:schemeClr>
+                </a:solidFill>
+                <a:latin typeface="Segoe UI" panose="020B0502040204020203" pitchFamily="34" charset="0"/>
+                <a:cs typeface="Segoe UI" panose="020B0502040204020203" pitchFamily="34" charset="0"/>
+              </a:rPr>
+              <a:t>modified</a:t>
+            </a:r>
+            <a:r>
+              <a:rPr lang="es-CO" sz="1400" i="1" dirty="0">
+                <a:solidFill>
+                  <a:schemeClr val="bg1">
+                    <a:lumMod val="25000"/>
+                  </a:schemeClr>
+                </a:solidFill>
+                <a:latin typeface="Segoe UI" panose="020B0502040204020203" pitchFamily="34" charset="0"/>
+                <a:cs typeface="Segoe UI" panose="020B0502040204020203" pitchFamily="34" charset="0"/>
+              </a:rPr>
+              <a:t> Normal •</a:t>
+            </a:r>
+            <a:r>
+              <a:rPr lang="es-CO" sz="1400" i="1" dirty="0" err="1">
+                <a:solidFill>
+                  <a:schemeClr val="bg1">
+                    <a:lumMod val="25000"/>
+                  </a:schemeClr>
+                </a:solidFill>
+                <a:latin typeface="Segoe UI" panose="020B0502040204020203" pitchFamily="34" charset="0"/>
+                <a:cs typeface="Segoe UI" panose="020B0502040204020203" pitchFamily="34" charset="0"/>
+              </a:rPr>
+              <a:t>Exponential</a:t>
+            </a:r>
+            <a:r>
+              <a:rPr lang="es-CO" sz="1400" i="1" dirty="0">
+                <a:solidFill>
+                  <a:schemeClr val="bg1">
+                    <a:lumMod val="25000"/>
+                  </a:schemeClr>
+                </a:solidFill>
+                <a:latin typeface="Segoe UI" panose="020B0502040204020203" pitchFamily="34" charset="0"/>
+                <a:cs typeface="Segoe UI" panose="020B0502040204020203" pitchFamily="34" charset="0"/>
+              </a:rPr>
+              <a:t> </a:t>
+            </a:r>
+            <a:r>
+              <a:rPr lang="es-CO" sz="1400" i="1" dirty="0" err="1">
+                <a:solidFill>
+                  <a:schemeClr val="bg1">
+                    <a:lumMod val="25000"/>
+                  </a:schemeClr>
+                </a:solidFill>
+                <a:latin typeface="Segoe UI" panose="020B0502040204020203" pitchFamily="34" charset="0"/>
+                <a:cs typeface="Segoe UI" panose="020B0502040204020203" pitchFamily="34" charset="0"/>
+              </a:rPr>
+              <a:t>power</a:t>
+            </a:r>
+            <a:r>
+              <a:rPr lang="es-CO" sz="1400" i="1" dirty="0">
+                <a:solidFill>
+                  <a:schemeClr val="bg1">
+                    <a:lumMod val="25000"/>
+                  </a:schemeClr>
+                </a:solidFill>
+                <a:latin typeface="Segoe UI" panose="020B0502040204020203" pitchFamily="34" charset="0"/>
+                <a:cs typeface="Segoe UI" panose="020B0502040204020203" pitchFamily="34" charset="0"/>
+              </a:rPr>
+              <a:t> •</a:t>
+            </a:r>
+            <a:r>
+              <a:rPr lang="es-CO" sz="1400" i="1" dirty="0" err="1">
+                <a:solidFill>
+                  <a:schemeClr val="bg1">
+                    <a:lumMod val="25000"/>
+                  </a:schemeClr>
+                </a:solidFill>
+                <a:latin typeface="Segoe UI" panose="020B0502040204020203" pitchFamily="34" charset="0"/>
+                <a:cs typeface="Segoe UI" panose="020B0502040204020203" pitchFamily="34" charset="0"/>
+              </a:rPr>
+              <a:t>Exponentiated</a:t>
+            </a:r>
+            <a:r>
+              <a:rPr lang="es-CO" sz="1400" i="1" dirty="0">
+                <a:solidFill>
+                  <a:schemeClr val="bg1">
+                    <a:lumMod val="25000"/>
+                  </a:schemeClr>
+                </a:solidFill>
+                <a:latin typeface="Segoe UI" panose="020B0502040204020203" pitchFamily="34" charset="0"/>
+                <a:cs typeface="Segoe UI" panose="020B0502040204020203" pitchFamily="34" charset="0"/>
+              </a:rPr>
+              <a:t> Weibull •F •Fatigue-</a:t>
+            </a:r>
+            <a:r>
+              <a:rPr lang="es-CO" sz="1400" i="1" dirty="0" err="1">
+                <a:solidFill>
+                  <a:schemeClr val="bg1">
+                    <a:lumMod val="25000"/>
+                  </a:schemeClr>
+                </a:solidFill>
+                <a:latin typeface="Segoe UI" panose="020B0502040204020203" pitchFamily="34" charset="0"/>
+                <a:cs typeface="Segoe UI" panose="020B0502040204020203" pitchFamily="34" charset="0"/>
+              </a:rPr>
+              <a:t>life</a:t>
+            </a:r>
+            <a:r>
+              <a:rPr lang="es-CO" sz="1400" i="1" dirty="0">
+                <a:solidFill>
+                  <a:schemeClr val="bg1">
+                    <a:lumMod val="25000"/>
+                  </a:schemeClr>
+                </a:solidFill>
+                <a:latin typeface="Segoe UI" panose="020B0502040204020203" pitchFamily="34" charset="0"/>
+                <a:cs typeface="Segoe UI" panose="020B0502040204020203" pitchFamily="34" charset="0"/>
+              </a:rPr>
+              <a:t> (Birnbaum-Saunders) •Fold Normal •Gamma •Gauss </a:t>
+            </a:r>
+            <a:r>
+              <a:rPr lang="es-CO" sz="1400" i="1" dirty="0" err="1">
+                <a:solidFill>
+                  <a:schemeClr val="bg1">
+                    <a:lumMod val="25000"/>
+                  </a:schemeClr>
+                </a:solidFill>
+                <a:latin typeface="Segoe UI" panose="020B0502040204020203" pitchFamily="34" charset="0"/>
+                <a:cs typeface="Segoe UI" panose="020B0502040204020203" pitchFamily="34" charset="0"/>
+              </a:rPr>
+              <a:t>hypergeometric</a:t>
+            </a:r>
+            <a:r>
+              <a:rPr lang="es-CO" sz="1400" i="1" dirty="0">
+                <a:solidFill>
+                  <a:schemeClr val="bg1">
+                    <a:lumMod val="25000"/>
+                  </a:schemeClr>
+                </a:solidFill>
+                <a:latin typeface="Segoe UI" panose="020B0502040204020203" pitchFamily="34" charset="0"/>
+                <a:cs typeface="Segoe UI" panose="020B0502040204020203" pitchFamily="34" charset="0"/>
+              </a:rPr>
+              <a:t> •</a:t>
+            </a:r>
+            <a:r>
+              <a:rPr lang="es-CO" sz="1400" i="1" dirty="0" err="1">
+                <a:solidFill>
+                  <a:schemeClr val="bg1">
+                    <a:lumMod val="25000"/>
+                  </a:schemeClr>
+                </a:solidFill>
+                <a:latin typeface="Segoe UI" panose="020B0502040204020203" pitchFamily="34" charset="0"/>
+                <a:cs typeface="Segoe UI" panose="020B0502040204020203" pitchFamily="34" charset="0"/>
+              </a:rPr>
+              <a:t>Generalized</a:t>
+            </a:r>
+            <a:r>
+              <a:rPr lang="es-CO" sz="1400" i="1" dirty="0">
+                <a:solidFill>
+                  <a:schemeClr val="bg1">
+                    <a:lumMod val="25000"/>
+                  </a:schemeClr>
+                </a:solidFill>
+                <a:latin typeface="Segoe UI" panose="020B0502040204020203" pitchFamily="34" charset="0"/>
+                <a:cs typeface="Segoe UI" panose="020B0502040204020203" pitchFamily="34" charset="0"/>
+              </a:rPr>
+              <a:t> </a:t>
+            </a:r>
+            <a:r>
+              <a:rPr lang="es-CO" sz="1400" i="1" dirty="0" err="1">
+                <a:solidFill>
+                  <a:schemeClr val="bg1">
+                    <a:lumMod val="25000"/>
+                  </a:schemeClr>
+                </a:solidFill>
+                <a:latin typeface="Segoe UI" panose="020B0502040204020203" pitchFamily="34" charset="0"/>
+                <a:cs typeface="Segoe UI" panose="020B0502040204020203" pitchFamily="34" charset="0"/>
+              </a:rPr>
+              <a:t>exponential</a:t>
+            </a:r>
+            <a:r>
+              <a:rPr lang="es-CO" sz="1400" i="1" dirty="0">
+                <a:solidFill>
+                  <a:schemeClr val="bg1">
+                    <a:lumMod val="25000"/>
+                  </a:schemeClr>
+                </a:solidFill>
+                <a:latin typeface="Segoe UI" panose="020B0502040204020203" pitchFamily="34" charset="0"/>
+                <a:cs typeface="Segoe UI" panose="020B0502040204020203" pitchFamily="34" charset="0"/>
+              </a:rPr>
+              <a:t> •</a:t>
+            </a:r>
+            <a:r>
+              <a:rPr lang="es-CO" sz="1400" i="1" dirty="0" err="1">
+                <a:solidFill>
+                  <a:schemeClr val="bg1">
+                    <a:lumMod val="25000"/>
+                  </a:schemeClr>
+                </a:solidFill>
+                <a:latin typeface="Segoe UI" panose="020B0502040204020203" pitchFamily="34" charset="0"/>
+                <a:cs typeface="Segoe UI" panose="020B0502040204020203" pitchFamily="34" charset="0"/>
+              </a:rPr>
+              <a:t>Generalized</a:t>
+            </a:r>
+            <a:r>
+              <a:rPr lang="es-CO" sz="1400" i="1" dirty="0">
+                <a:solidFill>
+                  <a:schemeClr val="bg1">
+                    <a:lumMod val="25000"/>
+                  </a:schemeClr>
+                </a:solidFill>
+                <a:latin typeface="Segoe UI" panose="020B0502040204020203" pitchFamily="34" charset="0"/>
+                <a:cs typeface="Segoe UI" panose="020B0502040204020203" pitchFamily="34" charset="0"/>
+              </a:rPr>
+              <a:t> </a:t>
+            </a:r>
+            <a:r>
+              <a:rPr lang="es-CO" sz="1400" i="1" dirty="0" err="1">
+                <a:solidFill>
+                  <a:schemeClr val="bg1">
+                    <a:lumMod val="25000"/>
+                  </a:schemeClr>
+                </a:solidFill>
+                <a:latin typeface="Segoe UI" panose="020B0502040204020203" pitchFamily="34" charset="0"/>
+                <a:cs typeface="Segoe UI" panose="020B0502040204020203" pitchFamily="34" charset="0"/>
+              </a:rPr>
+              <a:t>exponential</a:t>
+            </a:r>
+            <a:r>
+              <a:rPr lang="es-CO" sz="1400" i="1" dirty="0">
+                <a:solidFill>
+                  <a:schemeClr val="bg1">
+                    <a:lumMod val="25000"/>
+                  </a:schemeClr>
+                </a:solidFill>
+                <a:latin typeface="Segoe UI" panose="020B0502040204020203" pitchFamily="34" charset="0"/>
+                <a:cs typeface="Segoe UI" panose="020B0502040204020203" pitchFamily="34" charset="0"/>
+              </a:rPr>
+              <a:t> •</a:t>
+            </a:r>
+            <a:r>
+              <a:rPr lang="es-CO" sz="1400" i="1" dirty="0" err="1">
+                <a:solidFill>
+                  <a:schemeClr val="bg1">
+                    <a:lumMod val="25000"/>
+                  </a:schemeClr>
+                </a:solidFill>
+                <a:latin typeface="Segoe UI" panose="020B0502040204020203" pitchFamily="34" charset="0"/>
+                <a:cs typeface="Segoe UI" panose="020B0502040204020203" pitchFamily="34" charset="0"/>
+              </a:rPr>
+              <a:t>Generalized</a:t>
+            </a:r>
+            <a:r>
+              <a:rPr lang="es-CO" sz="1400" i="1" dirty="0">
+                <a:solidFill>
+                  <a:schemeClr val="bg1">
+                    <a:lumMod val="25000"/>
+                  </a:schemeClr>
+                </a:solidFill>
+                <a:latin typeface="Segoe UI" panose="020B0502040204020203" pitchFamily="34" charset="0"/>
+                <a:cs typeface="Segoe UI" panose="020B0502040204020203" pitchFamily="34" charset="0"/>
+              </a:rPr>
+              <a:t> gamma •</a:t>
+            </a:r>
+            <a:r>
+              <a:rPr lang="es-CO" sz="1400" i="1" dirty="0" err="1">
+                <a:solidFill>
+                  <a:schemeClr val="bg1">
+                    <a:lumMod val="25000"/>
+                  </a:schemeClr>
+                </a:solidFill>
+                <a:latin typeface="Segoe UI" panose="020B0502040204020203" pitchFamily="34" charset="0"/>
+                <a:cs typeface="Segoe UI" panose="020B0502040204020203" pitchFamily="34" charset="0"/>
+              </a:rPr>
+              <a:t>Generalized</a:t>
+            </a:r>
+            <a:r>
+              <a:rPr lang="es-CO" sz="1400" i="1" dirty="0">
+                <a:solidFill>
+                  <a:schemeClr val="bg1">
+                    <a:lumMod val="25000"/>
+                  </a:schemeClr>
+                </a:solidFill>
+                <a:latin typeface="Segoe UI" panose="020B0502040204020203" pitchFamily="34" charset="0"/>
+                <a:cs typeface="Segoe UI" panose="020B0502040204020203" pitchFamily="34" charset="0"/>
+              </a:rPr>
+              <a:t> </a:t>
+            </a:r>
+            <a:r>
+              <a:rPr lang="es-CO" sz="1400" i="1" dirty="0" err="1">
+                <a:solidFill>
+                  <a:schemeClr val="bg1">
+                    <a:lumMod val="25000"/>
+                  </a:schemeClr>
+                </a:solidFill>
+                <a:latin typeface="Segoe UI" panose="020B0502040204020203" pitchFamily="34" charset="0"/>
+                <a:cs typeface="Segoe UI" panose="020B0502040204020203" pitchFamily="34" charset="0"/>
+              </a:rPr>
+              <a:t>half-logistic</a:t>
+            </a:r>
+            <a:r>
+              <a:rPr lang="es-CO" sz="1400" i="1" dirty="0">
+                <a:solidFill>
+                  <a:schemeClr val="bg1">
+                    <a:lumMod val="25000"/>
+                  </a:schemeClr>
+                </a:solidFill>
+                <a:latin typeface="Segoe UI" panose="020B0502040204020203" pitchFamily="34" charset="0"/>
+                <a:cs typeface="Segoe UI" panose="020B0502040204020203" pitchFamily="34" charset="0"/>
+              </a:rPr>
+              <a:t> •</a:t>
+            </a:r>
+            <a:r>
+              <a:rPr lang="es-CO" sz="1400" i="1" dirty="0" err="1">
+                <a:solidFill>
+                  <a:schemeClr val="bg1">
+                    <a:lumMod val="25000"/>
+                  </a:schemeClr>
+                </a:solidFill>
+                <a:latin typeface="Segoe UI" panose="020B0502040204020203" pitchFamily="34" charset="0"/>
+                <a:cs typeface="Segoe UI" panose="020B0502040204020203" pitchFamily="34" charset="0"/>
+              </a:rPr>
+              <a:t>Generalized</a:t>
+            </a:r>
+            <a:r>
+              <a:rPr lang="es-CO" sz="1400" i="1" dirty="0">
+                <a:solidFill>
+                  <a:schemeClr val="bg1">
+                    <a:lumMod val="25000"/>
+                  </a:schemeClr>
+                </a:solidFill>
+                <a:latin typeface="Segoe UI" panose="020B0502040204020203" pitchFamily="34" charset="0"/>
+                <a:cs typeface="Segoe UI" panose="020B0502040204020203" pitchFamily="34" charset="0"/>
+              </a:rPr>
+              <a:t> </a:t>
+            </a:r>
+            <a:r>
+              <a:rPr lang="es-CO" sz="1400" i="1" dirty="0" err="1">
+                <a:solidFill>
+                  <a:schemeClr val="bg1">
+                    <a:lumMod val="25000"/>
+                  </a:schemeClr>
+                </a:solidFill>
+                <a:latin typeface="Segoe UI" panose="020B0502040204020203" pitchFamily="34" charset="0"/>
+                <a:cs typeface="Segoe UI" panose="020B0502040204020203" pitchFamily="34" charset="0"/>
+              </a:rPr>
+              <a:t>logistic</a:t>
+            </a:r>
+            <a:r>
+              <a:rPr lang="es-CO" sz="1400" i="1" dirty="0">
+                <a:solidFill>
+                  <a:schemeClr val="bg1">
+                    <a:lumMod val="25000"/>
+                  </a:schemeClr>
+                </a:solidFill>
+                <a:latin typeface="Segoe UI" panose="020B0502040204020203" pitchFamily="34" charset="0"/>
+                <a:cs typeface="Segoe UI" panose="020B0502040204020203" pitchFamily="34" charset="0"/>
+              </a:rPr>
+              <a:t> •</a:t>
+            </a:r>
+            <a:r>
+              <a:rPr lang="es-CO" sz="1400" i="1" dirty="0" err="1">
+                <a:solidFill>
+                  <a:schemeClr val="bg1">
+                    <a:lumMod val="25000"/>
+                  </a:schemeClr>
+                </a:solidFill>
+                <a:latin typeface="Segoe UI" panose="020B0502040204020203" pitchFamily="34" charset="0"/>
+                <a:cs typeface="Segoe UI" panose="020B0502040204020203" pitchFamily="34" charset="0"/>
+              </a:rPr>
+              <a:t>Generalized</a:t>
+            </a:r>
+            <a:r>
+              <a:rPr lang="es-CO" sz="1400" i="1" dirty="0">
+                <a:solidFill>
+                  <a:schemeClr val="bg1">
+                    <a:lumMod val="25000"/>
+                  </a:schemeClr>
+                </a:solidFill>
+                <a:latin typeface="Segoe UI" panose="020B0502040204020203" pitchFamily="34" charset="0"/>
+                <a:cs typeface="Segoe UI" panose="020B0502040204020203" pitchFamily="34" charset="0"/>
+              </a:rPr>
+              <a:t> Normal •</a:t>
+            </a:r>
+            <a:r>
+              <a:rPr lang="es-CO" sz="1400" i="1" dirty="0" err="1">
+                <a:solidFill>
+                  <a:schemeClr val="bg1">
+                    <a:lumMod val="25000"/>
+                  </a:schemeClr>
+                </a:solidFill>
+                <a:latin typeface="Segoe UI" panose="020B0502040204020203" pitchFamily="34" charset="0"/>
+                <a:cs typeface="Segoe UI" panose="020B0502040204020203" pitchFamily="34" charset="0"/>
+              </a:rPr>
+              <a:t>Generalized</a:t>
+            </a:r>
+            <a:r>
+              <a:rPr lang="es-CO" sz="1400" i="1" dirty="0">
+                <a:solidFill>
+                  <a:schemeClr val="bg1">
+                    <a:lumMod val="25000"/>
+                  </a:schemeClr>
+                </a:solidFill>
+                <a:latin typeface="Segoe UI" panose="020B0502040204020203" pitchFamily="34" charset="0"/>
+                <a:cs typeface="Segoe UI" panose="020B0502040204020203" pitchFamily="34" charset="0"/>
+              </a:rPr>
+              <a:t> Pareto •</a:t>
+            </a:r>
+            <a:r>
+              <a:rPr lang="es-CO" sz="1400" i="1" dirty="0" err="1">
+                <a:solidFill>
+                  <a:schemeClr val="bg1">
+                    <a:lumMod val="25000"/>
+                  </a:schemeClr>
+                </a:solidFill>
+                <a:latin typeface="Segoe UI" panose="020B0502040204020203" pitchFamily="34" charset="0"/>
+                <a:cs typeface="Segoe UI" panose="020B0502040204020203" pitchFamily="34" charset="0"/>
+              </a:rPr>
+              <a:t>Gompertz</a:t>
+            </a:r>
+            <a:r>
+              <a:rPr lang="es-CO" sz="1400" i="1" dirty="0">
+                <a:solidFill>
+                  <a:schemeClr val="bg1">
+                    <a:lumMod val="25000"/>
+                  </a:schemeClr>
+                </a:solidFill>
+                <a:latin typeface="Segoe UI" panose="020B0502040204020203" pitchFamily="34" charset="0"/>
+                <a:cs typeface="Segoe UI" panose="020B0502040204020203" pitchFamily="34" charset="0"/>
+              </a:rPr>
+              <a:t> (</a:t>
+            </a:r>
+            <a:r>
+              <a:rPr lang="es-CO" sz="1400" i="1" dirty="0" err="1">
+                <a:solidFill>
+                  <a:schemeClr val="bg1">
+                    <a:lumMod val="25000"/>
+                  </a:schemeClr>
+                </a:solidFill>
+                <a:latin typeface="Segoe UI" panose="020B0502040204020203" pitchFamily="34" charset="0"/>
+                <a:cs typeface="Segoe UI" panose="020B0502040204020203" pitchFamily="34" charset="0"/>
+              </a:rPr>
+              <a:t>or</a:t>
+            </a:r>
+            <a:r>
+              <a:rPr lang="es-CO" sz="1400" i="1" dirty="0">
+                <a:solidFill>
+                  <a:schemeClr val="bg1">
+                    <a:lumMod val="25000"/>
+                  </a:schemeClr>
+                </a:solidFill>
+                <a:latin typeface="Segoe UI" panose="020B0502040204020203" pitchFamily="34" charset="0"/>
+                <a:cs typeface="Segoe UI" panose="020B0502040204020203" pitchFamily="34" charset="0"/>
+              </a:rPr>
+              <a:t> </a:t>
+            </a:r>
+            <a:r>
+              <a:rPr lang="es-CO" sz="1400" i="1" dirty="0" err="1">
+                <a:solidFill>
+                  <a:schemeClr val="bg1">
+                    <a:lumMod val="25000"/>
+                  </a:schemeClr>
+                </a:solidFill>
+                <a:latin typeface="Segoe UI" panose="020B0502040204020203" pitchFamily="34" charset="0"/>
+                <a:cs typeface="Segoe UI" panose="020B0502040204020203" pitchFamily="34" charset="0"/>
+              </a:rPr>
+              <a:t>truncated</a:t>
+            </a:r>
+            <a:r>
+              <a:rPr lang="es-CO" sz="1400" i="1" dirty="0">
+                <a:solidFill>
+                  <a:schemeClr val="bg1">
+                    <a:lumMod val="25000"/>
+                  </a:schemeClr>
+                </a:solidFill>
+                <a:latin typeface="Segoe UI" panose="020B0502040204020203" pitchFamily="34" charset="0"/>
+                <a:cs typeface="Segoe UI" panose="020B0502040204020203" pitchFamily="34" charset="0"/>
+              </a:rPr>
+              <a:t> Gumbel) •Gumbel Left </a:t>
+            </a:r>
+            <a:r>
+              <a:rPr lang="es-CO" sz="1400" i="1" dirty="0" err="1">
+                <a:solidFill>
+                  <a:schemeClr val="bg1">
+                    <a:lumMod val="25000"/>
+                  </a:schemeClr>
+                </a:solidFill>
+                <a:latin typeface="Segoe UI" panose="020B0502040204020203" pitchFamily="34" charset="0"/>
+                <a:cs typeface="Segoe UI" panose="020B0502040204020203" pitchFamily="34" charset="0"/>
+              </a:rPr>
+              <a:t>Skew</a:t>
+            </a:r>
+            <a:r>
+              <a:rPr lang="es-CO" sz="1400" i="1" dirty="0">
+                <a:solidFill>
+                  <a:schemeClr val="bg1">
+                    <a:lumMod val="25000"/>
+                  </a:schemeClr>
+                </a:solidFill>
+                <a:latin typeface="Segoe UI" panose="020B0502040204020203" pitchFamily="34" charset="0"/>
+                <a:cs typeface="Segoe UI" panose="020B0502040204020203" pitchFamily="34" charset="0"/>
+              </a:rPr>
+              <a:t> •Gumbel Right </a:t>
+            </a:r>
+            <a:r>
+              <a:rPr lang="es-CO" sz="1400" i="1" dirty="0" err="1">
+                <a:solidFill>
+                  <a:schemeClr val="bg1">
+                    <a:lumMod val="25000"/>
+                  </a:schemeClr>
+                </a:solidFill>
+                <a:latin typeface="Segoe UI" panose="020B0502040204020203" pitchFamily="34" charset="0"/>
+                <a:cs typeface="Segoe UI" panose="020B0502040204020203" pitchFamily="34" charset="0"/>
+              </a:rPr>
+              <a:t>Skew</a:t>
+            </a:r>
+            <a:r>
+              <a:rPr lang="es-CO" sz="1400" i="1" dirty="0">
+                <a:solidFill>
+                  <a:schemeClr val="bg1">
+                    <a:lumMod val="25000"/>
+                  </a:schemeClr>
+                </a:solidFill>
+                <a:latin typeface="Segoe UI" panose="020B0502040204020203" pitchFamily="34" charset="0"/>
+                <a:cs typeface="Segoe UI" panose="020B0502040204020203" pitchFamily="34" charset="0"/>
+              </a:rPr>
+              <a:t> •Upper </a:t>
+            </a:r>
+            <a:r>
+              <a:rPr lang="es-CO" sz="1400" i="1" dirty="0" err="1">
+                <a:solidFill>
+                  <a:schemeClr val="bg1">
+                    <a:lumMod val="25000"/>
+                  </a:schemeClr>
+                </a:solidFill>
+                <a:latin typeface="Segoe UI" panose="020B0502040204020203" pitchFamily="34" charset="0"/>
+                <a:cs typeface="Segoe UI" panose="020B0502040204020203" pitchFamily="34" charset="0"/>
+              </a:rPr>
+              <a:t>half</a:t>
+            </a:r>
+            <a:r>
+              <a:rPr lang="es-CO" sz="1400" i="1" dirty="0">
+                <a:solidFill>
+                  <a:schemeClr val="bg1">
+                    <a:lumMod val="25000"/>
+                  </a:schemeClr>
+                </a:solidFill>
+                <a:latin typeface="Segoe UI" panose="020B0502040204020203" pitchFamily="34" charset="0"/>
+                <a:cs typeface="Segoe UI" panose="020B0502040204020203" pitchFamily="34" charset="0"/>
+              </a:rPr>
+              <a:t> </a:t>
+            </a:r>
+            <a:r>
+              <a:rPr lang="es-CO" sz="1400" i="1" dirty="0" err="1">
+                <a:solidFill>
+                  <a:schemeClr val="bg1">
+                    <a:lumMod val="25000"/>
+                  </a:schemeClr>
+                </a:solidFill>
+                <a:latin typeface="Segoe UI" panose="020B0502040204020203" pitchFamily="34" charset="0"/>
+                <a:cs typeface="Segoe UI" panose="020B0502040204020203" pitchFamily="34" charset="0"/>
+              </a:rPr>
+              <a:t>of</a:t>
+            </a:r>
+            <a:r>
+              <a:rPr lang="es-CO" sz="1400" i="1" dirty="0">
+                <a:solidFill>
+                  <a:schemeClr val="bg1">
+                    <a:lumMod val="25000"/>
+                  </a:schemeClr>
+                </a:solidFill>
+                <a:latin typeface="Segoe UI" panose="020B0502040204020203" pitchFamily="34" charset="0"/>
+                <a:cs typeface="Segoe UI" panose="020B0502040204020203" pitchFamily="34" charset="0"/>
+              </a:rPr>
+              <a:t> a </a:t>
+            </a:r>
+            <a:r>
+              <a:rPr lang="es-CO" sz="1400" i="1" dirty="0" err="1">
+                <a:solidFill>
+                  <a:schemeClr val="bg1">
+                    <a:lumMod val="25000"/>
+                  </a:schemeClr>
+                </a:solidFill>
+                <a:latin typeface="Segoe UI" panose="020B0502040204020203" pitchFamily="34" charset="0"/>
+                <a:cs typeface="Segoe UI" panose="020B0502040204020203" pitchFamily="34" charset="0"/>
+              </a:rPr>
+              <a:t>generalized</a:t>
+            </a:r>
+            <a:r>
+              <a:rPr lang="es-CO" sz="1400" i="1" dirty="0">
+                <a:solidFill>
+                  <a:schemeClr val="bg1">
+                    <a:lumMod val="25000"/>
+                  </a:schemeClr>
+                </a:solidFill>
+                <a:latin typeface="Segoe UI" panose="020B0502040204020203" pitchFamily="34" charset="0"/>
+                <a:cs typeface="Segoe UI" panose="020B0502040204020203" pitchFamily="34" charset="0"/>
+              </a:rPr>
+              <a:t> normal •Half-</a:t>
+            </a:r>
+            <a:r>
+              <a:rPr lang="es-CO" sz="1400" i="1" dirty="0" err="1">
+                <a:solidFill>
+                  <a:schemeClr val="bg1">
+                    <a:lumMod val="25000"/>
+                  </a:schemeClr>
+                </a:solidFill>
+                <a:latin typeface="Segoe UI" panose="020B0502040204020203" pitchFamily="34" charset="0"/>
+                <a:cs typeface="Segoe UI" panose="020B0502040204020203" pitchFamily="34" charset="0"/>
+              </a:rPr>
+              <a:t>logistic</a:t>
+            </a:r>
+            <a:r>
+              <a:rPr lang="es-CO" sz="1400" i="1" dirty="0">
+                <a:solidFill>
+                  <a:schemeClr val="bg1">
+                    <a:lumMod val="25000"/>
+                  </a:schemeClr>
+                </a:solidFill>
+                <a:latin typeface="Segoe UI" panose="020B0502040204020203" pitchFamily="34" charset="0"/>
+                <a:cs typeface="Segoe UI" panose="020B0502040204020203" pitchFamily="34" charset="0"/>
+              </a:rPr>
+              <a:t> •Half Normal •</a:t>
+            </a:r>
+            <a:r>
+              <a:rPr lang="es-CO" sz="1400" i="1" dirty="0" err="1">
+                <a:solidFill>
+                  <a:schemeClr val="bg1">
+                    <a:lumMod val="25000"/>
+                  </a:schemeClr>
+                </a:solidFill>
+                <a:latin typeface="Segoe UI" panose="020B0502040204020203" pitchFamily="34" charset="0"/>
+                <a:cs typeface="Segoe UI" panose="020B0502040204020203" pitchFamily="34" charset="0"/>
+              </a:rPr>
+              <a:t>hyperbolic</a:t>
+            </a:r>
+            <a:r>
+              <a:rPr lang="es-CO" sz="1400" i="1" dirty="0">
+                <a:solidFill>
+                  <a:schemeClr val="bg1">
+                    <a:lumMod val="25000"/>
+                  </a:schemeClr>
+                </a:solidFill>
+                <a:latin typeface="Segoe UI" panose="020B0502040204020203" pitchFamily="34" charset="0"/>
+                <a:cs typeface="Segoe UI" panose="020B0502040204020203" pitchFamily="34" charset="0"/>
+              </a:rPr>
+              <a:t> </a:t>
+            </a:r>
+            <a:r>
+              <a:rPr lang="es-CO" sz="1400" i="1" dirty="0" err="1">
+                <a:solidFill>
+                  <a:schemeClr val="bg1">
+                    <a:lumMod val="25000"/>
+                  </a:schemeClr>
+                </a:solidFill>
+                <a:latin typeface="Segoe UI" panose="020B0502040204020203" pitchFamily="34" charset="0"/>
+                <a:cs typeface="Segoe UI" panose="020B0502040204020203" pitchFamily="34" charset="0"/>
+              </a:rPr>
+              <a:t>secant</a:t>
+            </a:r>
+            <a:r>
+              <a:rPr lang="es-CO" sz="1400" i="1" dirty="0">
+                <a:solidFill>
+                  <a:schemeClr val="bg1">
+                    <a:lumMod val="25000"/>
+                  </a:schemeClr>
+                </a:solidFill>
+                <a:latin typeface="Segoe UI" panose="020B0502040204020203" pitchFamily="34" charset="0"/>
+                <a:cs typeface="Segoe UI" panose="020B0502040204020203" pitchFamily="34" charset="0"/>
+              </a:rPr>
+              <a:t> •</a:t>
+            </a:r>
+            <a:r>
+              <a:rPr lang="es-CO" sz="1400" i="1" dirty="0" err="1">
+                <a:solidFill>
+                  <a:schemeClr val="bg1">
+                    <a:lumMod val="25000"/>
+                  </a:schemeClr>
+                </a:solidFill>
+                <a:latin typeface="Segoe UI" panose="020B0502040204020203" pitchFamily="34" charset="0"/>
+                <a:cs typeface="Segoe UI" panose="020B0502040204020203" pitchFamily="34" charset="0"/>
+              </a:rPr>
+              <a:t>Inverted</a:t>
+            </a:r>
+            <a:r>
+              <a:rPr lang="es-CO" sz="1400" i="1" dirty="0">
+                <a:solidFill>
+                  <a:schemeClr val="bg1">
+                    <a:lumMod val="25000"/>
+                  </a:schemeClr>
+                </a:solidFill>
+                <a:latin typeface="Segoe UI" panose="020B0502040204020203" pitchFamily="34" charset="0"/>
+                <a:cs typeface="Segoe UI" panose="020B0502040204020203" pitchFamily="34" charset="0"/>
+              </a:rPr>
+              <a:t> gamma •Inverse Gaussian •</a:t>
+            </a:r>
+            <a:r>
+              <a:rPr lang="es-CO" sz="1400" i="1" dirty="0" err="1">
+                <a:solidFill>
+                  <a:schemeClr val="bg1">
+                    <a:lumMod val="25000"/>
+                  </a:schemeClr>
+                </a:solidFill>
+                <a:latin typeface="Segoe UI" panose="020B0502040204020203" pitchFamily="34" charset="0"/>
+                <a:cs typeface="Segoe UI" panose="020B0502040204020203" pitchFamily="34" charset="0"/>
+              </a:rPr>
+              <a:t>Inverted</a:t>
+            </a:r>
+            <a:r>
+              <a:rPr lang="es-CO" sz="1400" i="1" dirty="0">
+                <a:solidFill>
+                  <a:schemeClr val="bg1">
+                    <a:lumMod val="25000"/>
+                  </a:schemeClr>
+                </a:solidFill>
+                <a:latin typeface="Segoe UI" panose="020B0502040204020203" pitchFamily="34" charset="0"/>
+                <a:cs typeface="Segoe UI" panose="020B0502040204020203" pitchFamily="34" charset="0"/>
+              </a:rPr>
+              <a:t> Weibull •Johnson SB •Johnson Su •Kappa 3 •Kappa 4 •</a:t>
+            </a:r>
+            <a:r>
+              <a:rPr lang="es-CO" sz="1400" i="1" dirty="0" err="1">
+                <a:solidFill>
+                  <a:schemeClr val="bg1">
+                    <a:lumMod val="25000"/>
+                  </a:schemeClr>
+                </a:solidFill>
+                <a:latin typeface="Segoe UI" panose="020B0502040204020203" pitchFamily="34" charset="0"/>
+                <a:cs typeface="Segoe UI" panose="020B0502040204020203" pitchFamily="34" charset="0"/>
+              </a:rPr>
+              <a:t>Kolmogorov</a:t>
+            </a:r>
+            <a:r>
+              <a:rPr lang="es-CO" sz="1400" i="1" dirty="0">
+                <a:solidFill>
+                  <a:schemeClr val="bg1">
+                    <a:lumMod val="25000"/>
+                  </a:schemeClr>
+                </a:solidFill>
+                <a:latin typeface="Segoe UI" panose="020B0502040204020203" pitchFamily="34" charset="0"/>
+                <a:cs typeface="Segoe UI" panose="020B0502040204020203" pitchFamily="34" charset="0"/>
+              </a:rPr>
+              <a:t>-Smirnov one-</a:t>
+            </a:r>
+            <a:r>
+              <a:rPr lang="es-CO" sz="1400" i="1" dirty="0" err="1">
+                <a:solidFill>
+                  <a:schemeClr val="bg1">
+                    <a:lumMod val="25000"/>
+                  </a:schemeClr>
+                </a:solidFill>
+                <a:latin typeface="Segoe UI" panose="020B0502040204020203" pitchFamily="34" charset="0"/>
+                <a:cs typeface="Segoe UI" panose="020B0502040204020203" pitchFamily="34" charset="0"/>
+              </a:rPr>
+              <a:t>sided</a:t>
+            </a:r>
+            <a:r>
+              <a:rPr lang="es-CO" sz="1400" i="1" dirty="0">
+                <a:solidFill>
+                  <a:schemeClr val="bg1">
+                    <a:lumMod val="25000"/>
+                  </a:schemeClr>
+                </a:solidFill>
+                <a:latin typeface="Segoe UI" panose="020B0502040204020203" pitchFamily="34" charset="0"/>
+                <a:cs typeface="Segoe UI" panose="020B0502040204020203" pitchFamily="34" charset="0"/>
+              </a:rPr>
+              <a:t> test </a:t>
+            </a:r>
+            <a:r>
+              <a:rPr lang="es-CO" sz="1400" i="1" dirty="0" err="1">
+                <a:solidFill>
+                  <a:schemeClr val="bg1">
+                    <a:lumMod val="25000"/>
+                  </a:schemeClr>
+                </a:solidFill>
+                <a:latin typeface="Segoe UI" panose="020B0502040204020203" pitchFamily="34" charset="0"/>
+                <a:cs typeface="Segoe UI" panose="020B0502040204020203" pitchFamily="34" charset="0"/>
+              </a:rPr>
+              <a:t>statistic</a:t>
+            </a:r>
+            <a:r>
+              <a:rPr lang="es-CO" sz="1400" i="1" dirty="0">
+                <a:solidFill>
+                  <a:schemeClr val="bg1">
+                    <a:lumMod val="25000"/>
+                  </a:schemeClr>
+                </a:solidFill>
+                <a:latin typeface="Segoe UI" panose="020B0502040204020203" pitchFamily="34" charset="0"/>
+                <a:cs typeface="Segoe UI" panose="020B0502040204020203" pitchFamily="34" charset="0"/>
+              </a:rPr>
+              <a:t> </a:t>
+            </a:r>
+            <a:r>
+              <a:rPr lang="es-CO" sz="1400" i="1" dirty="0" err="1">
+                <a:solidFill>
+                  <a:schemeClr val="bg1">
+                    <a:lumMod val="25000"/>
+                  </a:schemeClr>
+                </a:solidFill>
+                <a:latin typeface="Segoe UI" panose="020B0502040204020203" pitchFamily="34" charset="0"/>
+                <a:cs typeface="Segoe UI" panose="020B0502040204020203" pitchFamily="34" charset="0"/>
+              </a:rPr>
+              <a:t>distribution</a:t>
+            </a:r>
+            <a:r>
+              <a:rPr lang="es-CO" sz="1400" i="1" dirty="0">
+                <a:solidFill>
+                  <a:schemeClr val="bg1">
+                    <a:lumMod val="25000"/>
+                  </a:schemeClr>
+                </a:solidFill>
+                <a:latin typeface="Segoe UI" panose="020B0502040204020203" pitchFamily="34" charset="0"/>
+                <a:cs typeface="Segoe UI" panose="020B0502040204020203" pitchFamily="34" charset="0"/>
+              </a:rPr>
+              <a:t> •</a:t>
+            </a:r>
+            <a:r>
+              <a:rPr lang="es-CO" sz="1400" i="1" dirty="0" err="1">
+                <a:solidFill>
+                  <a:schemeClr val="bg1">
+                    <a:lumMod val="25000"/>
+                  </a:schemeClr>
+                </a:solidFill>
+                <a:latin typeface="Segoe UI" panose="020B0502040204020203" pitchFamily="34" charset="0"/>
+                <a:cs typeface="Segoe UI" panose="020B0502040204020203" pitchFamily="34" charset="0"/>
+              </a:rPr>
+              <a:t>Limiting</a:t>
+            </a:r>
+            <a:r>
+              <a:rPr lang="es-CO" sz="1400" i="1" dirty="0">
+                <a:solidFill>
+                  <a:schemeClr val="bg1">
+                    <a:lumMod val="25000"/>
+                  </a:schemeClr>
+                </a:solidFill>
+                <a:latin typeface="Segoe UI" panose="020B0502040204020203" pitchFamily="34" charset="0"/>
+                <a:cs typeface="Segoe UI" panose="020B0502040204020203" pitchFamily="34" charset="0"/>
+              </a:rPr>
+              <a:t> </a:t>
+            </a:r>
+            <a:r>
+              <a:rPr lang="es-CO" sz="1400" i="1" dirty="0" err="1">
+                <a:solidFill>
+                  <a:schemeClr val="bg1">
+                    <a:lumMod val="25000"/>
+                  </a:schemeClr>
+                </a:solidFill>
+                <a:latin typeface="Segoe UI" panose="020B0502040204020203" pitchFamily="34" charset="0"/>
+                <a:cs typeface="Segoe UI" panose="020B0502040204020203" pitchFamily="34" charset="0"/>
+              </a:rPr>
+              <a:t>distribution</a:t>
+            </a:r>
+            <a:r>
+              <a:rPr lang="es-CO" sz="1400" i="1" dirty="0">
+                <a:solidFill>
+                  <a:schemeClr val="bg1">
+                    <a:lumMod val="25000"/>
+                  </a:schemeClr>
+                </a:solidFill>
+                <a:latin typeface="Segoe UI" panose="020B0502040204020203" pitchFamily="34" charset="0"/>
+                <a:cs typeface="Segoe UI" panose="020B0502040204020203" pitchFamily="34" charset="0"/>
+              </a:rPr>
+              <a:t> </a:t>
+            </a:r>
+            <a:r>
+              <a:rPr lang="es-CO" sz="1400" i="1" dirty="0" err="1">
+                <a:solidFill>
+                  <a:schemeClr val="bg1">
+                    <a:lumMod val="25000"/>
+                  </a:schemeClr>
+                </a:solidFill>
+                <a:latin typeface="Segoe UI" panose="020B0502040204020203" pitchFamily="34" charset="0"/>
+                <a:cs typeface="Segoe UI" panose="020B0502040204020203" pitchFamily="34" charset="0"/>
+              </a:rPr>
+              <a:t>of</a:t>
+            </a:r>
+            <a:r>
+              <a:rPr lang="es-CO" sz="1400" i="1" dirty="0">
+                <a:solidFill>
+                  <a:schemeClr val="bg1">
+                    <a:lumMod val="25000"/>
+                  </a:schemeClr>
+                </a:solidFill>
+                <a:latin typeface="Segoe UI" panose="020B0502040204020203" pitchFamily="34" charset="0"/>
+                <a:cs typeface="Segoe UI" panose="020B0502040204020203" pitchFamily="34" charset="0"/>
+              </a:rPr>
+              <a:t> </a:t>
+            </a:r>
+            <a:r>
+              <a:rPr lang="es-CO" sz="1400" i="1" dirty="0" err="1">
+                <a:solidFill>
+                  <a:schemeClr val="bg1">
+                    <a:lumMod val="25000"/>
+                  </a:schemeClr>
+                </a:solidFill>
+                <a:latin typeface="Segoe UI" panose="020B0502040204020203" pitchFamily="34" charset="0"/>
+                <a:cs typeface="Segoe UI" panose="020B0502040204020203" pitchFamily="34" charset="0"/>
+              </a:rPr>
+              <a:t>scaled</a:t>
+            </a:r>
+            <a:r>
+              <a:rPr lang="es-CO" sz="1400" i="1" dirty="0">
+                <a:solidFill>
+                  <a:schemeClr val="bg1">
+                    <a:lumMod val="25000"/>
+                  </a:schemeClr>
+                </a:solidFill>
+                <a:latin typeface="Segoe UI" panose="020B0502040204020203" pitchFamily="34" charset="0"/>
+                <a:cs typeface="Segoe UI" panose="020B0502040204020203" pitchFamily="34" charset="0"/>
+              </a:rPr>
+              <a:t> </a:t>
+            </a:r>
+            <a:r>
+              <a:rPr lang="es-CO" sz="1400" i="1" dirty="0" err="1">
+                <a:solidFill>
+                  <a:schemeClr val="bg1">
+                    <a:lumMod val="25000"/>
+                  </a:schemeClr>
+                </a:solidFill>
+                <a:latin typeface="Segoe UI" panose="020B0502040204020203" pitchFamily="34" charset="0"/>
+                <a:cs typeface="Segoe UI" panose="020B0502040204020203" pitchFamily="34" charset="0"/>
+              </a:rPr>
+              <a:t>Kolmogorov</a:t>
+            </a:r>
+            <a:r>
+              <a:rPr lang="es-CO" sz="1400" i="1" dirty="0">
+                <a:solidFill>
+                  <a:schemeClr val="bg1">
+                    <a:lumMod val="25000"/>
+                  </a:schemeClr>
+                </a:solidFill>
+                <a:latin typeface="Segoe UI" panose="020B0502040204020203" pitchFamily="34" charset="0"/>
+                <a:cs typeface="Segoe UI" panose="020B0502040204020203" pitchFamily="34" charset="0"/>
+              </a:rPr>
+              <a:t>-Smirnov </a:t>
+            </a:r>
+            <a:r>
+              <a:rPr lang="es-CO" sz="1400" i="1" dirty="0" err="1">
+                <a:solidFill>
+                  <a:schemeClr val="bg1">
+                    <a:lumMod val="25000"/>
+                  </a:schemeClr>
+                </a:solidFill>
+                <a:latin typeface="Segoe UI" panose="020B0502040204020203" pitchFamily="34" charset="0"/>
+                <a:cs typeface="Segoe UI" panose="020B0502040204020203" pitchFamily="34" charset="0"/>
+              </a:rPr>
+              <a:t>two-sided</a:t>
+            </a:r>
+            <a:r>
+              <a:rPr lang="es-CO" sz="1400" i="1" dirty="0">
+                <a:solidFill>
+                  <a:schemeClr val="bg1">
+                    <a:lumMod val="25000"/>
+                  </a:schemeClr>
+                </a:solidFill>
+                <a:latin typeface="Segoe UI" panose="020B0502040204020203" pitchFamily="34" charset="0"/>
+                <a:cs typeface="Segoe UI" panose="020B0502040204020203" pitchFamily="34" charset="0"/>
+              </a:rPr>
+              <a:t> test </a:t>
+            </a:r>
+            <a:r>
+              <a:rPr lang="es-CO" sz="1400" i="1" dirty="0" err="1">
+                <a:solidFill>
+                  <a:schemeClr val="bg1">
+                    <a:lumMod val="25000"/>
+                  </a:schemeClr>
+                </a:solidFill>
+                <a:latin typeface="Segoe UI" panose="020B0502040204020203" pitchFamily="34" charset="0"/>
+                <a:cs typeface="Segoe UI" panose="020B0502040204020203" pitchFamily="34" charset="0"/>
+              </a:rPr>
+              <a:t>statistic</a:t>
+            </a:r>
+            <a:r>
+              <a:rPr lang="es-CO" sz="1400" i="1" dirty="0">
+                <a:solidFill>
+                  <a:schemeClr val="bg1">
+                    <a:lumMod val="25000"/>
+                  </a:schemeClr>
+                </a:solidFill>
+                <a:latin typeface="Segoe UI" panose="020B0502040204020203" pitchFamily="34" charset="0"/>
+                <a:cs typeface="Segoe UI" panose="020B0502040204020203" pitchFamily="34" charset="0"/>
+              </a:rPr>
+              <a:t> •Laplace •Left-</a:t>
+            </a:r>
+            <a:r>
+              <a:rPr lang="es-CO" sz="1400" i="1" dirty="0" err="1">
+                <a:solidFill>
+                  <a:schemeClr val="bg1">
+                    <a:lumMod val="25000"/>
+                  </a:schemeClr>
+                </a:solidFill>
+                <a:latin typeface="Segoe UI" panose="020B0502040204020203" pitchFamily="34" charset="0"/>
+                <a:cs typeface="Segoe UI" panose="020B0502040204020203" pitchFamily="34" charset="0"/>
+              </a:rPr>
+              <a:t>skewed</a:t>
+            </a:r>
+            <a:r>
+              <a:rPr lang="es-CO" sz="1400" i="1" dirty="0">
+                <a:solidFill>
+                  <a:schemeClr val="bg1">
+                    <a:lumMod val="25000"/>
+                  </a:schemeClr>
+                </a:solidFill>
+                <a:latin typeface="Segoe UI" panose="020B0502040204020203" pitchFamily="34" charset="0"/>
+                <a:cs typeface="Segoe UI" panose="020B0502040204020203" pitchFamily="34" charset="0"/>
+              </a:rPr>
+              <a:t> Levy •Log gamma •</a:t>
+            </a:r>
+            <a:r>
+              <a:rPr lang="es-CO" sz="1400" i="1" dirty="0" err="1">
+                <a:solidFill>
+                  <a:schemeClr val="bg1">
+                    <a:lumMod val="25000"/>
+                  </a:schemeClr>
+                </a:solidFill>
+                <a:latin typeface="Segoe UI" panose="020B0502040204020203" pitchFamily="34" charset="0"/>
+                <a:cs typeface="Segoe UI" panose="020B0502040204020203" pitchFamily="34" charset="0"/>
+              </a:rPr>
+              <a:t>Logistic</a:t>
+            </a:r>
+            <a:r>
+              <a:rPr lang="es-CO" sz="1400" i="1" dirty="0">
+                <a:solidFill>
+                  <a:schemeClr val="bg1">
+                    <a:lumMod val="25000"/>
+                  </a:schemeClr>
+                </a:solidFill>
+                <a:latin typeface="Segoe UI" panose="020B0502040204020203" pitchFamily="34" charset="0"/>
+                <a:cs typeface="Segoe UI" panose="020B0502040204020203" pitchFamily="34" charset="0"/>
+              </a:rPr>
+              <a:t> (</a:t>
+            </a:r>
+            <a:r>
+              <a:rPr lang="es-CO" sz="1400" i="1" dirty="0" err="1">
+                <a:solidFill>
+                  <a:schemeClr val="bg1">
+                    <a:lumMod val="25000"/>
+                  </a:schemeClr>
+                </a:solidFill>
+                <a:latin typeface="Segoe UI" panose="020B0502040204020203" pitchFamily="34" charset="0"/>
+                <a:cs typeface="Segoe UI" panose="020B0502040204020203" pitchFamily="34" charset="0"/>
+              </a:rPr>
+              <a:t>or</a:t>
+            </a:r>
+            <a:r>
+              <a:rPr lang="es-CO" sz="1400" i="1" dirty="0">
+                <a:solidFill>
+                  <a:schemeClr val="bg1">
+                    <a:lumMod val="25000"/>
+                  </a:schemeClr>
+                </a:solidFill>
+                <a:latin typeface="Segoe UI" panose="020B0502040204020203" pitchFamily="34" charset="0"/>
+                <a:cs typeface="Segoe UI" panose="020B0502040204020203" pitchFamily="34" charset="0"/>
+              </a:rPr>
+              <a:t> Sech-</a:t>
+            </a:r>
+            <a:r>
+              <a:rPr lang="es-CO" sz="1400" i="1" dirty="0" err="1">
+                <a:solidFill>
+                  <a:schemeClr val="bg1">
+                    <a:lumMod val="25000"/>
+                  </a:schemeClr>
+                </a:solidFill>
+                <a:latin typeface="Segoe UI" panose="020B0502040204020203" pitchFamily="34" charset="0"/>
+                <a:cs typeface="Segoe UI" panose="020B0502040204020203" pitchFamily="34" charset="0"/>
+              </a:rPr>
+              <a:t>squared</a:t>
+            </a:r>
+            <a:r>
+              <a:rPr lang="es-CO" sz="1400" i="1" dirty="0">
+                <a:solidFill>
+                  <a:schemeClr val="bg1">
+                    <a:lumMod val="25000"/>
+                  </a:schemeClr>
+                </a:solidFill>
+                <a:latin typeface="Segoe UI" panose="020B0502040204020203" pitchFamily="34" charset="0"/>
+                <a:cs typeface="Segoe UI" panose="020B0502040204020203" pitchFamily="34" charset="0"/>
+              </a:rPr>
+              <a:t>) •Log-Laplace •Lomax (Pareto </a:t>
+            </a:r>
+            <a:r>
+              <a:rPr lang="es-CO" sz="1400" i="1" dirty="0" err="1">
+                <a:solidFill>
+                  <a:schemeClr val="bg1">
+                    <a:lumMod val="25000"/>
+                  </a:schemeClr>
+                </a:solidFill>
+                <a:latin typeface="Segoe UI" panose="020B0502040204020203" pitchFamily="34" charset="0"/>
+                <a:cs typeface="Segoe UI" panose="020B0502040204020203" pitchFamily="34" charset="0"/>
+              </a:rPr>
+              <a:t>of</a:t>
+            </a:r>
+            <a:r>
+              <a:rPr lang="es-CO" sz="1400" i="1" dirty="0">
+                <a:solidFill>
+                  <a:schemeClr val="bg1">
+                    <a:lumMod val="25000"/>
+                  </a:schemeClr>
+                </a:solidFill>
+                <a:latin typeface="Segoe UI" panose="020B0502040204020203" pitchFamily="34" charset="0"/>
+                <a:cs typeface="Segoe UI" panose="020B0502040204020203" pitchFamily="34" charset="0"/>
+              </a:rPr>
+              <a:t> </a:t>
+            </a:r>
+            <a:r>
+              <a:rPr lang="es-CO" sz="1400" i="1" dirty="0" err="1">
+                <a:solidFill>
+                  <a:schemeClr val="bg1">
+                    <a:lumMod val="25000"/>
+                  </a:schemeClr>
+                </a:solidFill>
+                <a:latin typeface="Segoe UI" panose="020B0502040204020203" pitchFamily="34" charset="0"/>
+                <a:cs typeface="Segoe UI" panose="020B0502040204020203" pitchFamily="34" charset="0"/>
+              </a:rPr>
+              <a:t>the</a:t>
+            </a:r>
+            <a:r>
+              <a:rPr lang="es-CO" sz="1400" i="1" dirty="0">
+                <a:solidFill>
+                  <a:schemeClr val="bg1">
+                    <a:lumMod val="25000"/>
+                  </a:schemeClr>
+                </a:solidFill>
+                <a:latin typeface="Segoe UI" panose="020B0502040204020203" pitchFamily="34" charset="0"/>
+                <a:cs typeface="Segoe UI" panose="020B0502040204020203" pitchFamily="34" charset="0"/>
+              </a:rPr>
+              <a:t> </a:t>
+            </a:r>
+            <a:r>
+              <a:rPr lang="es-CO" sz="1400" i="1" dirty="0" err="1">
+                <a:solidFill>
+                  <a:schemeClr val="bg1">
+                    <a:lumMod val="25000"/>
+                  </a:schemeClr>
+                </a:solidFill>
+                <a:latin typeface="Segoe UI" panose="020B0502040204020203" pitchFamily="34" charset="0"/>
+                <a:cs typeface="Segoe UI" panose="020B0502040204020203" pitchFamily="34" charset="0"/>
+              </a:rPr>
+              <a:t>second</a:t>
+            </a:r>
+            <a:r>
+              <a:rPr lang="es-CO" sz="1400" i="1" dirty="0">
+                <a:solidFill>
+                  <a:schemeClr val="bg1">
+                    <a:lumMod val="25000"/>
+                  </a:schemeClr>
+                </a:solidFill>
+                <a:latin typeface="Segoe UI" panose="020B0502040204020203" pitchFamily="34" charset="0"/>
+                <a:cs typeface="Segoe UI" panose="020B0502040204020203" pitchFamily="34" charset="0"/>
+              </a:rPr>
+              <a:t> </a:t>
+            </a:r>
+            <a:r>
+              <a:rPr lang="es-CO" sz="1400" i="1" dirty="0" err="1">
+                <a:solidFill>
+                  <a:schemeClr val="bg1">
+                    <a:lumMod val="25000"/>
+                  </a:schemeClr>
+                </a:solidFill>
+                <a:latin typeface="Segoe UI" panose="020B0502040204020203" pitchFamily="34" charset="0"/>
+                <a:cs typeface="Segoe UI" panose="020B0502040204020203" pitchFamily="34" charset="0"/>
+              </a:rPr>
+              <a:t>kind</a:t>
+            </a:r>
+            <a:r>
+              <a:rPr lang="es-CO" sz="1400" i="1" dirty="0">
+                <a:solidFill>
+                  <a:schemeClr val="bg1">
+                    <a:lumMod val="25000"/>
+                  </a:schemeClr>
+                </a:solidFill>
+                <a:latin typeface="Segoe UI" panose="020B0502040204020203" pitchFamily="34" charset="0"/>
+                <a:cs typeface="Segoe UI" panose="020B0502040204020203" pitchFamily="34" charset="0"/>
+              </a:rPr>
+              <a:t>) •Maxwell •Mielke Beta-Kappa / </a:t>
+            </a:r>
+            <a:r>
+              <a:rPr lang="es-CO" sz="1400" i="1" dirty="0" err="1">
+                <a:solidFill>
+                  <a:schemeClr val="bg1">
+                    <a:lumMod val="25000"/>
+                  </a:schemeClr>
+                </a:solidFill>
+                <a:latin typeface="Segoe UI" panose="020B0502040204020203" pitchFamily="34" charset="0"/>
+                <a:cs typeface="Segoe UI" panose="020B0502040204020203" pitchFamily="34" charset="0"/>
+              </a:rPr>
+              <a:t>Dagum</a:t>
+            </a:r>
+            <a:r>
+              <a:rPr lang="es-CO" sz="1400" i="1" dirty="0">
+                <a:solidFill>
+                  <a:schemeClr val="bg1">
+                    <a:lumMod val="25000"/>
+                  </a:schemeClr>
+                </a:solidFill>
+                <a:latin typeface="Segoe UI" panose="020B0502040204020203" pitchFamily="34" charset="0"/>
+                <a:cs typeface="Segoe UI" panose="020B0502040204020203" pitchFamily="34" charset="0"/>
+              </a:rPr>
+              <a:t> •Moyal •</a:t>
+            </a:r>
+            <a:r>
+              <a:rPr lang="es-CO" sz="1400" i="1" dirty="0" err="1">
+                <a:solidFill>
+                  <a:schemeClr val="bg1">
+                    <a:lumMod val="25000"/>
+                  </a:schemeClr>
+                </a:solidFill>
+                <a:latin typeface="Segoe UI" panose="020B0502040204020203" pitchFamily="34" charset="0"/>
+                <a:cs typeface="Segoe UI" panose="020B0502040204020203" pitchFamily="34" charset="0"/>
+              </a:rPr>
+              <a:t>Nakagami</a:t>
+            </a:r>
+            <a:r>
+              <a:rPr lang="es-CO" sz="1400" i="1" dirty="0">
+                <a:solidFill>
+                  <a:schemeClr val="bg1">
+                    <a:lumMod val="25000"/>
+                  </a:schemeClr>
+                </a:solidFill>
+                <a:latin typeface="Segoe UI" panose="020B0502040204020203" pitchFamily="34" charset="0"/>
+                <a:cs typeface="Segoe UI" panose="020B0502040204020203" pitchFamily="34" charset="0"/>
+              </a:rPr>
+              <a:t> •Non-central F </a:t>
+            </a:r>
+            <a:r>
+              <a:rPr lang="es-CO" sz="1400" i="1" dirty="0" err="1">
+                <a:solidFill>
+                  <a:schemeClr val="bg1">
+                    <a:lumMod val="25000"/>
+                  </a:schemeClr>
+                </a:solidFill>
+                <a:latin typeface="Segoe UI" panose="020B0502040204020203" pitchFamily="34" charset="0"/>
+                <a:cs typeface="Segoe UI" panose="020B0502040204020203" pitchFamily="34" charset="0"/>
+              </a:rPr>
+              <a:t>distribution</a:t>
+            </a:r>
+            <a:r>
+              <a:rPr lang="es-CO" sz="1400" i="1" dirty="0">
+                <a:solidFill>
+                  <a:schemeClr val="bg1">
+                    <a:lumMod val="25000"/>
+                  </a:schemeClr>
+                </a:solidFill>
+                <a:latin typeface="Segoe UI" panose="020B0502040204020203" pitchFamily="34" charset="0"/>
+                <a:cs typeface="Segoe UI" panose="020B0502040204020203" pitchFamily="34" charset="0"/>
+              </a:rPr>
+              <a:t> •Non-central </a:t>
+            </a:r>
+            <a:r>
+              <a:rPr lang="es-CO" sz="1400" i="1" dirty="0" err="1">
+                <a:solidFill>
+                  <a:schemeClr val="bg1">
+                    <a:lumMod val="25000"/>
+                  </a:schemeClr>
+                </a:solidFill>
+                <a:latin typeface="Segoe UI" panose="020B0502040204020203" pitchFamily="34" charset="0"/>
+                <a:cs typeface="Segoe UI" panose="020B0502040204020203" pitchFamily="34" charset="0"/>
+              </a:rPr>
+              <a:t>Student’s</a:t>
+            </a:r>
+            <a:r>
+              <a:rPr lang="es-CO" sz="1400" i="1" dirty="0">
+                <a:solidFill>
+                  <a:schemeClr val="bg1">
+                    <a:lumMod val="25000"/>
+                  </a:schemeClr>
+                </a:solidFill>
+                <a:latin typeface="Segoe UI" panose="020B0502040204020203" pitchFamily="34" charset="0"/>
+                <a:cs typeface="Segoe UI" panose="020B0502040204020203" pitchFamily="34" charset="0"/>
+              </a:rPr>
+              <a:t> t •Normal •Pearson </a:t>
+            </a:r>
+            <a:r>
+              <a:rPr lang="es-CO" sz="1400" i="1" dirty="0" err="1">
+                <a:solidFill>
+                  <a:schemeClr val="bg1">
+                    <a:lumMod val="25000"/>
+                  </a:schemeClr>
+                </a:solidFill>
+                <a:latin typeface="Segoe UI" panose="020B0502040204020203" pitchFamily="34" charset="0"/>
+                <a:cs typeface="Segoe UI" panose="020B0502040204020203" pitchFamily="34" charset="0"/>
+              </a:rPr>
+              <a:t>type</a:t>
+            </a:r>
+            <a:r>
+              <a:rPr lang="es-CO" sz="1400" i="1" dirty="0">
+                <a:solidFill>
+                  <a:schemeClr val="bg1">
+                    <a:lumMod val="25000"/>
+                  </a:schemeClr>
+                </a:solidFill>
+                <a:latin typeface="Segoe UI" panose="020B0502040204020203" pitchFamily="34" charset="0"/>
+                <a:cs typeface="Segoe UI" panose="020B0502040204020203" pitchFamily="34" charset="0"/>
+              </a:rPr>
+              <a:t> III •Power-</a:t>
+            </a:r>
+            <a:r>
+              <a:rPr lang="es-CO" sz="1400" i="1" dirty="0" err="1">
+                <a:solidFill>
+                  <a:schemeClr val="bg1">
+                    <a:lumMod val="25000"/>
+                  </a:schemeClr>
+                </a:solidFill>
+                <a:latin typeface="Segoe UI" panose="020B0502040204020203" pitchFamily="34" charset="0"/>
+                <a:cs typeface="Segoe UI" panose="020B0502040204020203" pitchFamily="34" charset="0"/>
+              </a:rPr>
+              <a:t>function</a:t>
+            </a:r>
+            <a:r>
+              <a:rPr lang="es-CO" sz="1400" i="1" dirty="0">
+                <a:solidFill>
+                  <a:schemeClr val="bg1">
+                    <a:lumMod val="25000"/>
+                  </a:schemeClr>
+                </a:solidFill>
+                <a:latin typeface="Segoe UI" panose="020B0502040204020203" pitchFamily="34" charset="0"/>
+                <a:cs typeface="Segoe UI" panose="020B0502040204020203" pitchFamily="34" charset="0"/>
+              </a:rPr>
+              <a:t> •Rayleigh •R-</a:t>
+            </a:r>
+            <a:r>
+              <a:rPr lang="es-CO" sz="1400" i="1" dirty="0" err="1">
+                <a:solidFill>
+                  <a:schemeClr val="bg1">
+                    <a:lumMod val="25000"/>
+                  </a:schemeClr>
+                </a:solidFill>
+                <a:latin typeface="Segoe UI" panose="020B0502040204020203" pitchFamily="34" charset="0"/>
+                <a:cs typeface="Segoe UI" panose="020B0502040204020203" pitchFamily="34" charset="0"/>
+              </a:rPr>
+              <a:t>distributed</a:t>
+            </a:r>
+            <a:r>
+              <a:rPr lang="es-CO" sz="1400" i="1" dirty="0">
+                <a:solidFill>
+                  <a:schemeClr val="bg1">
+                    <a:lumMod val="25000"/>
+                  </a:schemeClr>
+                </a:solidFill>
+                <a:latin typeface="Segoe UI" panose="020B0502040204020203" pitchFamily="34" charset="0"/>
+                <a:cs typeface="Segoe UI" panose="020B0502040204020203" pitchFamily="34" charset="0"/>
+              </a:rPr>
+              <a:t> (</a:t>
+            </a:r>
+            <a:r>
+              <a:rPr lang="es-CO" sz="1400" i="1" dirty="0" err="1">
+                <a:solidFill>
+                  <a:schemeClr val="bg1">
+                    <a:lumMod val="25000"/>
+                  </a:schemeClr>
+                </a:solidFill>
+                <a:latin typeface="Segoe UI" panose="020B0502040204020203" pitchFamily="34" charset="0"/>
+                <a:cs typeface="Segoe UI" panose="020B0502040204020203" pitchFamily="34" charset="0"/>
+              </a:rPr>
+              <a:t>symmetric</a:t>
+            </a:r>
+            <a:r>
+              <a:rPr lang="es-CO" sz="1400" i="1" dirty="0">
+                <a:solidFill>
+                  <a:schemeClr val="bg1">
+                    <a:lumMod val="25000"/>
+                  </a:schemeClr>
+                </a:solidFill>
+                <a:latin typeface="Segoe UI" panose="020B0502040204020203" pitchFamily="34" charset="0"/>
+                <a:cs typeface="Segoe UI" panose="020B0502040204020203" pitchFamily="34" charset="0"/>
+              </a:rPr>
+              <a:t> beta) •Rice •Semicircular •</a:t>
+            </a:r>
+            <a:r>
+              <a:rPr lang="es-CO" sz="1400" i="1" dirty="0" err="1">
+                <a:solidFill>
+                  <a:schemeClr val="bg1">
+                    <a:lumMod val="25000"/>
+                  </a:schemeClr>
+                </a:solidFill>
+                <a:latin typeface="Segoe UI" panose="020B0502040204020203" pitchFamily="34" charset="0"/>
+                <a:cs typeface="Segoe UI" panose="020B0502040204020203" pitchFamily="34" charset="0"/>
+              </a:rPr>
+              <a:t>Skew</a:t>
+            </a:r>
+            <a:r>
+              <a:rPr lang="es-CO" sz="1400" i="1" dirty="0">
+                <a:solidFill>
+                  <a:schemeClr val="bg1">
+                    <a:lumMod val="25000"/>
+                  </a:schemeClr>
+                </a:solidFill>
+                <a:latin typeface="Segoe UI" panose="020B0502040204020203" pitchFamily="34" charset="0"/>
+                <a:cs typeface="Segoe UI" panose="020B0502040204020203" pitchFamily="34" charset="0"/>
+              </a:rPr>
+              <a:t> normal •</a:t>
+            </a:r>
+            <a:r>
+              <a:rPr lang="es-CO" sz="1400" i="1" dirty="0" err="1">
+                <a:solidFill>
+                  <a:schemeClr val="bg1">
+                    <a:lumMod val="25000"/>
+                  </a:schemeClr>
+                </a:solidFill>
+                <a:latin typeface="Segoe UI" panose="020B0502040204020203" pitchFamily="34" charset="0"/>
+                <a:cs typeface="Segoe UI" panose="020B0502040204020203" pitchFamily="34" charset="0"/>
+              </a:rPr>
+              <a:t>Student’s</a:t>
+            </a:r>
+            <a:r>
+              <a:rPr lang="es-CO" sz="1400" i="1" dirty="0">
+                <a:solidFill>
+                  <a:schemeClr val="bg1">
+                    <a:lumMod val="25000"/>
+                  </a:schemeClr>
+                </a:solidFill>
+                <a:latin typeface="Segoe UI" panose="020B0502040204020203" pitchFamily="34" charset="0"/>
+                <a:cs typeface="Segoe UI" panose="020B0502040204020203" pitchFamily="34" charset="0"/>
+              </a:rPr>
+              <a:t> t •</a:t>
+            </a:r>
+            <a:r>
+              <a:rPr lang="es-CO" sz="1400" i="1" dirty="0" err="1">
+                <a:solidFill>
+                  <a:schemeClr val="bg1">
+                    <a:lumMod val="25000"/>
+                  </a:schemeClr>
+                </a:solidFill>
+                <a:latin typeface="Segoe UI" panose="020B0502040204020203" pitchFamily="34" charset="0"/>
+                <a:cs typeface="Segoe UI" panose="020B0502040204020203" pitchFamily="34" charset="0"/>
+              </a:rPr>
+              <a:t>Trapezoid</a:t>
+            </a:r>
+            <a:r>
+              <a:rPr lang="es-CO" sz="1400" i="1" dirty="0">
+                <a:solidFill>
+                  <a:schemeClr val="bg1">
+                    <a:lumMod val="25000"/>
+                  </a:schemeClr>
+                </a:solidFill>
+                <a:latin typeface="Segoe UI" panose="020B0502040204020203" pitchFamily="34" charset="0"/>
+                <a:cs typeface="Segoe UI" panose="020B0502040204020203" pitchFamily="34" charset="0"/>
+              </a:rPr>
+              <a:t> •Triangular •</a:t>
+            </a:r>
+            <a:r>
+              <a:rPr lang="es-CO" sz="1400" i="1" dirty="0" err="1">
+                <a:solidFill>
+                  <a:schemeClr val="bg1">
+                    <a:lumMod val="25000"/>
+                  </a:schemeClr>
+                </a:solidFill>
+                <a:latin typeface="Segoe UI" panose="020B0502040204020203" pitchFamily="34" charset="0"/>
+                <a:cs typeface="Segoe UI" panose="020B0502040204020203" pitchFamily="34" charset="0"/>
+              </a:rPr>
+              <a:t>Truncated</a:t>
+            </a:r>
+            <a:r>
+              <a:rPr lang="es-CO" sz="1400" i="1" dirty="0">
+                <a:solidFill>
+                  <a:schemeClr val="bg1">
+                    <a:lumMod val="25000"/>
+                  </a:schemeClr>
+                </a:solidFill>
+                <a:latin typeface="Segoe UI" panose="020B0502040204020203" pitchFamily="34" charset="0"/>
+                <a:cs typeface="Segoe UI" panose="020B0502040204020203" pitchFamily="34" charset="0"/>
+              </a:rPr>
+              <a:t> </a:t>
+            </a:r>
+            <a:r>
+              <a:rPr lang="es-CO" sz="1400" i="1" dirty="0" err="1">
+                <a:solidFill>
+                  <a:schemeClr val="bg1">
+                    <a:lumMod val="25000"/>
+                  </a:schemeClr>
+                </a:solidFill>
+                <a:latin typeface="Segoe UI" panose="020B0502040204020203" pitchFamily="34" charset="0"/>
+                <a:cs typeface="Segoe UI" panose="020B0502040204020203" pitchFamily="34" charset="0"/>
+              </a:rPr>
+              <a:t>exponential</a:t>
+            </a:r>
+            <a:r>
+              <a:rPr lang="es-CO" sz="1400" i="1" dirty="0">
+                <a:solidFill>
+                  <a:schemeClr val="bg1">
+                    <a:lumMod val="25000"/>
+                  </a:schemeClr>
+                </a:solidFill>
+                <a:latin typeface="Segoe UI" panose="020B0502040204020203" pitchFamily="34" charset="0"/>
+                <a:cs typeface="Segoe UI" panose="020B0502040204020203" pitchFamily="34" charset="0"/>
+              </a:rPr>
+              <a:t> •</a:t>
+            </a:r>
+            <a:r>
+              <a:rPr lang="es-CO" sz="1400" i="1" dirty="0" err="1">
+                <a:solidFill>
+                  <a:schemeClr val="bg1">
+                    <a:lumMod val="25000"/>
+                  </a:schemeClr>
+                </a:solidFill>
+                <a:latin typeface="Segoe UI" panose="020B0502040204020203" pitchFamily="34" charset="0"/>
+                <a:cs typeface="Segoe UI" panose="020B0502040204020203" pitchFamily="34" charset="0"/>
+              </a:rPr>
+              <a:t>Truncated</a:t>
+            </a:r>
+            <a:r>
+              <a:rPr lang="es-CO" sz="1400" i="1" dirty="0">
+                <a:solidFill>
+                  <a:schemeClr val="bg1">
+                    <a:lumMod val="25000"/>
+                  </a:schemeClr>
+                </a:solidFill>
+                <a:latin typeface="Segoe UI" panose="020B0502040204020203" pitchFamily="34" charset="0"/>
+                <a:cs typeface="Segoe UI" panose="020B0502040204020203" pitchFamily="34" charset="0"/>
+              </a:rPr>
+              <a:t> normal •Upper </a:t>
+            </a:r>
+            <a:r>
+              <a:rPr lang="es-CO" sz="1400" i="1" dirty="0" err="1">
+                <a:solidFill>
+                  <a:schemeClr val="bg1">
+                    <a:lumMod val="25000"/>
+                  </a:schemeClr>
+                </a:solidFill>
+                <a:latin typeface="Segoe UI" panose="020B0502040204020203" pitchFamily="34" charset="0"/>
+                <a:cs typeface="Segoe UI" panose="020B0502040204020203" pitchFamily="34" charset="0"/>
+              </a:rPr>
+              <a:t>truncated</a:t>
+            </a:r>
+            <a:r>
+              <a:rPr lang="es-CO" sz="1400" i="1" dirty="0">
+                <a:solidFill>
+                  <a:schemeClr val="bg1">
+                    <a:lumMod val="25000"/>
+                  </a:schemeClr>
+                </a:solidFill>
+                <a:latin typeface="Segoe UI" panose="020B0502040204020203" pitchFamily="34" charset="0"/>
+                <a:cs typeface="Segoe UI" panose="020B0502040204020203" pitchFamily="34" charset="0"/>
+              </a:rPr>
+              <a:t> Pareto •</a:t>
+            </a:r>
+            <a:r>
+              <a:rPr lang="es-CO" sz="1400" i="1" dirty="0" err="1">
+                <a:solidFill>
+                  <a:schemeClr val="bg1">
+                    <a:lumMod val="25000"/>
+                  </a:schemeClr>
+                </a:solidFill>
+                <a:latin typeface="Segoe UI" panose="020B0502040204020203" pitchFamily="34" charset="0"/>
+                <a:cs typeface="Segoe UI" panose="020B0502040204020203" pitchFamily="34" charset="0"/>
+              </a:rPr>
+              <a:t>Doubly</a:t>
+            </a:r>
+            <a:r>
+              <a:rPr lang="es-CO" sz="1400" i="1" dirty="0">
+                <a:solidFill>
+                  <a:schemeClr val="bg1">
+                    <a:lumMod val="25000"/>
+                  </a:schemeClr>
+                </a:solidFill>
+                <a:latin typeface="Segoe UI" panose="020B0502040204020203" pitchFamily="34" charset="0"/>
+                <a:cs typeface="Segoe UI" panose="020B0502040204020203" pitchFamily="34" charset="0"/>
+              </a:rPr>
+              <a:t> </a:t>
+            </a:r>
+            <a:r>
+              <a:rPr lang="es-CO" sz="1400" i="1" dirty="0" err="1">
+                <a:solidFill>
+                  <a:schemeClr val="bg1">
+                    <a:lumMod val="25000"/>
+                  </a:schemeClr>
+                </a:solidFill>
+                <a:latin typeface="Segoe UI" panose="020B0502040204020203" pitchFamily="34" charset="0"/>
+                <a:cs typeface="Segoe UI" panose="020B0502040204020203" pitchFamily="34" charset="0"/>
+              </a:rPr>
+              <a:t>truncated</a:t>
+            </a:r>
+            <a:r>
+              <a:rPr lang="es-CO" sz="1400" i="1" dirty="0">
+                <a:solidFill>
+                  <a:schemeClr val="bg1">
+                    <a:lumMod val="25000"/>
+                  </a:schemeClr>
+                </a:solidFill>
+                <a:latin typeface="Segoe UI" panose="020B0502040204020203" pitchFamily="34" charset="0"/>
+                <a:cs typeface="Segoe UI" panose="020B0502040204020203" pitchFamily="34" charset="0"/>
+              </a:rPr>
+              <a:t> Weibull </a:t>
+            </a:r>
+            <a:r>
+              <a:rPr lang="es-CO" sz="1400" i="1" dirty="0" err="1">
+                <a:solidFill>
+                  <a:schemeClr val="bg1">
+                    <a:lumMod val="25000"/>
+                  </a:schemeClr>
+                </a:solidFill>
+                <a:latin typeface="Segoe UI" panose="020B0502040204020203" pitchFamily="34" charset="0"/>
+                <a:cs typeface="Segoe UI" panose="020B0502040204020203" pitchFamily="34" charset="0"/>
+              </a:rPr>
+              <a:t>minimum</a:t>
+            </a:r>
+            <a:r>
+              <a:rPr lang="es-CO" sz="1400" i="1" dirty="0">
+                <a:solidFill>
+                  <a:schemeClr val="bg1">
+                    <a:lumMod val="25000"/>
+                  </a:schemeClr>
+                </a:solidFill>
+                <a:latin typeface="Segoe UI" panose="020B0502040204020203" pitchFamily="34" charset="0"/>
+                <a:cs typeface="Segoe UI" panose="020B0502040204020203" pitchFamily="34" charset="0"/>
+              </a:rPr>
+              <a:t> •Tukey-</a:t>
+            </a:r>
+            <a:r>
+              <a:rPr lang="es-CO" sz="1400" i="1" dirty="0" err="1">
+                <a:solidFill>
+                  <a:schemeClr val="bg1">
+                    <a:lumMod val="25000"/>
+                  </a:schemeClr>
+                </a:solidFill>
+                <a:latin typeface="Segoe UI" panose="020B0502040204020203" pitchFamily="34" charset="0"/>
+                <a:cs typeface="Segoe UI" panose="020B0502040204020203" pitchFamily="34" charset="0"/>
+              </a:rPr>
+              <a:t>Lamdba</a:t>
+            </a:r>
+            <a:r>
+              <a:rPr lang="es-CO" sz="1400" i="1" dirty="0">
+                <a:solidFill>
+                  <a:schemeClr val="bg1">
+                    <a:lumMod val="25000"/>
+                  </a:schemeClr>
+                </a:solidFill>
+                <a:latin typeface="Segoe UI" panose="020B0502040204020203" pitchFamily="34" charset="0"/>
+                <a:cs typeface="Segoe UI" panose="020B0502040204020203" pitchFamily="34" charset="0"/>
+              </a:rPr>
+              <a:t> •</a:t>
+            </a:r>
+            <a:r>
+              <a:rPr lang="es-CO" sz="1400" i="1" dirty="0" err="1">
+                <a:solidFill>
+                  <a:schemeClr val="bg1">
+                    <a:lumMod val="25000"/>
+                  </a:schemeClr>
+                </a:solidFill>
+                <a:latin typeface="Segoe UI" panose="020B0502040204020203" pitchFamily="34" charset="0"/>
+                <a:cs typeface="Segoe UI" panose="020B0502040204020203" pitchFamily="34" charset="0"/>
+              </a:rPr>
+              <a:t>Uniform</a:t>
+            </a:r>
+            <a:r>
+              <a:rPr lang="es-CO" sz="1400" i="1" dirty="0">
+                <a:solidFill>
+                  <a:schemeClr val="bg1">
+                    <a:lumMod val="25000"/>
+                  </a:schemeClr>
+                </a:solidFill>
+                <a:latin typeface="Segoe UI" panose="020B0502040204020203" pitchFamily="34" charset="0"/>
+                <a:cs typeface="Segoe UI" panose="020B0502040204020203" pitchFamily="34" charset="0"/>
+              </a:rPr>
+              <a:t> •</a:t>
+            </a:r>
+            <a:r>
+              <a:rPr lang="es-CO" sz="1400" i="1" dirty="0" err="1">
+                <a:solidFill>
+                  <a:schemeClr val="bg1">
+                    <a:lumMod val="25000"/>
+                  </a:schemeClr>
+                </a:solidFill>
+                <a:latin typeface="Segoe UI" panose="020B0502040204020203" pitchFamily="34" charset="0"/>
+                <a:cs typeface="Segoe UI" panose="020B0502040204020203" pitchFamily="34" charset="0"/>
+              </a:rPr>
+              <a:t>Von</a:t>
+            </a:r>
+            <a:r>
+              <a:rPr lang="es-CO" sz="1400" i="1" dirty="0">
+                <a:solidFill>
+                  <a:schemeClr val="bg1">
+                    <a:lumMod val="25000"/>
+                  </a:schemeClr>
+                </a:solidFill>
+                <a:latin typeface="Segoe UI" panose="020B0502040204020203" pitchFamily="34" charset="0"/>
+                <a:cs typeface="Segoe UI" panose="020B0502040204020203" pitchFamily="34" charset="0"/>
+              </a:rPr>
+              <a:t> Mises •</a:t>
+            </a:r>
+            <a:r>
+              <a:rPr lang="es-CO" sz="1400" i="1" dirty="0" err="1">
+                <a:solidFill>
+                  <a:schemeClr val="bg1">
+                    <a:lumMod val="25000"/>
+                  </a:schemeClr>
+                </a:solidFill>
+                <a:latin typeface="Segoe UI" panose="020B0502040204020203" pitchFamily="34" charset="0"/>
+                <a:cs typeface="Segoe UI" panose="020B0502040204020203" pitchFamily="34" charset="0"/>
+              </a:rPr>
+              <a:t>Von</a:t>
+            </a:r>
+            <a:r>
+              <a:rPr lang="es-CO" sz="1400" i="1" dirty="0">
+                <a:solidFill>
+                  <a:schemeClr val="bg1">
+                    <a:lumMod val="25000"/>
+                  </a:schemeClr>
+                </a:solidFill>
+                <a:latin typeface="Segoe UI" panose="020B0502040204020203" pitchFamily="34" charset="0"/>
+                <a:cs typeface="Segoe UI" panose="020B0502040204020203" pitchFamily="34" charset="0"/>
+              </a:rPr>
+              <a:t> Mises line •Wald •Weibull </a:t>
+            </a:r>
+            <a:r>
+              <a:rPr lang="es-CO" sz="1400" i="1" dirty="0" err="1">
+                <a:solidFill>
+                  <a:schemeClr val="bg1">
+                    <a:lumMod val="25000"/>
+                  </a:schemeClr>
+                </a:solidFill>
+                <a:latin typeface="Segoe UI" panose="020B0502040204020203" pitchFamily="34" charset="0"/>
+                <a:cs typeface="Segoe UI" panose="020B0502040204020203" pitchFamily="34" charset="0"/>
+              </a:rPr>
+              <a:t>maximum</a:t>
+            </a:r>
+            <a:r>
+              <a:rPr lang="es-CO" sz="1400" i="1" dirty="0">
+                <a:solidFill>
+                  <a:schemeClr val="bg1">
+                    <a:lumMod val="25000"/>
+                  </a:schemeClr>
+                </a:solidFill>
+                <a:latin typeface="Segoe UI" panose="020B0502040204020203" pitchFamily="34" charset="0"/>
+                <a:cs typeface="Segoe UI" panose="020B0502040204020203" pitchFamily="34" charset="0"/>
+              </a:rPr>
+              <a:t> •Weibull </a:t>
+            </a:r>
+            <a:r>
+              <a:rPr lang="es-CO" sz="1400" i="1" dirty="0" err="1">
+                <a:solidFill>
+                  <a:schemeClr val="bg1">
+                    <a:lumMod val="25000"/>
+                  </a:schemeClr>
+                </a:solidFill>
+                <a:latin typeface="Segoe UI" panose="020B0502040204020203" pitchFamily="34" charset="0"/>
+                <a:cs typeface="Segoe UI" panose="020B0502040204020203" pitchFamily="34" charset="0"/>
+              </a:rPr>
+              <a:t>minimum</a:t>
+            </a:r>
+            <a:r>
+              <a:rPr lang="es-CO" sz="1400" i="1" dirty="0">
+                <a:solidFill>
+                  <a:schemeClr val="bg1">
+                    <a:lumMod val="25000"/>
+                  </a:schemeClr>
+                </a:solidFill>
+                <a:latin typeface="Segoe UI" panose="020B0502040204020203" pitchFamily="34" charset="0"/>
+                <a:cs typeface="Segoe UI" panose="020B0502040204020203" pitchFamily="34" charset="0"/>
+              </a:rPr>
+              <a:t> •</a:t>
+            </a:r>
+            <a:r>
+              <a:rPr lang="es-CO" sz="1400" i="1" dirty="0" err="1">
+                <a:solidFill>
+                  <a:schemeClr val="bg1">
+                    <a:lumMod val="25000"/>
+                  </a:schemeClr>
+                </a:solidFill>
+                <a:latin typeface="Segoe UI" panose="020B0502040204020203" pitchFamily="34" charset="0"/>
+                <a:cs typeface="Segoe UI" panose="020B0502040204020203" pitchFamily="34" charset="0"/>
+              </a:rPr>
+              <a:t>Wrapped</a:t>
+            </a:r>
+            <a:r>
+              <a:rPr lang="es-CO" sz="1400" i="1" dirty="0">
+                <a:solidFill>
+                  <a:schemeClr val="bg1">
+                    <a:lumMod val="25000"/>
+                  </a:schemeClr>
+                </a:solidFill>
+                <a:latin typeface="Segoe UI" panose="020B0502040204020203" pitchFamily="34" charset="0"/>
+                <a:cs typeface="Segoe UI" panose="020B0502040204020203" pitchFamily="34" charset="0"/>
+              </a:rPr>
+              <a:t> Cauchy.</a:t>
+            </a:r>
+            <a:endParaRPr lang="es-CO" sz="1600" i="1" dirty="0">
+              <a:solidFill>
+                <a:schemeClr val="bg1">
+                  <a:lumMod val="25000"/>
+                </a:schemeClr>
+              </a:solidFill>
+              <a:latin typeface="Segoe UI" panose="020B0502040204020203" pitchFamily="34" charset="0"/>
+              <a:cs typeface="Segoe UI" panose="020B0502040204020203" pitchFamily="34" charset="0"/>
+            </a:endParaRPr>
+          </a:p>
+        </p:txBody>
+      </p:sp>
+      <p:sp>
+        <p:nvSpPr>
+          <p:cNvPr id="4" name="TextBox 3">
+            <a:extLst>
+              <a:ext uri="{FF2B5EF4-FFF2-40B4-BE49-F238E27FC236}">
+                <a16:creationId xmlns:a16="http://schemas.microsoft.com/office/drawing/2014/main" id="{A18023CD-C128-65DC-D3F6-E1AF7FC97B86}"/>
+              </a:ext>
+            </a:extLst>
+          </p:cNvPr>
+          <p:cNvSpPr txBox="1"/>
+          <p:nvPr/>
+        </p:nvSpPr>
+        <p:spPr>
+          <a:xfrm>
+            <a:off x="0" y="6581001"/>
+            <a:ext cx="12192000" cy="276999"/>
+          </a:xfrm>
+          <a:prstGeom prst="rect">
+            <a:avLst/>
+          </a:prstGeom>
+          <a:noFill/>
+        </p:spPr>
+        <p:txBody>
+          <a:bodyPr wrap="square">
+            <a:spAutoFit/>
+          </a:bodyPr>
+          <a:lstStyle/>
+          <a:p>
+            <a:r>
+              <a:rPr lang="es-CO" sz="1200" dirty="0">
+                <a:solidFill>
+                  <a:schemeClr val="bg1">
+                    <a:lumMod val="50000"/>
+                  </a:schemeClr>
+                </a:solidFill>
+                <a:latin typeface="+mj-lt"/>
+                <a:cs typeface="Segoe UI" panose="020B0502040204020203" pitchFamily="34" charset="0"/>
+              </a:rPr>
+              <a:t>Estudio y Análisis de la Precipitación Máxima en 24 Horas (Pmax24h) en la Red de Estaciones Climatológicas Automáticas de Colombia</a:t>
+            </a:r>
+          </a:p>
+        </p:txBody>
+      </p:sp>
+      <p:pic>
+        <p:nvPicPr>
+          <p:cNvPr id="6" name="Picture 5">
+            <a:extLst>
+              <a:ext uri="{FF2B5EF4-FFF2-40B4-BE49-F238E27FC236}">
+                <a16:creationId xmlns:a16="http://schemas.microsoft.com/office/drawing/2014/main" id="{378582C4-DC5B-4F63-CAA3-E74E09409F59}"/>
+              </a:ext>
+            </a:extLst>
+          </p:cNvPr>
+          <p:cNvPicPr>
+            <a:picLocks noChangeAspect="1"/>
+          </p:cNvPicPr>
+          <p:nvPr/>
+        </p:nvPicPr>
+        <p:blipFill>
+          <a:blip r:embed="rId3"/>
+          <a:srcRect l="8826" r="14692" b="35436"/>
+          <a:stretch>
+            <a:fillRect/>
+          </a:stretch>
+        </p:blipFill>
+        <p:spPr>
+          <a:xfrm>
+            <a:off x="10270419" y="1900235"/>
+            <a:ext cx="1608885" cy="1509712"/>
+          </a:xfrm>
+          <a:prstGeom prst="rect">
+            <a:avLst/>
+          </a:prstGeom>
+        </p:spPr>
+      </p:pic>
+      <p:pic>
+        <p:nvPicPr>
+          <p:cNvPr id="9" name="Graphic 8">
+            <a:extLst>
+              <a:ext uri="{FF2B5EF4-FFF2-40B4-BE49-F238E27FC236}">
+                <a16:creationId xmlns:a16="http://schemas.microsoft.com/office/drawing/2014/main" id="{6919065B-9D35-6AA0-1C02-F990E4BDA863}"/>
+              </a:ext>
+            </a:extLst>
+          </p:cNvPr>
+          <p:cNvPicPr>
+            <a:picLocks noChangeAspect="1"/>
+          </p:cNvPicPr>
+          <p:nvPr/>
+        </p:nvPicPr>
+        <p:blipFill>
+          <a:blip>
+            <a:extLst>
+              <a:ext uri="{96DAC541-7B7A-43D3-8B79-37D633B846F1}">
+                <asvg:svgBlip xmlns:asvg="http://schemas.microsoft.com/office/drawing/2016/SVG/main" r:embed="rId4"/>
+              </a:ext>
+            </a:extLst>
+          </a:blip>
+          <a:stretch>
+            <a:fillRect/>
+          </a:stretch>
+        </p:blipFill>
+        <p:spPr>
+          <a:xfrm>
+            <a:off x="10269037" y="3720901"/>
+            <a:ext cx="1606557" cy="1606557"/>
+          </a:xfrm>
+          <a:prstGeom prst="rect">
+            <a:avLst/>
+          </a:prstGeom>
+        </p:spPr>
+      </p:pic>
+    </p:spTree>
+    <p:extLst>
+      <p:ext uri="{BB962C8B-B14F-4D97-AF65-F5344CB8AC3E}">
+        <p14:creationId xmlns:p14="http://schemas.microsoft.com/office/powerpoint/2010/main" val="3350663852"/>
+      </p:ext>
+    </p:extLst>
+  </p:cSld>
+  <p:clrMapOvr>
+    <a:masterClrMapping/>
+  </p:clrMapOvr>
+</p:sld>
+</file>
+
+<file path=ppt/slides/slide7.xml><?xml version="1.0" encoding="utf-8"?>
+<p:sld xmlns:a="http://schemas.openxmlformats.org/drawingml/2006/main" xmlns:r="http://schemas.openxmlformats.org/officeDocument/2006/relationships" xmlns:p="http://schemas.openxmlformats.org/presentationml/2006/main">
+  <p:cSld>
+    <p:spTree>
+      <p:nvGrpSpPr>
+        <p:cNvPr id="1" name="">
+          <a:extLst>
+            <a:ext uri="{FF2B5EF4-FFF2-40B4-BE49-F238E27FC236}">
+              <a16:creationId xmlns:a16="http://schemas.microsoft.com/office/drawing/2014/main" id="{0EF2830F-2333-D67C-03FA-F4A9D844308E}"/>
+            </a:ext>
+          </a:extLst>
+        </p:cNvPr>
+        <p:cNvGrpSpPr/>
+        <p:nvPr/>
+      </p:nvGrpSpPr>
+      <p:grpSpPr>
+        <a:xfrm>
+          <a:off x="0" y="0"/>
+          <a:ext cx="0" cy="0"/>
+          <a:chOff x="0" y="0"/>
+          <a:chExt cx="0" cy="0"/>
+        </a:xfrm>
+      </p:grpSpPr>
+      <p:sp>
+        <p:nvSpPr>
+          <p:cNvPr id="2" name="Title 1">
+            <a:extLst>
+              <a:ext uri="{FF2B5EF4-FFF2-40B4-BE49-F238E27FC236}">
+                <a16:creationId xmlns:a16="http://schemas.microsoft.com/office/drawing/2014/main" id="{BAE27DA0-3BBC-69D0-962E-EB73A29EB282}"/>
+              </a:ext>
+            </a:extLst>
+          </p:cNvPr>
+          <p:cNvSpPr>
+            <a:spLocks noGrp="1"/>
+          </p:cNvSpPr>
+          <p:nvPr>
+            <p:ph type="title"/>
+          </p:nvPr>
+        </p:nvSpPr>
+        <p:spPr>
+          <a:xfrm>
+            <a:off x="191184" y="385894"/>
+            <a:ext cx="6504891" cy="6067165"/>
+          </a:xfrm>
+        </p:spPr>
+        <p:txBody>
+          <a:bodyPr anchor="t" anchorCtr="0">
+            <a:noAutofit/>
+          </a:bodyPr>
+          <a:lstStyle/>
+          <a:p>
+            <a:r>
+              <a:rPr lang="es-CO" sz="3200" b="1" dirty="0" err="1">
+                <a:solidFill>
+                  <a:schemeClr val="bg1">
+                    <a:lumMod val="25000"/>
+                  </a:schemeClr>
+                </a:solidFill>
+                <a:latin typeface="Segoe UI" panose="020B0502040204020203" pitchFamily="34" charset="0"/>
+                <a:cs typeface="Segoe UI" panose="020B0502040204020203" pitchFamily="34" charset="0"/>
+              </a:rPr>
+              <a:t>Funciónes</a:t>
+            </a:r>
+            <a:r>
+              <a:rPr lang="es-CO" sz="3200" b="1" dirty="0">
+                <a:solidFill>
+                  <a:schemeClr val="bg1">
+                    <a:lumMod val="25000"/>
+                  </a:schemeClr>
+                </a:solidFill>
+                <a:latin typeface="Segoe UI" panose="020B0502040204020203" pitchFamily="34" charset="0"/>
+                <a:cs typeface="Segoe UI" panose="020B0502040204020203" pitchFamily="34" charset="0"/>
+              </a:rPr>
+              <a:t> de Distribución Empíricas (EDF)</a:t>
+            </a:r>
+            <a:r>
+              <a:rPr lang="es-CO" sz="3200" dirty="0">
+                <a:solidFill>
+                  <a:schemeClr val="bg1">
+                    <a:lumMod val="25000"/>
+                  </a:schemeClr>
+                </a:solidFill>
+                <a:latin typeface="Segoe UI" panose="020B0502040204020203" pitchFamily="34" charset="0"/>
+                <a:cs typeface="Segoe UI" panose="020B0502040204020203" pitchFamily="34" charset="0"/>
+              </a:rPr>
+              <a:t> </a:t>
+            </a:r>
+            <a:r>
+              <a:rPr lang="es-CO" sz="2000" dirty="0">
+                <a:solidFill>
+                  <a:schemeClr val="bg1">
+                    <a:lumMod val="25000"/>
+                  </a:schemeClr>
+                </a:solidFill>
+                <a:latin typeface="Segoe UI" panose="020B0502040204020203" pitchFamily="34" charset="0"/>
+                <a:cs typeface="Segoe UI" panose="020B0502040204020203" pitchFamily="34" charset="0"/>
+              </a:rPr>
+              <a:t>(12 evaluadas)</a:t>
+            </a:r>
+            <a:br>
+              <a:rPr lang="es-CO" sz="3200" dirty="0">
+                <a:solidFill>
+                  <a:schemeClr val="bg1">
+                    <a:lumMod val="25000"/>
+                  </a:schemeClr>
+                </a:solidFill>
+                <a:latin typeface="Segoe UI" panose="020B0502040204020203" pitchFamily="34" charset="0"/>
+                <a:cs typeface="Segoe UI" panose="020B0502040204020203" pitchFamily="34" charset="0"/>
+              </a:rPr>
+            </a:br>
+            <a:r>
+              <a:rPr lang="es-CO" sz="2000" dirty="0">
+                <a:solidFill>
+                  <a:schemeClr val="bg1">
+                    <a:lumMod val="25000"/>
+                  </a:schemeClr>
+                </a:solidFill>
+                <a:latin typeface="Segoe UI" panose="020B0502040204020203" pitchFamily="34" charset="0"/>
+                <a:cs typeface="Segoe UI" panose="020B0502040204020203" pitchFamily="34" charset="0"/>
+              </a:rPr>
+              <a:t> </a:t>
+            </a:r>
+            <a:br>
+              <a:rPr lang="es-CO" sz="3200" dirty="0">
+                <a:solidFill>
+                  <a:schemeClr val="bg1">
+                    <a:lumMod val="25000"/>
+                  </a:schemeClr>
+                </a:solidFill>
+                <a:latin typeface="Segoe UI" panose="020B0502040204020203" pitchFamily="34" charset="0"/>
+                <a:cs typeface="Segoe UI" panose="020B0502040204020203" pitchFamily="34" charset="0"/>
+              </a:rPr>
+            </a:br>
+            <a:r>
+              <a:rPr lang="es-CO" sz="3200" dirty="0">
+                <a:solidFill>
+                  <a:schemeClr val="bg1">
+                    <a:lumMod val="25000"/>
+                  </a:schemeClr>
+                </a:solidFill>
+                <a:latin typeface="Segoe UI" panose="020B0502040204020203" pitchFamily="34" charset="0"/>
+                <a:cs typeface="Segoe UI" panose="020B0502040204020203" pitchFamily="34" charset="0"/>
+              </a:rPr>
+              <a:t>Es una estimación escalonada de una verdadera Función de Distribución Acumulada (CDF) basada en datos de muestra observados, que representa la proporción de puntos de datos menores o iguales a un valor dado.</a:t>
+            </a:r>
+            <a:br>
+              <a:rPr lang="es-CO" sz="3200" dirty="0">
+                <a:solidFill>
+                  <a:schemeClr val="bg1">
+                    <a:lumMod val="25000"/>
+                  </a:schemeClr>
+                </a:solidFill>
+                <a:latin typeface="Segoe UI" panose="020B0502040204020203" pitchFamily="34" charset="0"/>
+                <a:cs typeface="Segoe UI" panose="020B0502040204020203" pitchFamily="34" charset="0"/>
+              </a:rPr>
+            </a:br>
+            <a:r>
+              <a:rPr lang="es-CO" sz="1800" dirty="0">
+                <a:solidFill>
+                  <a:schemeClr val="bg1">
+                    <a:lumMod val="25000"/>
+                  </a:schemeClr>
+                </a:solidFill>
+                <a:latin typeface="Segoe UI" panose="020B0502040204020203" pitchFamily="34" charset="0"/>
+                <a:cs typeface="Segoe UI" panose="020B0502040204020203" pitchFamily="34" charset="0"/>
+              </a:rPr>
+              <a:t> </a:t>
+            </a:r>
+            <a:br>
+              <a:rPr lang="es-CO" sz="3200" dirty="0">
+                <a:solidFill>
+                  <a:schemeClr val="bg1">
+                    <a:lumMod val="25000"/>
+                  </a:schemeClr>
+                </a:solidFill>
+                <a:latin typeface="Segoe UI" panose="020B0502040204020203" pitchFamily="34" charset="0"/>
+                <a:cs typeface="Segoe UI" panose="020B0502040204020203" pitchFamily="34" charset="0"/>
+              </a:rPr>
+            </a:br>
+            <a:r>
+              <a:rPr lang="es-CO" sz="2400" dirty="0">
+                <a:solidFill>
+                  <a:schemeClr val="bg1">
+                    <a:lumMod val="25000"/>
+                  </a:schemeClr>
+                </a:solidFill>
+                <a:latin typeface="Segoe UI" panose="020B0502040204020203" pitchFamily="34" charset="0"/>
+                <a:cs typeface="Segoe UI" panose="020B0502040204020203" pitchFamily="34" charset="0"/>
+              </a:rPr>
+              <a:t>Se calcula con el tamaño total de la muestra (</a:t>
+            </a:r>
+            <a:r>
+              <a:rPr lang="es-CO" sz="2400" i="1" dirty="0">
+                <a:solidFill>
+                  <a:schemeClr val="bg1">
+                    <a:lumMod val="25000"/>
+                  </a:schemeClr>
+                </a:solidFill>
+                <a:latin typeface="Segoe UI" panose="020B0502040204020203" pitchFamily="34" charset="0"/>
+                <a:cs typeface="Segoe UI" panose="020B0502040204020203" pitchFamily="34" charset="0"/>
+              </a:rPr>
+              <a:t>n</a:t>
+            </a:r>
+            <a:r>
+              <a:rPr lang="es-CO" sz="2400" dirty="0">
+                <a:solidFill>
+                  <a:schemeClr val="bg1">
+                    <a:lumMod val="25000"/>
+                  </a:schemeClr>
+                </a:solidFill>
+                <a:latin typeface="Segoe UI" panose="020B0502040204020203" pitchFamily="34" charset="0"/>
+                <a:cs typeface="Segoe UI" panose="020B0502040204020203" pitchFamily="34" charset="0"/>
+              </a:rPr>
+              <a:t>) y el parámetro o número de orden (</a:t>
+            </a:r>
+            <a:r>
+              <a:rPr lang="es-CO" sz="2400" i="1" dirty="0">
+                <a:solidFill>
+                  <a:schemeClr val="bg1">
+                    <a:lumMod val="25000"/>
+                  </a:schemeClr>
+                </a:solidFill>
+                <a:latin typeface="Segoe UI" panose="020B0502040204020203" pitchFamily="34" charset="0"/>
+                <a:cs typeface="Segoe UI" panose="020B0502040204020203" pitchFamily="34" charset="0"/>
+              </a:rPr>
+              <a:t>m</a:t>
+            </a:r>
+            <a:r>
+              <a:rPr lang="es-CO" sz="2400" dirty="0">
+                <a:solidFill>
+                  <a:schemeClr val="bg1">
+                    <a:lumMod val="25000"/>
+                  </a:schemeClr>
+                </a:solidFill>
+                <a:latin typeface="Segoe UI" panose="020B0502040204020203" pitchFamily="34" charset="0"/>
+                <a:cs typeface="Segoe UI" panose="020B0502040204020203" pitchFamily="34" charset="0"/>
+              </a:rPr>
+              <a:t>) de cada dato, que significa la posición de </a:t>
+            </a:r>
+            <a:r>
+              <a:rPr lang="es-CO" sz="2400" i="1" dirty="0">
+                <a:solidFill>
+                  <a:schemeClr val="bg1">
+                    <a:lumMod val="25000"/>
+                  </a:schemeClr>
+                </a:solidFill>
+                <a:latin typeface="Segoe UI" panose="020B0502040204020203" pitchFamily="34" charset="0"/>
+                <a:cs typeface="Segoe UI" panose="020B0502040204020203" pitchFamily="34" charset="0"/>
+              </a:rPr>
+              <a:t>x</a:t>
+            </a:r>
+            <a:r>
+              <a:rPr lang="es-CO" sz="2400" dirty="0">
+                <a:solidFill>
+                  <a:schemeClr val="bg1">
+                    <a:lumMod val="25000"/>
+                  </a:schemeClr>
+                </a:solidFill>
+                <a:latin typeface="Segoe UI" panose="020B0502040204020203" pitchFamily="34" charset="0"/>
+                <a:cs typeface="Segoe UI" panose="020B0502040204020203" pitchFamily="34" charset="0"/>
+              </a:rPr>
+              <a:t> valores en una lista de orden ascendente</a:t>
+            </a:r>
+            <a:r>
+              <a:rPr lang="es-CO" sz="1800" dirty="0">
+                <a:solidFill>
+                  <a:schemeClr val="bg1">
+                    <a:lumMod val="25000"/>
+                  </a:schemeClr>
+                </a:solidFill>
+                <a:latin typeface="Segoe UI" panose="020B0502040204020203" pitchFamily="34" charset="0"/>
+                <a:cs typeface="Segoe UI" panose="020B0502040204020203" pitchFamily="34" charset="0"/>
+              </a:rPr>
+              <a:t>.</a:t>
+            </a:r>
+            <a:endParaRPr lang="es-CO" sz="1600" i="1" dirty="0">
+              <a:solidFill>
+                <a:schemeClr val="bg1">
+                  <a:lumMod val="25000"/>
+                </a:schemeClr>
+              </a:solidFill>
+              <a:latin typeface="Segoe UI" panose="020B0502040204020203" pitchFamily="34" charset="0"/>
+              <a:cs typeface="Segoe UI" panose="020B0502040204020203" pitchFamily="34" charset="0"/>
+            </a:endParaRPr>
+          </a:p>
+        </p:txBody>
+      </p:sp>
+      <p:sp>
+        <p:nvSpPr>
+          <p:cNvPr id="4" name="TextBox 3">
+            <a:extLst>
+              <a:ext uri="{FF2B5EF4-FFF2-40B4-BE49-F238E27FC236}">
+                <a16:creationId xmlns:a16="http://schemas.microsoft.com/office/drawing/2014/main" id="{809DEABC-2DD9-A375-9719-0D3C3B4B6505}"/>
+              </a:ext>
+            </a:extLst>
+          </p:cNvPr>
+          <p:cNvSpPr txBox="1"/>
+          <p:nvPr/>
+        </p:nvSpPr>
+        <p:spPr>
+          <a:xfrm>
+            <a:off x="0" y="6581001"/>
+            <a:ext cx="12192000" cy="276999"/>
+          </a:xfrm>
+          <a:prstGeom prst="rect">
+            <a:avLst/>
+          </a:prstGeom>
+          <a:noFill/>
+        </p:spPr>
+        <p:txBody>
+          <a:bodyPr wrap="square">
+            <a:spAutoFit/>
+          </a:bodyPr>
+          <a:lstStyle/>
+          <a:p>
+            <a:r>
+              <a:rPr lang="es-CO" sz="1200" dirty="0">
+                <a:solidFill>
+                  <a:schemeClr val="bg1">
+                    <a:lumMod val="50000"/>
+                  </a:schemeClr>
+                </a:solidFill>
+                <a:latin typeface="+mj-lt"/>
+                <a:cs typeface="Segoe UI" panose="020B0502040204020203" pitchFamily="34" charset="0"/>
+              </a:rPr>
+              <a:t>Estudio y Análisis de la Precipitación Máxima en 24 Horas (Pmax24h) en la Red de Estaciones Climatológicas Automáticas de Colombia</a:t>
+            </a:r>
+          </a:p>
+        </p:txBody>
+      </p:sp>
+      <p:graphicFrame>
+        <p:nvGraphicFramePr>
+          <p:cNvPr id="3" name="Table 2">
+            <a:extLst>
+              <a:ext uri="{FF2B5EF4-FFF2-40B4-BE49-F238E27FC236}">
+                <a16:creationId xmlns:a16="http://schemas.microsoft.com/office/drawing/2014/main" id="{E35C22F3-6E25-742C-4858-06FA14CEDA43}"/>
+              </a:ext>
+            </a:extLst>
+          </p:cNvPr>
+          <p:cNvGraphicFramePr>
+            <a:graphicFrameLocks noGrp="1"/>
+          </p:cNvGraphicFramePr>
+          <p:nvPr>
+            <p:extLst>
+              <p:ext uri="{D42A27DB-BD31-4B8C-83A1-F6EECF244321}">
+                <p14:modId xmlns:p14="http://schemas.microsoft.com/office/powerpoint/2010/main" val="2069134970"/>
+              </p:ext>
+            </p:extLst>
+          </p:nvPr>
+        </p:nvGraphicFramePr>
+        <p:xfrm>
+          <a:off x="6767512" y="457264"/>
+          <a:ext cx="5162551" cy="5943471"/>
+        </p:xfrm>
+        <a:graphic>
+          <a:graphicData uri="http://schemas.openxmlformats.org/drawingml/2006/table">
+            <a:tbl>
+              <a:tblPr firstRow="1" firstCol="1" bandRow="1">
+                <a:tableStyleId>{7DF18680-E054-41AD-8BC1-D1AEF772440D}</a:tableStyleId>
+              </a:tblPr>
+              <a:tblGrid>
+                <a:gridCol w="1819275">
+                  <a:extLst>
+                    <a:ext uri="{9D8B030D-6E8A-4147-A177-3AD203B41FA5}">
+                      <a16:colId xmlns:a16="http://schemas.microsoft.com/office/drawing/2014/main" val="3370971528"/>
+                    </a:ext>
+                  </a:extLst>
+                </a:gridCol>
+                <a:gridCol w="652463">
+                  <a:extLst>
+                    <a:ext uri="{9D8B030D-6E8A-4147-A177-3AD203B41FA5}">
+                      <a16:colId xmlns:a16="http://schemas.microsoft.com/office/drawing/2014/main" val="2861348791"/>
+                    </a:ext>
+                  </a:extLst>
+                </a:gridCol>
+                <a:gridCol w="2690813">
+                  <a:extLst>
+                    <a:ext uri="{9D8B030D-6E8A-4147-A177-3AD203B41FA5}">
+                      <a16:colId xmlns:a16="http://schemas.microsoft.com/office/drawing/2014/main" val="2186664698"/>
+                    </a:ext>
+                  </a:extLst>
+                </a:gridCol>
+              </a:tblGrid>
+              <a:tr h="451893">
+                <a:tc>
+                  <a:txBody>
+                    <a:bodyPr/>
+                    <a:lstStyle/>
+                    <a:p>
+                      <a:pPr algn="ctr">
+                        <a:lnSpc>
+                          <a:spcPct val="107000"/>
+                        </a:lnSpc>
+                        <a:buNone/>
+                      </a:pPr>
+                      <a:r>
+                        <a:rPr lang="es-CO" sz="1600" b="0" dirty="0">
+                          <a:effectLst/>
+                          <a:latin typeface="Segoe UI" panose="020B0502040204020203" pitchFamily="34" charset="0"/>
+                          <a:cs typeface="Segoe UI" panose="020B0502040204020203" pitchFamily="34" charset="0"/>
+                        </a:rPr>
+                        <a:t>EDF</a:t>
+                      </a:r>
+                      <a:endParaRPr lang="es-CO" sz="1600" b="0" dirty="0">
+                        <a:effectLst/>
+                        <a:latin typeface="Segoe UI" panose="020B0502040204020203" pitchFamily="34" charset="0"/>
+                        <a:ea typeface="Times New Roman" panose="02020603050405020304" pitchFamily="18" charset="0"/>
+                        <a:cs typeface="Segoe UI" panose="020B0502040204020203" pitchFamily="34" charset="0"/>
+                      </a:endParaRPr>
+                    </a:p>
+                  </a:txBody>
+                  <a:tcPr marL="39499" marR="39499" marT="0" marB="0" anchor="ctr"/>
+                </a:tc>
+                <a:tc>
+                  <a:txBody>
+                    <a:bodyPr/>
+                    <a:lstStyle/>
+                    <a:p>
+                      <a:pPr algn="ctr">
+                        <a:lnSpc>
+                          <a:spcPct val="107000"/>
+                        </a:lnSpc>
+                        <a:buNone/>
+                      </a:pPr>
+                      <a:r>
+                        <a:rPr lang="es-CO" sz="1600" b="0">
+                          <a:effectLst/>
+                          <a:latin typeface="Segoe UI" panose="020B0502040204020203" pitchFamily="34" charset="0"/>
+                          <a:cs typeface="Segoe UI" panose="020B0502040204020203" pitchFamily="34" charset="0"/>
+                        </a:rPr>
+                        <a:t>Año</a:t>
+                      </a:r>
+                      <a:endParaRPr lang="es-CO" sz="1600" b="0">
+                        <a:effectLst/>
+                        <a:latin typeface="Segoe UI" panose="020B0502040204020203" pitchFamily="34" charset="0"/>
+                        <a:ea typeface="Times New Roman" panose="02020603050405020304" pitchFamily="18" charset="0"/>
+                        <a:cs typeface="Segoe UI" panose="020B0502040204020203" pitchFamily="34" charset="0"/>
+                      </a:endParaRPr>
+                    </a:p>
+                  </a:txBody>
+                  <a:tcPr marL="39499" marR="39499" marT="0" marB="0" anchor="ctr"/>
+                </a:tc>
+                <a:tc>
+                  <a:txBody>
+                    <a:bodyPr/>
+                    <a:lstStyle/>
+                    <a:p>
+                      <a:pPr algn="ctr">
+                        <a:lnSpc>
+                          <a:spcPct val="107000"/>
+                        </a:lnSpc>
+                        <a:buNone/>
+                      </a:pPr>
+                      <a:r>
+                        <a:rPr lang="es-CO" sz="1600" b="0" dirty="0">
+                          <a:effectLst/>
+                          <a:latin typeface="Segoe UI" panose="020B0502040204020203" pitchFamily="34" charset="0"/>
+                          <a:cs typeface="Segoe UI" panose="020B0502040204020203" pitchFamily="34" charset="0"/>
+                        </a:rPr>
+                        <a:t>Ecuación</a:t>
+                      </a:r>
+                      <a:endParaRPr lang="es-CO" sz="1600" b="0" dirty="0">
+                        <a:effectLst/>
+                        <a:latin typeface="Segoe UI" panose="020B0502040204020203" pitchFamily="34" charset="0"/>
+                        <a:ea typeface="Times New Roman" panose="02020603050405020304" pitchFamily="18" charset="0"/>
+                        <a:cs typeface="Segoe UI" panose="020B0502040204020203" pitchFamily="34" charset="0"/>
+                      </a:endParaRPr>
+                    </a:p>
+                  </a:txBody>
+                  <a:tcPr marL="39499" marR="39499" marT="0" marB="0" anchor="ctr"/>
+                </a:tc>
+                <a:extLst>
+                  <a:ext uri="{0D108BD9-81ED-4DB2-BD59-A6C34878D82A}">
+                    <a16:rowId xmlns:a16="http://schemas.microsoft.com/office/drawing/2014/main" val="3690405358"/>
+                  </a:ext>
+                </a:extLst>
+              </a:tr>
+              <a:tr h="451893">
+                <a:tc>
+                  <a:txBody>
+                    <a:bodyPr/>
+                    <a:lstStyle/>
+                    <a:p>
+                      <a:pPr algn="ctr">
+                        <a:lnSpc>
+                          <a:spcPct val="107000"/>
+                        </a:lnSpc>
+                        <a:buNone/>
+                      </a:pPr>
+                      <a:r>
+                        <a:rPr lang="es-CO" sz="1600" b="0" dirty="0">
+                          <a:effectLst/>
+                          <a:latin typeface="Segoe UI" panose="020B0502040204020203" pitchFamily="34" charset="0"/>
+                          <a:cs typeface="Segoe UI" panose="020B0502040204020203" pitchFamily="34" charset="0"/>
+                        </a:rPr>
+                        <a:t>EDF California</a:t>
+                      </a:r>
+                      <a:endParaRPr lang="es-CO" sz="1600" b="0" dirty="0">
+                        <a:effectLst/>
+                        <a:latin typeface="Segoe UI" panose="020B0502040204020203" pitchFamily="34" charset="0"/>
+                        <a:ea typeface="Times New Roman" panose="02020603050405020304" pitchFamily="18" charset="0"/>
+                        <a:cs typeface="Segoe UI" panose="020B0502040204020203" pitchFamily="34" charset="0"/>
+                      </a:endParaRPr>
+                    </a:p>
+                  </a:txBody>
+                  <a:tcPr marL="39499" marR="39499" marT="0" marB="0" anchor="ctr"/>
+                </a:tc>
+                <a:tc>
+                  <a:txBody>
+                    <a:bodyPr/>
+                    <a:lstStyle/>
+                    <a:p>
+                      <a:pPr algn="ctr">
+                        <a:lnSpc>
+                          <a:spcPct val="107000"/>
+                        </a:lnSpc>
+                        <a:buNone/>
+                      </a:pPr>
+                      <a:r>
+                        <a:rPr lang="es-CO" sz="1600" b="0">
+                          <a:effectLst/>
+                          <a:latin typeface="Segoe UI" panose="020B0502040204020203" pitchFamily="34" charset="0"/>
+                          <a:cs typeface="Segoe UI" panose="020B0502040204020203" pitchFamily="34" charset="0"/>
+                        </a:rPr>
+                        <a:t>1923</a:t>
+                      </a:r>
+                      <a:endParaRPr lang="es-CO" sz="1600" b="0">
+                        <a:effectLst/>
+                        <a:latin typeface="Segoe UI" panose="020B0502040204020203" pitchFamily="34" charset="0"/>
+                        <a:ea typeface="Times New Roman" panose="02020603050405020304" pitchFamily="18" charset="0"/>
+                        <a:cs typeface="Segoe UI" panose="020B0502040204020203" pitchFamily="34" charset="0"/>
+                      </a:endParaRPr>
+                    </a:p>
+                  </a:txBody>
+                  <a:tcPr marL="39499" marR="39499" marT="0" marB="0" anchor="ctr"/>
+                </a:tc>
+                <a:tc>
+                  <a:txBody>
+                    <a:bodyPr/>
+                    <a:lstStyle/>
+                    <a:p>
+                      <a:pPr algn="ctr">
+                        <a:lnSpc>
+                          <a:spcPct val="107000"/>
+                        </a:lnSpc>
+                        <a:buNone/>
+                      </a:pPr>
+                      <a:r>
+                        <a:rPr lang="es-CO" sz="1600" b="0" dirty="0">
+                          <a:effectLst/>
+                          <a:latin typeface="Segoe UI" panose="020B0502040204020203" pitchFamily="34" charset="0"/>
+                          <a:cs typeface="Segoe UI" panose="020B0502040204020203" pitchFamily="34" charset="0"/>
+                        </a:rPr>
+                        <a:t>P=m/n</a:t>
+                      </a:r>
+                    </a:p>
+                  </a:txBody>
+                  <a:tcPr marL="39499" marR="39499" marT="0" marB="0" anchor="ctr"/>
+                </a:tc>
+                <a:extLst>
+                  <a:ext uri="{0D108BD9-81ED-4DB2-BD59-A6C34878D82A}">
+                    <a16:rowId xmlns:a16="http://schemas.microsoft.com/office/drawing/2014/main" val="910157287"/>
+                  </a:ext>
+                </a:extLst>
+              </a:tr>
+              <a:tr h="451893">
+                <a:tc>
+                  <a:txBody>
+                    <a:bodyPr/>
+                    <a:lstStyle/>
+                    <a:p>
+                      <a:pPr algn="ctr">
+                        <a:lnSpc>
+                          <a:spcPct val="107000"/>
+                        </a:lnSpc>
+                        <a:buNone/>
+                      </a:pPr>
+                      <a:r>
+                        <a:rPr lang="es-CO" sz="1600" b="0" dirty="0">
+                          <a:effectLst/>
+                          <a:latin typeface="Segoe UI" panose="020B0502040204020203" pitchFamily="34" charset="0"/>
+                          <a:cs typeface="Segoe UI" panose="020B0502040204020203" pitchFamily="34" charset="0"/>
+                        </a:rPr>
+                        <a:t>EDF Hazen</a:t>
+                      </a:r>
+                      <a:endParaRPr lang="es-CO" sz="1600" b="0" dirty="0">
+                        <a:effectLst/>
+                        <a:latin typeface="Segoe UI" panose="020B0502040204020203" pitchFamily="34" charset="0"/>
+                        <a:ea typeface="Times New Roman" panose="02020603050405020304" pitchFamily="18" charset="0"/>
+                        <a:cs typeface="Segoe UI" panose="020B0502040204020203" pitchFamily="34" charset="0"/>
+                      </a:endParaRPr>
+                    </a:p>
+                  </a:txBody>
+                  <a:tcPr marL="39499" marR="39499" marT="0" marB="0" anchor="ctr"/>
+                </a:tc>
+                <a:tc>
+                  <a:txBody>
+                    <a:bodyPr/>
+                    <a:lstStyle/>
+                    <a:p>
+                      <a:pPr algn="ctr">
+                        <a:lnSpc>
+                          <a:spcPct val="107000"/>
+                        </a:lnSpc>
+                        <a:buNone/>
+                      </a:pPr>
+                      <a:r>
+                        <a:rPr lang="es-CO" sz="1600" b="0">
+                          <a:effectLst/>
+                          <a:latin typeface="Segoe UI" panose="020B0502040204020203" pitchFamily="34" charset="0"/>
+                          <a:cs typeface="Segoe UI" panose="020B0502040204020203" pitchFamily="34" charset="0"/>
+                        </a:rPr>
+                        <a:t>1930</a:t>
+                      </a:r>
+                      <a:endParaRPr lang="es-CO" sz="1600" b="0">
+                        <a:effectLst/>
+                        <a:latin typeface="Segoe UI" panose="020B0502040204020203" pitchFamily="34" charset="0"/>
+                        <a:ea typeface="Times New Roman" panose="02020603050405020304" pitchFamily="18" charset="0"/>
+                        <a:cs typeface="Segoe UI" panose="020B0502040204020203" pitchFamily="34" charset="0"/>
+                      </a:endParaRPr>
+                    </a:p>
+                  </a:txBody>
+                  <a:tcPr marL="39499" marR="39499" marT="0" marB="0" anchor="ctr"/>
+                </a:tc>
+                <a:tc>
+                  <a:txBody>
+                    <a:bodyPr/>
+                    <a:lstStyle/>
+                    <a:p>
+                      <a:pPr algn="ctr">
+                        <a:lnSpc>
+                          <a:spcPct val="107000"/>
+                        </a:lnSpc>
+                        <a:buNone/>
+                      </a:pPr>
+                      <a:r>
+                        <a:rPr lang="es-CO" sz="1600" b="0" dirty="0">
+                          <a:effectLst/>
+                          <a:latin typeface="Segoe UI" panose="020B0502040204020203" pitchFamily="34" charset="0"/>
+                          <a:cs typeface="Segoe UI" panose="020B0502040204020203" pitchFamily="34" charset="0"/>
+                        </a:rPr>
+                        <a:t>P=(m−0.5)/n</a:t>
+                      </a:r>
+                    </a:p>
+                  </a:txBody>
+                  <a:tcPr marL="39499" marR="39499" marT="0" marB="0" anchor="ctr"/>
+                </a:tc>
+                <a:extLst>
+                  <a:ext uri="{0D108BD9-81ED-4DB2-BD59-A6C34878D82A}">
+                    <a16:rowId xmlns:a16="http://schemas.microsoft.com/office/drawing/2014/main" val="1755352067"/>
+                  </a:ext>
+                </a:extLst>
+              </a:tr>
+              <a:tr h="451893">
+                <a:tc>
+                  <a:txBody>
+                    <a:bodyPr/>
+                    <a:lstStyle/>
+                    <a:p>
+                      <a:pPr algn="ctr">
+                        <a:lnSpc>
+                          <a:spcPct val="107000"/>
+                        </a:lnSpc>
+                        <a:buNone/>
+                      </a:pPr>
+                      <a:r>
+                        <a:rPr lang="es-CO" sz="1600" b="0">
+                          <a:effectLst/>
+                          <a:latin typeface="Segoe UI" panose="020B0502040204020203" pitchFamily="34" charset="0"/>
+                          <a:cs typeface="Segoe UI" panose="020B0502040204020203" pitchFamily="34" charset="0"/>
+                        </a:rPr>
+                        <a:t>EDF Weibull</a:t>
+                      </a:r>
+                      <a:endParaRPr lang="es-CO" sz="1600" b="0">
+                        <a:effectLst/>
+                        <a:latin typeface="Segoe UI" panose="020B0502040204020203" pitchFamily="34" charset="0"/>
+                        <a:ea typeface="Times New Roman" panose="02020603050405020304" pitchFamily="18" charset="0"/>
+                        <a:cs typeface="Segoe UI" panose="020B0502040204020203" pitchFamily="34" charset="0"/>
+                      </a:endParaRPr>
+                    </a:p>
+                  </a:txBody>
+                  <a:tcPr marL="39499" marR="39499" marT="0" marB="0" anchor="ctr"/>
+                </a:tc>
+                <a:tc>
+                  <a:txBody>
+                    <a:bodyPr/>
+                    <a:lstStyle/>
+                    <a:p>
+                      <a:pPr algn="ctr">
+                        <a:lnSpc>
+                          <a:spcPct val="107000"/>
+                        </a:lnSpc>
+                        <a:buNone/>
+                      </a:pPr>
+                      <a:r>
+                        <a:rPr lang="es-CO" sz="1600" b="0">
+                          <a:effectLst/>
+                          <a:latin typeface="Segoe UI" panose="020B0502040204020203" pitchFamily="34" charset="0"/>
+                          <a:cs typeface="Segoe UI" panose="020B0502040204020203" pitchFamily="34" charset="0"/>
+                        </a:rPr>
+                        <a:t>1939</a:t>
+                      </a:r>
+                      <a:endParaRPr lang="es-CO" sz="1600" b="0">
+                        <a:effectLst/>
+                        <a:latin typeface="Segoe UI" panose="020B0502040204020203" pitchFamily="34" charset="0"/>
+                        <a:ea typeface="Times New Roman" panose="02020603050405020304" pitchFamily="18" charset="0"/>
+                        <a:cs typeface="Segoe UI" panose="020B0502040204020203" pitchFamily="34" charset="0"/>
+                      </a:endParaRPr>
+                    </a:p>
+                  </a:txBody>
+                  <a:tcPr marL="39499" marR="39499" marT="0" marB="0" anchor="ctr"/>
+                </a:tc>
+                <a:tc>
+                  <a:txBody>
+                    <a:bodyPr/>
+                    <a:lstStyle/>
+                    <a:p>
+                      <a:pPr algn="ctr">
+                        <a:lnSpc>
+                          <a:spcPct val="107000"/>
+                        </a:lnSpc>
+                        <a:buNone/>
+                      </a:pPr>
+                      <a:r>
+                        <a:rPr lang="es-CO" sz="1600" b="0" dirty="0">
+                          <a:effectLst/>
+                          <a:latin typeface="Segoe UI" panose="020B0502040204020203" pitchFamily="34" charset="0"/>
+                          <a:cs typeface="Segoe UI" panose="020B0502040204020203" pitchFamily="34" charset="0"/>
+                        </a:rPr>
+                        <a:t>P=m/(n+1)</a:t>
+                      </a:r>
+                    </a:p>
+                  </a:txBody>
+                  <a:tcPr marL="39499" marR="39499" marT="0" marB="0" anchor="ctr"/>
+                </a:tc>
+                <a:extLst>
+                  <a:ext uri="{0D108BD9-81ED-4DB2-BD59-A6C34878D82A}">
+                    <a16:rowId xmlns:a16="http://schemas.microsoft.com/office/drawing/2014/main" val="4213476926"/>
+                  </a:ext>
+                </a:extLst>
+              </a:tr>
+              <a:tr h="451893">
+                <a:tc>
+                  <a:txBody>
+                    <a:bodyPr/>
+                    <a:lstStyle/>
+                    <a:p>
+                      <a:pPr algn="ctr">
+                        <a:lnSpc>
+                          <a:spcPct val="107000"/>
+                        </a:lnSpc>
+                        <a:buNone/>
+                      </a:pPr>
+                      <a:r>
+                        <a:rPr lang="es-CO" sz="1600" b="0" dirty="0">
+                          <a:effectLst/>
+                          <a:latin typeface="Segoe UI" panose="020B0502040204020203" pitchFamily="34" charset="0"/>
+                          <a:cs typeface="Segoe UI" panose="020B0502040204020203" pitchFamily="34" charset="0"/>
+                        </a:rPr>
+                        <a:t>EDF Beard</a:t>
+                      </a:r>
+                      <a:endParaRPr lang="es-CO" sz="1600" b="0" dirty="0">
+                        <a:effectLst/>
+                        <a:latin typeface="Segoe UI" panose="020B0502040204020203" pitchFamily="34" charset="0"/>
+                        <a:ea typeface="Times New Roman" panose="02020603050405020304" pitchFamily="18" charset="0"/>
+                        <a:cs typeface="Segoe UI" panose="020B0502040204020203" pitchFamily="34" charset="0"/>
+                      </a:endParaRPr>
+                    </a:p>
+                  </a:txBody>
+                  <a:tcPr marL="39499" marR="39499" marT="0" marB="0" anchor="ctr"/>
+                </a:tc>
+                <a:tc>
+                  <a:txBody>
+                    <a:bodyPr/>
+                    <a:lstStyle/>
+                    <a:p>
+                      <a:pPr algn="ctr">
+                        <a:lnSpc>
+                          <a:spcPct val="107000"/>
+                        </a:lnSpc>
+                        <a:buNone/>
+                      </a:pPr>
+                      <a:r>
+                        <a:rPr lang="es-CO" sz="1600" b="0">
+                          <a:effectLst/>
+                          <a:latin typeface="Segoe UI" panose="020B0502040204020203" pitchFamily="34" charset="0"/>
+                          <a:cs typeface="Segoe UI" panose="020B0502040204020203" pitchFamily="34" charset="0"/>
+                        </a:rPr>
+                        <a:t>1943</a:t>
+                      </a:r>
+                      <a:endParaRPr lang="es-CO" sz="1600" b="0">
+                        <a:effectLst/>
+                        <a:latin typeface="Segoe UI" panose="020B0502040204020203" pitchFamily="34" charset="0"/>
+                        <a:ea typeface="Times New Roman" panose="02020603050405020304" pitchFamily="18" charset="0"/>
+                        <a:cs typeface="Segoe UI" panose="020B0502040204020203" pitchFamily="34" charset="0"/>
+                      </a:endParaRPr>
+                    </a:p>
+                  </a:txBody>
+                  <a:tcPr marL="39499" marR="39499" marT="0" marB="0" anchor="ctr"/>
+                </a:tc>
+                <a:tc>
+                  <a:txBody>
+                    <a:bodyPr/>
+                    <a:lstStyle/>
+                    <a:p>
+                      <a:pPr algn="ctr">
+                        <a:lnSpc>
+                          <a:spcPct val="107000"/>
+                        </a:lnSpc>
+                        <a:buNone/>
+                      </a:pPr>
+                      <a:r>
+                        <a:rPr lang="es-CO" sz="1600" b="0" dirty="0">
+                          <a:effectLst/>
+                          <a:latin typeface="Segoe UI" panose="020B0502040204020203" pitchFamily="34" charset="0"/>
+                          <a:cs typeface="Segoe UI" panose="020B0502040204020203" pitchFamily="34" charset="0"/>
+                        </a:rPr>
+                        <a:t>P=(m−0.31)/(n+0.38)</a:t>
+                      </a:r>
+                    </a:p>
+                  </a:txBody>
+                  <a:tcPr marL="39499" marR="39499" marT="0" marB="0" anchor="ctr"/>
+                </a:tc>
+                <a:extLst>
+                  <a:ext uri="{0D108BD9-81ED-4DB2-BD59-A6C34878D82A}">
+                    <a16:rowId xmlns:a16="http://schemas.microsoft.com/office/drawing/2014/main" val="4265820257"/>
+                  </a:ext>
+                </a:extLst>
+              </a:tr>
+              <a:tr h="451893">
+                <a:tc>
+                  <a:txBody>
+                    <a:bodyPr/>
+                    <a:lstStyle/>
+                    <a:p>
+                      <a:pPr algn="ctr">
+                        <a:lnSpc>
+                          <a:spcPct val="107000"/>
+                        </a:lnSpc>
+                        <a:buNone/>
+                      </a:pPr>
+                      <a:r>
+                        <a:rPr lang="es-CO" sz="1600" b="0">
+                          <a:effectLst/>
+                          <a:latin typeface="Segoe UI" panose="020B0502040204020203" pitchFamily="34" charset="0"/>
+                          <a:cs typeface="Segoe UI" panose="020B0502040204020203" pitchFamily="34" charset="0"/>
+                        </a:rPr>
+                        <a:t>EDF Chegodayev</a:t>
+                      </a:r>
+                      <a:endParaRPr lang="es-CO" sz="1600" b="0">
+                        <a:effectLst/>
+                        <a:latin typeface="Segoe UI" panose="020B0502040204020203" pitchFamily="34" charset="0"/>
+                        <a:ea typeface="Times New Roman" panose="02020603050405020304" pitchFamily="18" charset="0"/>
+                        <a:cs typeface="Segoe UI" panose="020B0502040204020203" pitchFamily="34" charset="0"/>
+                      </a:endParaRPr>
+                    </a:p>
+                  </a:txBody>
+                  <a:tcPr marL="39499" marR="39499" marT="0" marB="0" anchor="ctr"/>
+                </a:tc>
+                <a:tc>
+                  <a:txBody>
+                    <a:bodyPr/>
+                    <a:lstStyle/>
+                    <a:p>
+                      <a:pPr algn="ctr">
+                        <a:lnSpc>
+                          <a:spcPct val="107000"/>
+                        </a:lnSpc>
+                        <a:buNone/>
+                      </a:pPr>
+                      <a:r>
+                        <a:rPr lang="es-CO" sz="1600" b="0" dirty="0">
+                          <a:effectLst/>
+                          <a:latin typeface="Segoe UI" panose="020B0502040204020203" pitchFamily="34" charset="0"/>
+                          <a:cs typeface="Segoe UI" panose="020B0502040204020203" pitchFamily="34" charset="0"/>
+                        </a:rPr>
+                        <a:t>1955</a:t>
+                      </a:r>
+                      <a:endParaRPr lang="es-CO" sz="1600" b="0" dirty="0">
+                        <a:effectLst/>
+                        <a:latin typeface="Segoe UI" panose="020B0502040204020203" pitchFamily="34" charset="0"/>
+                        <a:ea typeface="Times New Roman" panose="02020603050405020304" pitchFamily="18" charset="0"/>
+                        <a:cs typeface="Segoe UI" panose="020B0502040204020203" pitchFamily="34" charset="0"/>
+                      </a:endParaRPr>
+                    </a:p>
+                  </a:txBody>
+                  <a:tcPr marL="39499" marR="39499" marT="0" marB="0" anchor="ctr"/>
+                </a:tc>
+                <a:tc>
+                  <a:txBody>
+                    <a:bodyPr/>
+                    <a:lstStyle/>
+                    <a:p>
+                      <a:pPr algn="ctr">
+                        <a:lnSpc>
+                          <a:spcPct val="107000"/>
+                        </a:lnSpc>
+                        <a:buNone/>
+                      </a:pPr>
+                      <a:r>
+                        <a:rPr lang="es-CO" sz="1600" b="0" dirty="0">
+                          <a:effectLst/>
+                          <a:latin typeface="Segoe UI" panose="020B0502040204020203" pitchFamily="34" charset="0"/>
+                          <a:cs typeface="Segoe UI" panose="020B0502040204020203" pitchFamily="34" charset="0"/>
+                        </a:rPr>
+                        <a:t>P=(m−b)/(n+1−2b)</a:t>
+                      </a:r>
+                    </a:p>
+                  </a:txBody>
+                  <a:tcPr marL="39499" marR="39499" marT="0" marB="0" anchor="ctr"/>
+                </a:tc>
+                <a:extLst>
+                  <a:ext uri="{0D108BD9-81ED-4DB2-BD59-A6C34878D82A}">
+                    <a16:rowId xmlns:a16="http://schemas.microsoft.com/office/drawing/2014/main" val="274835038"/>
+                  </a:ext>
+                </a:extLst>
+              </a:tr>
+              <a:tr h="451893">
+                <a:tc>
+                  <a:txBody>
+                    <a:bodyPr/>
+                    <a:lstStyle/>
+                    <a:p>
+                      <a:pPr algn="ctr">
+                        <a:lnSpc>
+                          <a:spcPct val="107000"/>
+                        </a:lnSpc>
+                        <a:buNone/>
+                      </a:pPr>
+                      <a:r>
+                        <a:rPr lang="es-CO" sz="1600" b="0">
+                          <a:effectLst/>
+                          <a:latin typeface="Segoe UI" panose="020B0502040204020203" pitchFamily="34" charset="0"/>
+                          <a:cs typeface="Segoe UI" panose="020B0502040204020203" pitchFamily="34" charset="0"/>
+                        </a:rPr>
+                        <a:t>EDF Blom</a:t>
+                      </a:r>
+                      <a:endParaRPr lang="es-CO" sz="1600" b="0">
+                        <a:effectLst/>
+                        <a:latin typeface="Segoe UI" panose="020B0502040204020203" pitchFamily="34" charset="0"/>
+                        <a:ea typeface="Times New Roman" panose="02020603050405020304" pitchFamily="18" charset="0"/>
+                        <a:cs typeface="Segoe UI" panose="020B0502040204020203" pitchFamily="34" charset="0"/>
+                      </a:endParaRPr>
+                    </a:p>
+                  </a:txBody>
+                  <a:tcPr marL="39499" marR="39499" marT="0" marB="0" anchor="ctr"/>
+                </a:tc>
+                <a:tc>
+                  <a:txBody>
+                    <a:bodyPr/>
+                    <a:lstStyle/>
+                    <a:p>
+                      <a:pPr algn="ctr">
+                        <a:lnSpc>
+                          <a:spcPct val="107000"/>
+                        </a:lnSpc>
+                        <a:buNone/>
+                      </a:pPr>
+                      <a:r>
+                        <a:rPr lang="es-CO" sz="1600" b="0" dirty="0">
+                          <a:effectLst/>
+                          <a:latin typeface="Segoe UI" panose="020B0502040204020203" pitchFamily="34" charset="0"/>
+                          <a:cs typeface="Segoe UI" panose="020B0502040204020203" pitchFamily="34" charset="0"/>
+                        </a:rPr>
+                        <a:t>1958</a:t>
+                      </a:r>
+                      <a:endParaRPr lang="es-CO" sz="1600" b="0" dirty="0">
+                        <a:effectLst/>
+                        <a:latin typeface="Segoe UI" panose="020B0502040204020203" pitchFamily="34" charset="0"/>
+                        <a:ea typeface="Times New Roman" panose="02020603050405020304" pitchFamily="18" charset="0"/>
+                        <a:cs typeface="Segoe UI" panose="020B0502040204020203" pitchFamily="34" charset="0"/>
+                      </a:endParaRPr>
+                    </a:p>
+                  </a:txBody>
+                  <a:tcPr marL="39499" marR="39499" marT="0" marB="0" anchor="ctr"/>
+                </a:tc>
+                <a:tc>
+                  <a:txBody>
+                    <a:bodyPr/>
+                    <a:lstStyle/>
+                    <a:p>
+                      <a:pPr algn="ctr">
+                        <a:lnSpc>
+                          <a:spcPct val="107000"/>
+                        </a:lnSpc>
+                        <a:buNone/>
+                      </a:pPr>
+                      <a:r>
+                        <a:rPr lang="es-CO" sz="1600" b="0" dirty="0">
+                          <a:effectLst/>
+                          <a:latin typeface="Segoe UI" panose="020B0502040204020203" pitchFamily="34" charset="0"/>
+                          <a:cs typeface="Segoe UI" panose="020B0502040204020203" pitchFamily="34" charset="0"/>
+                        </a:rPr>
+                        <a:t>P=(m−a)/(n+1−2a)</a:t>
+                      </a:r>
+                    </a:p>
+                  </a:txBody>
+                  <a:tcPr marL="39499" marR="39499" marT="0" marB="0" anchor="ctr"/>
+                </a:tc>
+                <a:extLst>
+                  <a:ext uri="{0D108BD9-81ED-4DB2-BD59-A6C34878D82A}">
+                    <a16:rowId xmlns:a16="http://schemas.microsoft.com/office/drawing/2014/main" val="3210172692"/>
+                  </a:ext>
+                </a:extLst>
+              </a:tr>
+              <a:tr h="451893">
+                <a:tc>
+                  <a:txBody>
+                    <a:bodyPr/>
+                    <a:lstStyle/>
+                    <a:p>
+                      <a:pPr algn="ctr">
+                        <a:lnSpc>
+                          <a:spcPct val="107000"/>
+                        </a:lnSpc>
+                        <a:buNone/>
+                      </a:pPr>
+                      <a:r>
+                        <a:rPr lang="es-CO" sz="1600" b="0">
+                          <a:effectLst/>
+                          <a:latin typeface="Segoe UI" panose="020B0502040204020203" pitchFamily="34" charset="0"/>
+                          <a:cs typeface="Segoe UI" panose="020B0502040204020203" pitchFamily="34" charset="0"/>
+                        </a:rPr>
+                        <a:t>EDF Tukey</a:t>
+                      </a:r>
+                      <a:endParaRPr lang="es-CO" sz="1600" b="0">
+                        <a:effectLst/>
+                        <a:latin typeface="Segoe UI" panose="020B0502040204020203" pitchFamily="34" charset="0"/>
+                        <a:ea typeface="Times New Roman" panose="02020603050405020304" pitchFamily="18" charset="0"/>
+                        <a:cs typeface="Segoe UI" panose="020B0502040204020203" pitchFamily="34" charset="0"/>
+                      </a:endParaRPr>
+                    </a:p>
+                  </a:txBody>
+                  <a:tcPr marL="39499" marR="39499" marT="0" marB="0" anchor="ctr"/>
+                </a:tc>
+                <a:tc>
+                  <a:txBody>
+                    <a:bodyPr/>
+                    <a:lstStyle/>
+                    <a:p>
+                      <a:pPr algn="ctr">
+                        <a:lnSpc>
+                          <a:spcPct val="107000"/>
+                        </a:lnSpc>
+                        <a:buNone/>
+                      </a:pPr>
+                      <a:r>
+                        <a:rPr lang="es-CO" sz="1600" b="0">
+                          <a:effectLst/>
+                          <a:latin typeface="Segoe UI" panose="020B0502040204020203" pitchFamily="34" charset="0"/>
+                          <a:cs typeface="Segoe UI" panose="020B0502040204020203" pitchFamily="34" charset="0"/>
+                        </a:rPr>
+                        <a:t>1962</a:t>
+                      </a:r>
+                      <a:endParaRPr lang="es-CO" sz="1600" b="0">
+                        <a:effectLst/>
+                        <a:latin typeface="Segoe UI" panose="020B0502040204020203" pitchFamily="34" charset="0"/>
+                        <a:ea typeface="Times New Roman" panose="02020603050405020304" pitchFamily="18" charset="0"/>
+                        <a:cs typeface="Segoe UI" panose="020B0502040204020203" pitchFamily="34" charset="0"/>
+                      </a:endParaRPr>
+                    </a:p>
+                  </a:txBody>
+                  <a:tcPr marL="39499" marR="39499" marT="0" marB="0" anchor="ctr"/>
+                </a:tc>
+                <a:tc>
+                  <a:txBody>
+                    <a:bodyPr/>
+                    <a:lstStyle/>
+                    <a:p>
+                      <a:pPr algn="ctr">
+                        <a:lnSpc>
+                          <a:spcPct val="107000"/>
+                        </a:lnSpc>
+                        <a:buNone/>
+                      </a:pPr>
+                      <a:r>
+                        <a:rPr lang="es-CO" sz="1600" b="0" dirty="0">
+                          <a:effectLst/>
+                          <a:latin typeface="Segoe UI" panose="020B0502040204020203" pitchFamily="34" charset="0"/>
+                          <a:cs typeface="Segoe UI" panose="020B0502040204020203" pitchFamily="34" charset="0"/>
+                        </a:rPr>
+                        <a:t>P=(m−c)/(n+1−2c)</a:t>
+                      </a:r>
+                    </a:p>
+                  </a:txBody>
+                  <a:tcPr marL="39499" marR="39499" marT="0" marB="0" anchor="ctr"/>
+                </a:tc>
+                <a:extLst>
+                  <a:ext uri="{0D108BD9-81ED-4DB2-BD59-A6C34878D82A}">
+                    <a16:rowId xmlns:a16="http://schemas.microsoft.com/office/drawing/2014/main" val="3423518961"/>
+                  </a:ext>
+                </a:extLst>
+              </a:tr>
+              <a:tr h="451893">
+                <a:tc>
+                  <a:txBody>
+                    <a:bodyPr/>
+                    <a:lstStyle/>
+                    <a:p>
+                      <a:pPr algn="ctr">
+                        <a:lnSpc>
+                          <a:spcPct val="107000"/>
+                        </a:lnSpc>
+                        <a:buNone/>
+                      </a:pPr>
+                      <a:r>
+                        <a:rPr lang="es-CO" sz="1600" b="0">
+                          <a:effectLst/>
+                          <a:latin typeface="Segoe UI" panose="020B0502040204020203" pitchFamily="34" charset="0"/>
+                          <a:cs typeface="Segoe UI" panose="020B0502040204020203" pitchFamily="34" charset="0"/>
+                        </a:rPr>
+                        <a:t>EDF Gringorten</a:t>
+                      </a:r>
+                      <a:endParaRPr lang="es-CO" sz="1600" b="0">
+                        <a:effectLst/>
+                        <a:latin typeface="Segoe UI" panose="020B0502040204020203" pitchFamily="34" charset="0"/>
+                        <a:ea typeface="Times New Roman" panose="02020603050405020304" pitchFamily="18" charset="0"/>
+                        <a:cs typeface="Segoe UI" panose="020B0502040204020203" pitchFamily="34" charset="0"/>
+                      </a:endParaRPr>
+                    </a:p>
+                  </a:txBody>
+                  <a:tcPr marL="39499" marR="39499" marT="0" marB="0" anchor="ctr"/>
+                </a:tc>
+                <a:tc>
+                  <a:txBody>
+                    <a:bodyPr/>
+                    <a:lstStyle/>
+                    <a:p>
+                      <a:pPr algn="ctr">
+                        <a:lnSpc>
+                          <a:spcPct val="107000"/>
+                        </a:lnSpc>
+                        <a:buNone/>
+                      </a:pPr>
+                      <a:r>
+                        <a:rPr lang="es-CO" sz="1600" b="0">
+                          <a:effectLst/>
+                          <a:latin typeface="Segoe UI" panose="020B0502040204020203" pitchFamily="34" charset="0"/>
+                          <a:cs typeface="Segoe UI" panose="020B0502040204020203" pitchFamily="34" charset="0"/>
+                        </a:rPr>
+                        <a:t>1963</a:t>
+                      </a:r>
+                      <a:endParaRPr lang="es-CO" sz="1600" b="0">
+                        <a:effectLst/>
+                        <a:latin typeface="Segoe UI" panose="020B0502040204020203" pitchFamily="34" charset="0"/>
+                        <a:ea typeface="Times New Roman" panose="02020603050405020304" pitchFamily="18" charset="0"/>
+                        <a:cs typeface="Segoe UI" panose="020B0502040204020203" pitchFamily="34" charset="0"/>
+                      </a:endParaRPr>
+                    </a:p>
+                  </a:txBody>
+                  <a:tcPr marL="39499" marR="39499" marT="0" marB="0" anchor="ctr"/>
+                </a:tc>
+                <a:tc>
+                  <a:txBody>
+                    <a:bodyPr/>
+                    <a:lstStyle/>
+                    <a:p>
+                      <a:pPr algn="ctr">
+                        <a:lnSpc>
+                          <a:spcPct val="107000"/>
+                        </a:lnSpc>
+                        <a:buNone/>
+                      </a:pPr>
+                      <a:r>
+                        <a:rPr lang="es-CO" sz="1600" b="0" dirty="0">
+                          <a:effectLst/>
+                          <a:latin typeface="Segoe UI" panose="020B0502040204020203" pitchFamily="34" charset="0"/>
+                          <a:cs typeface="Segoe UI" panose="020B0502040204020203" pitchFamily="34" charset="0"/>
+                        </a:rPr>
+                        <a:t>P=(m−a)/(n+1−2a)</a:t>
+                      </a:r>
+                    </a:p>
+                  </a:txBody>
+                  <a:tcPr marL="39499" marR="39499" marT="0" marB="0" anchor="ctr"/>
+                </a:tc>
+                <a:extLst>
+                  <a:ext uri="{0D108BD9-81ED-4DB2-BD59-A6C34878D82A}">
+                    <a16:rowId xmlns:a16="http://schemas.microsoft.com/office/drawing/2014/main" val="1908966553"/>
+                  </a:ext>
+                </a:extLst>
+              </a:tr>
+              <a:tr h="520755">
+                <a:tc>
+                  <a:txBody>
+                    <a:bodyPr/>
+                    <a:lstStyle/>
+                    <a:p>
+                      <a:pPr algn="ctr">
+                        <a:lnSpc>
+                          <a:spcPct val="107000"/>
+                        </a:lnSpc>
+                        <a:buNone/>
+                      </a:pPr>
+                      <a:r>
+                        <a:rPr lang="es-CO" sz="1600" b="0">
+                          <a:effectLst/>
+                          <a:latin typeface="Segoe UI" panose="020B0502040204020203" pitchFamily="34" charset="0"/>
+                          <a:cs typeface="Segoe UI" panose="020B0502040204020203" pitchFamily="34" charset="0"/>
+                        </a:rPr>
+                        <a:t>EDF Filliben</a:t>
+                      </a:r>
+                      <a:endParaRPr lang="es-CO" sz="1600" b="0">
+                        <a:effectLst/>
+                        <a:latin typeface="Segoe UI" panose="020B0502040204020203" pitchFamily="34" charset="0"/>
+                        <a:ea typeface="Times New Roman" panose="02020603050405020304" pitchFamily="18" charset="0"/>
+                        <a:cs typeface="Segoe UI" panose="020B0502040204020203" pitchFamily="34" charset="0"/>
+                      </a:endParaRPr>
+                    </a:p>
+                  </a:txBody>
+                  <a:tcPr marL="39499" marR="39499" marT="0" marB="0" anchor="ctr"/>
+                </a:tc>
+                <a:tc>
+                  <a:txBody>
+                    <a:bodyPr/>
+                    <a:lstStyle/>
+                    <a:p>
+                      <a:pPr algn="ctr">
+                        <a:lnSpc>
+                          <a:spcPct val="107000"/>
+                        </a:lnSpc>
+                        <a:buNone/>
+                      </a:pPr>
+                      <a:r>
+                        <a:rPr lang="es-CO" sz="1600" b="0">
+                          <a:effectLst/>
+                          <a:latin typeface="Segoe UI" panose="020B0502040204020203" pitchFamily="34" charset="0"/>
+                          <a:cs typeface="Segoe UI" panose="020B0502040204020203" pitchFamily="34" charset="0"/>
+                        </a:rPr>
+                        <a:t>1975</a:t>
+                      </a:r>
+                      <a:endParaRPr lang="es-CO" sz="1600" b="0">
+                        <a:effectLst/>
+                        <a:latin typeface="Segoe UI" panose="020B0502040204020203" pitchFamily="34" charset="0"/>
+                        <a:ea typeface="Times New Roman" panose="02020603050405020304" pitchFamily="18" charset="0"/>
+                        <a:cs typeface="Segoe UI" panose="020B0502040204020203" pitchFamily="34" charset="0"/>
+                      </a:endParaRPr>
+                    </a:p>
+                  </a:txBody>
+                  <a:tcPr marL="39499" marR="39499" marT="0" marB="0" anchor="ctr"/>
+                </a:tc>
+                <a:tc>
+                  <a:txBody>
+                    <a:bodyPr/>
+                    <a:lstStyle/>
+                    <a:p>
+                      <a:pPr algn="ctr">
+                        <a:lnSpc>
+                          <a:spcPct val="107000"/>
+                        </a:lnSpc>
+                        <a:buNone/>
+                      </a:pPr>
+                      <a:r>
+                        <a:rPr lang="es-CO" sz="1600" b="0" dirty="0">
+                          <a:effectLst/>
+                          <a:latin typeface="Segoe UI" panose="020B0502040204020203" pitchFamily="34" charset="0"/>
+                          <a:cs typeface="Segoe UI" panose="020B0502040204020203" pitchFamily="34" charset="0"/>
+                        </a:rPr>
+                        <a:t>P=(m−0.3175)/(n+0.365)</a:t>
+                      </a:r>
+                    </a:p>
+                  </a:txBody>
+                  <a:tcPr marL="39499" marR="39499" marT="0" marB="0" anchor="ctr"/>
+                </a:tc>
+                <a:extLst>
+                  <a:ext uri="{0D108BD9-81ED-4DB2-BD59-A6C34878D82A}">
+                    <a16:rowId xmlns:a16="http://schemas.microsoft.com/office/drawing/2014/main" val="1101634277"/>
+                  </a:ext>
+                </a:extLst>
+              </a:tr>
+              <a:tr h="451893">
+                <a:tc>
+                  <a:txBody>
+                    <a:bodyPr/>
+                    <a:lstStyle/>
+                    <a:p>
+                      <a:pPr algn="ctr">
+                        <a:lnSpc>
+                          <a:spcPct val="107000"/>
+                        </a:lnSpc>
+                        <a:buNone/>
+                      </a:pPr>
+                      <a:r>
+                        <a:rPr lang="es-CO" sz="1600" b="0">
+                          <a:effectLst/>
+                          <a:latin typeface="Segoe UI" panose="020B0502040204020203" pitchFamily="34" charset="0"/>
+                          <a:cs typeface="Segoe UI" panose="020B0502040204020203" pitchFamily="34" charset="0"/>
+                        </a:rPr>
+                        <a:t>EDF Jenkinson</a:t>
+                      </a:r>
+                      <a:endParaRPr lang="es-CO" sz="1600" b="0">
+                        <a:effectLst/>
+                        <a:latin typeface="Segoe UI" panose="020B0502040204020203" pitchFamily="34" charset="0"/>
+                        <a:ea typeface="Times New Roman" panose="02020603050405020304" pitchFamily="18" charset="0"/>
+                        <a:cs typeface="Segoe UI" panose="020B0502040204020203" pitchFamily="34" charset="0"/>
+                      </a:endParaRPr>
+                    </a:p>
+                  </a:txBody>
+                  <a:tcPr marL="39499" marR="39499" marT="0" marB="0" anchor="ctr"/>
+                </a:tc>
+                <a:tc>
+                  <a:txBody>
+                    <a:bodyPr/>
+                    <a:lstStyle/>
+                    <a:p>
+                      <a:pPr algn="ctr">
+                        <a:lnSpc>
+                          <a:spcPct val="107000"/>
+                        </a:lnSpc>
+                        <a:buNone/>
+                      </a:pPr>
+                      <a:r>
+                        <a:rPr lang="es-CO" sz="1600" b="0">
+                          <a:effectLst/>
+                          <a:latin typeface="Segoe UI" panose="020B0502040204020203" pitchFamily="34" charset="0"/>
+                          <a:cs typeface="Segoe UI" panose="020B0502040204020203" pitchFamily="34" charset="0"/>
+                        </a:rPr>
+                        <a:t>1977</a:t>
+                      </a:r>
+                      <a:endParaRPr lang="es-CO" sz="1600" b="0">
+                        <a:effectLst/>
+                        <a:latin typeface="Segoe UI" panose="020B0502040204020203" pitchFamily="34" charset="0"/>
+                        <a:ea typeface="Times New Roman" panose="02020603050405020304" pitchFamily="18" charset="0"/>
+                        <a:cs typeface="Segoe UI" panose="020B0502040204020203" pitchFamily="34" charset="0"/>
+                      </a:endParaRPr>
+                    </a:p>
+                  </a:txBody>
+                  <a:tcPr marL="39499" marR="39499" marT="0" marB="0" anchor="ctr"/>
+                </a:tc>
+                <a:tc>
+                  <a:txBody>
+                    <a:bodyPr/>
+                    <a:lstStyle/>
+                    <a:p>
+                      <a:pPr algn="ctr">
+                        <a:lnSpc>
+                          <a:spcPct val="107000"/>
+                        </a:lnSpc>
+                        <a:buNone/>
+                      </a:pPr>
+                      <a:r>
+                        <a:rPr lang="es-CO" sz="1600" b="0" dirty="0">
+                          <a:effectLst/>
+                          <a:latin typeface="Segoe UI" panose="020B0502040204020203" pitchFamily="34" charset="0"/>
+                          <a:cs typeface="Segoe UI" panose="020B0502040204020203" pitchFamily="34" charset="0"/>
+                        </a:rPr>
+                        <a:t>P=(m−a)/(</a:t>
+                      </a:r>
+                      <a:r>
+                        <a:rPr lang="es-CO" sz="1600" b="0" dirty="0" err="1">
+                          <a:effectLst/>
+                          <a:latin typeface="Segoe UI" panose="020B0502040204020203" pitchFamily="34" charset="0"/>
+                          <a:cs typeface="Segoe UI" panose="020B0502040204020203" pitchFamily="34" charset="0"/>
+                        </a:rPr>
+                        <a:t>n+b</a:t>
+                      </a:r>
+                      <a:r>
+                        <a:rPr lang="es-CO" sz="1600" b="0" dirty="0">
+                          <a:effectLst/>
+                          <a:latin typeface="Segoe UI" panose="020B0502040204020203" pitchFamily="34" charset="0"/>
+                          <a:cs typeface="Segoe UI" panose="020B0502040204020203" pitchFamily="34" charset="0"/>
+                        </a:rPr>
+                        <a:t>)</a:t>
+                      </a:r>
+                      <a:endParaRPr lang="es-CO" sz="1600" b="0" dirty="0">
+                        <a:effectLst/>
+                        <a:latin typeface="Segoe UI" panose="020B0502040204020203" pitchFamily="34" charset="0"/>
+                        <a:ea typeface="Times New Roman" panose="02020603050405020304" pitchFamily="18" charset="0"/>
+                        <a:cs typeface="Segoe UI" panose="020B0502040204020203" pitchFamily="34" charset="0"/>
+                      </a:endParaRPr>
+                    </a:p>
+                  </a:txBody>
+                  <a:tcPr marL="39499" marR="39499" marT="0" marB="0" anchor="ctr"/>
+                </a:tc>
+                <a:extLst>
+                  <a:ext uri="{0D108BD9-81ED-4DB2-BD59-A6C34878D82A}">
+                    <a16:rowId xmlns:a16="http://schemas.microsoft.com/office/drawing/2014/main" val="412965114"/>
+                  </a:ext>
+                </a:extLst>
+              </a:tr>
+              <a:tr h="451893">
+                <a:tc>
+                  <a:txBody>
+                    <a:bodyPr/>
+                    <a:lstStyle/>
+                    <a:p>
+                      <a:pPr algn="ctr">
+                        <a:lnSpc>
+                          <a:spcPct val="107000"/>
+                        </a:lnSpc>
+                        <a:buNone/>
+                      </a:pPr>
+                      <a:r>
+                        <a:rPr lang="es-CO" sz="1600" b="0">
+                          <a:effectLst/>
+                          <a:latin typeface="Segoe UI" panose="020B0502040204020203" pitchFamily="34" charset="0"/>
+                          <a:cs typeface="Segoe UI" panose="020B0502040204020203" pitchFamily="34" charset="0"/>
+                        </a:rPr>
+                        <a:t>EDF Cunnane</a:t>
+                      </a:r>
+                      <a:endParaRPr lang="es-CO" sz="1600" b="0">
+                        <a:effectLst/>
+                        <a:latin typeface="Segoe UI" panose="020B0502040204020203" pitchFamily="34" charset="0"/>
+                        <a:ea typeface="Times New Roman" panose="02020603050405020304" pitchFamily="18" charset="0"/>
+                        <a:cs typeface="Segoe UI" panose="020B0502040204020203" pitchFamily="34" charset="0"/>
+                      </a:endParaRPr>
+                    </a:p>
+                  </a:txBody>
+                  <a:tcPr marL="39499" marR="39499" marT="0" marB="0" anchor="ctr"/>
+                </a:tc>
+                <a:tc>
+                  <a:txBody>
+                    <a:bodyPr/>
+                    <a:lstStyle/>
+                    <a:p>
+                      <a:pPr algn="ctr">
+                        <a:lnSpc>
+                          <a:spcPct val="107000"/>
+                        </a:lnSpc>
+                        <a:buNone/>
+                      </a:pPr>
+                      <a:r>
+                        <a:rPr lang="es-CO" sz="1600" b="0">
+                          <a:effectLst/>
+                          <a:latin typeface="Segoe UI" panose="020B0502040204020203" pitchFamily="34" charset="0"/>
+                          <a:cs typeface="Segoe UI" panose="020B0502040204020203" pitchFamily="34" charset="0"/>
+                        </a:rPr>
+                        <a:t>1978</a:t>
+                      </a:r>
+                      <a:endParaRPr lang="es-CO" sz="1600" b="0">
+                        <a:effectLst/>
+                        <a:latin typeface="Segoe UI" panose="020B0502040204020203" pitchFamily="34" charset="0"/>
+                        <a:ea typeface="Times New Roman" panose="02020603050405020304" pitchFamily="18" charset="0"/>
+                        <a:cs typeface="Segoe UI" panose="020B0502040204020203" pitchFamily="34" charset="0"/>
+                      </a:endParaRPr>
+                    </a:p>
+                  </a:txBody>
+                  <a:tcPr marL="39499" marR="39499" marT="0" marB="0" anchor="ctr"/>
+                </a:tc>
+                <a:tc>
+                  <a:txBody>
+                    <a:bodyPr/>
+                    <a:lstStyle/>
+                    <a:p>
+                      <a:pPr algn="ctr">
+                        <a:lnSpc>
+                          <a:spcPct val="107000"/>
+                        </a:lnSpc>
+                        <a:buNone/>
+                      </a:pPr>
+                      <a:r>
+                        <a:rPr lang="es-CO" sz="1600" b="0" dirty="0">
+                          <a:effectLst/>
+                          <a:latin typeface="Segoe UI" panose="020B0502040204020203" pitchFamily="34" charset="0"/>
+                          <a:cs typeface="Segoe UI" panose="020B0502040204020203" pitchFamily="34" charset="0"/>
+                        </a:rPr>
+                        <a:t>P=(m−b)/(n+1−2b)</a:t>
+                      </a:r>
+                      <a:endParaRPr lang="es-CO" sz="1600" b="0" dirty="0">
+                        <a:effectLst/>
+                        <a:latin typeface="Segoe UI" panose="020B0502040204020203" pitchFamily="34" charset="0"/>
+                        <a:ea typeface="Times New Roman" panose="02020603050405020304" pitchFamily="18" charset="0"/>
+                        <a:cs typeface="Segoe UI" panose="020B0502040204020203" pitchFamily="34" charset="0"/>
+                      </a:endParaRPr>
+                    </a:p>
+                  </a:txBody>
+                  <a:tcPr marL="39499" marR="39499" marT="0" marB="0" anchor="ctr"/>
+                </a:tc>
+                <a:extLst>
+                  <a:ext uri="{0D108BD9-81ED-4DB2-BD59-A6C34878D82A}">
+                    <a16:rowId xmlns:a16="http://schemas.microsoft.com/office/drawing/2014/main" val="3833936200"/>
+                  </a:ext>
+                </a:extLst>
+              </a:tr>
+              <a:tr h="451893">
+                <a:tc>
+                  <a:txBody>
+                    <a:bodyPr/>
+                    <a:lstStyle/>
+                    <a:p>
+                      <a:pPr algn="ctr">
+                        <a:lnSpc>
+                          <a:spcPct val="107000"/>
+                        </a:lnSpc>
+                        <a:buNone/>
+                      </a:pPr>
+                      <a:r>
+                        <a:rPr lang="es-CO" sz="1600" b="0">
+                          <a:effectLst/>
+                          <a:latin typeface="Segoe UI" panose="020B0502040204020203" pitchFamily="34" charset="0"/>
+                          <a:cs typeface="Segoe UI" panose="020B0502040204020203" pitchFamily="34" charset="0"/>
+                        </a:rPr>
+                        <a:t>EDF Adamowski</a:t>
+                      </a:r>
+                      <a:endParaRPr lang="es-CO" sz="1600" b="0">
+                        <a:effectLst/>
+                        <a:latin typeface="Segoe UI" panose="020B0502040204020203" pitchFamily="34" charset="0"/>
+                        <a:ea typeface="Times New Roman" panose="02020603050405020304" pitchFamily="18" charset="0"/>
+                        <a:cs typeface="Segoe UI" panose="020B0502040204020203" pitchFamily="34" charset="0"/>
+                      </a:endParaRPr>
+                    </a:p>
+                  </a:txBody>
+                  <a:tcPr marL="39499" marR="39499" marT="0" marB="0" anchor="ctr"/>
+                </a:tc>
+                <a:tc>
+                  <a:txBody>
+                    <a:bodyPr/>
+                    <a:lstStyle/>
+                    <a:p>
+                      <a:pPr algn="ctr">
+                        <a:lnSpc>
+                          <a:spcPct val="107000"/>
+                        </a:lnSpc>
+                        <a:buNone/>
+                      </a:pPr>
+                      <a:r>
+                        <a:rPr lang="es-CO" sz="1600" b="0">
+                          <a:effectLst/>
+                          <a:latin typeface="Segoe UI" panose="020B0502040204020203" pitchFamily="34" charset="0"/>
+                          <a:cs typeface="Segoe UI" panose="020B0502040204020203" pitchFamily="34" charset="0"/>
+                        </a:rPr>
+                        <a:t>1981</a:t>
+                      </a:r>
+                      <a:endParaRPr lang="es-CO" sz="1600" b="0">
+                        <a:effectLst/>
+                        <a:latin typeface="Segoe UI" panose="020B0502040204020203" pitchFamily="34" charset="0"/>
+                        <a:ea typeface="Times New Roman" panose="02020603050405020304" pitchFamily="18" charset="0"/>
+                        <a:cs typeface="Segoe UI" panose="020B0502040204020203" pitchFamily="34" charset="0"/>
+                      </a:endParaRPr>
+                    </a:p>
+                  </a:txBody>
+                  <a:tcPr marL="39499" marR="39499" marT="0" marB="0" anchor="ctr"/>
+                </a:tc>
+                <a:tc>
+                  <a:txBody>
+                    <a:bodyPr/>
+                    <a:lstStyle/>
+                    <a:p>
+                      <a:pPr algn="ctr">
+                        <a:lnSpc>
+                          <a:spcPct val="107000"/>
+                        </a:lnSpc>
+                        <a:buNone/>
+                      </a:pPr>
+                      <a:r>
+                        <a:rPr lang="es-CO" sz="1600" b="0" dirty="0">
+                          <a:effectLst/>
+                          <a:latin typeface="Segoe UI" panose="020B0502040204020203" pitchFamily="34" charset="0"/>
+                          <a:cs typeface="Segoe UI" panose="020B0502040204020203" pitchFamily="34" charset="0"/>
+                        </a:rPr>
+                        <a:t>P=(m−0.25)/(n+0.5)</a:t>
+                      </a:r>
+                      <a:endParaRPr lang="es-CO" sz="1600" b="0" dirty="0">
+                        <a:effectLst/>
+                        <a:latin typeface="Segoe UI" panose="020B0502040204020203" pitchFamily="34" charset="0"/>
+                        <a:ea typeface="Times New Roman" panose="02020603050405020304" pitchFamily="18" charset="0"/>
+                        <a:cs typeface="Segoe UI" panose="020B0502040204020203" pitchFamily="34" charset="0"/>
+                      </a:endParaRPr>
+                    </a:p>
+                  </a:txBody>
+                  <a:tcPr marL="39499" marR="39499" marT="0" marB="0" anchor="ctr"/>
+                </a:tc>
+                <a:extLst>
+                  <a:ext uri="{0D108BD9-81ED-4DB2-BD59-A6C34878D82A}">
+                    <a16:rowId xmlns:a16="http://schemas.microsoft.com/office/drawing/2014/main" val="143140362"/>
+                  </a:ext>
+                </a:extLst>
+              </a:tr>
+            </a:tbl>
+          </a:graphicData>
+        </a:graphic>
+      </p:graphicFrame>
+    </p:spTree>
+    <p:extLst>
+      <p:ext uri="{BB962C8B-B14F-4D97-AF65-F5344CB8AC3E}">
+        <p14:creationId xmlns:p14="http://schemas.microsoft.com/office/powerpoint/2010/main" val="2582259135"/>
+      </p:ext>
+    </p:extLst>
+  </p:cSld>
+  <p:clrMapOvr>
+    <a:masterClrMapping/>
+  </p:clrMapOvr>
+</p:sld>
+</file>
+
+<file path=ppt/slides/slide8.xml><?xml version="1.0" encoding="utf-8"?>
 <p:sld xmlns:a="http://schemas.openxmlformats.org/drawingml/2006/main" xmlns:r="http://schemas.openxmlformats.org/officeDocument/2006/relationships" xmlns:p="http://schemas.openxmlformats.org/presentationml/2006/main">
   <p:cSld>
     <p:spTree>
@@ -7610,6 +12866,49 @@
           </a:p>
         </p:txBody>
       </p:sp>
+      <p:sp>
+        <p:nvSpPr>
+          <p:cNvPr id="3" name="TextBox 2">
+            <a:extLst>
+              <a:ext uri="{FF2B5EF4-FFF2-40B4-BE49-F238E27FC236}">
+                <a16:creationId xmlns:a16="http://schemas.microsoft.com/office/drawing/2014/main" id="{FF6A99B3-2C5C-B0DE-EF28-AE54D1F173E3}"/>
+              </a:ext>
+            </a:extLst>
+          </p:cNvPr>
+          <p:cNvSpPr txBox="1"/>
+          <p:nvPr/>
+        </p:nvSpPr>
+        <p:spPr>
+          <a:xfrm>
+            <a:off x="0" y="6581001"/>
+            <a:ext cx="12192000" cy="276999"/>
+          </a:xfrm>
+          <a:prstGeom prst="rect">
+            <a:avLst/>
+          </a:prstGeom>
+          <a:noFill/>
+        </p:spPr>
+        <p:txBody>
+          <a:bodyPr wrap="square">
+            <a:spAutoFit/>
+          </a:bodyPr>
+          <a:lstStyle/>
+          <a:p>
+            <a:r>
+              <a:rPr lang="es-CO" sz="1200" dirty="0">
+                <a:solidFill>
+                  <a:schemeClr val="bg1">
+                    <a:lumMod val="50000"/>
+                  </a:schemeClr>
+                </a:solidFill>
+                <a:latin typeface="+mj-lt"/>
+                <a:cs typeface="Segoe UI" panose="020B0502040204020203" pitchFamily="34" charset="0"/>
+              </a:rPr>
+              <a:t>Estudio y Análisis de la Precipitación Máxima en 24 Horas (Pmax24h) en la Red de Estaciones Climatológicas Automáticas de Colombia</a:t>
+            </a:r>
+          </a:p>
+        </p:txBody>
+      </p:sp>
     </p:spTree>
     <p:extLst>
       <p:ext uri="{BB962C8B-B14F-4D97-AF65-F5344CB8AC3E}">
@@ -7623,7 +12922,7 @@
 </p:sld>
 </file>
 
-<file path=ppt/slides/slide5.xml><?xml version="1.0" encoding="utf-8"?>
+<file path=ppt/slides/slide9.xml><?xml version="1.0" encoding="utf-8"?>
 <p:sld xmlns:a="http://schemas.openxmlformats.org/drawingml/2006/main" xmlns:r="http://schemas.openxmlformats.org/officeDocument/2006/relationships" xmlns:p="http://schemas.openxmlformats.org/presentationml/2006/main">
   <p:cSld>
     <p:spTree>
